--- a/NYC Taxi Fares — 8 Questions.pptx
+++ b/NYC Taxi Fares — 8 Questions.pptx
@@ -18,9 +18,10 @@
     <p:sldId id="266" r:id="rId12"/>
     <p:sldId id="267" r:id="rId13"/>
     <p:sldId id="268" r:id="rId14"/>
+    <p:sldId id="269" r:id="rId15"/>
   </p:sldIdLst>
   <p:notesMasterIdLst>
-    <p:notesMasterId r:id="rId15"/>
+    <p:notesMasterId r:id="rId16"/>
   </p:notesMasterIdLst>
   <p:sldSz cx="12192000" cy="6858000"/>
   <p:notesSz cx="6858000" cy="12192000"/>
@@ -602,7 +603,7 @@
           <a:p>
             <a:r>
               <a:rPr lang="en-US" dirty="0"/>
-              <a:t>Demand builds through the day and peaks in the evening, 6–10 PM, topping out at about 31,000 requests at 7 PM. It bottoms out at 5 AM (~5,000). Compare with Q3: the quietest hour (5 AM) is also the most expensive one on average.</a:t>
+              <a:t>After cleaning, distance correlates 0.78 (Pearson) and 0.86 (Spearman) with fare, up from 0.61 on raw data. Next best: distance to JFK (Spearman −0.19) and year (0.15). Every time feature is below 0.03.</a:t>
             </a:r>
             <a:endParaRPr lang="en-US" dirty="0"/>
           </a:p>
@@ -690,7 +691,7 @@
           <a:p>
             <a:r>
               <a:rPr lang="en-US" dirty="0"/>
-              <a:t>Median trip distance is about 2 km under all five conditions: sunny, cloudy, rainy, windy and stormy. People travel the same distances whatever the weather.</a:t>
+              <a:t>Demand peaks in the evening, at 30,298 trips at 7 PM, and bottoms out at 4,789 at 5 AM. Note the dip at 4 PM (19,841). The busiest hour has the lowest mean fare; the quietest has the highest.</a:t>
             </a:r>
             <a:endParaRPr lang="en-US" dirty="0"/>
           </a:p>
@@ -778,7 +779,7 @@
           <a:p>
             <a:r>
               <a:rPr lang="en-US" dirty="0"/>
-              <a:t>Fare vs. distance to JFK shows no clear trend: fares vary widely at every distance. Proximity to JFK alone is not a main driver of fare. Caveat: the chart is dominated by bad coordinates (JFK distances in the thousands of km); re-check after cleaning.</a:t>
+              <a:t>Median trip distance is 2.16–2.19 km under all five weather conditions. Means are 3.38–3.40 km, with ~96–97k trips per condition. Weather does not change trip length.</a:t>
             </a:r>
             <a:endParaRPr lang="en-US" dirty="0"/>
           </a:p>
@@ -866,7 +867,7 @@
           <a:p>
             <a:r>
               <a:rPr lang="en-US" dirty="0"/>
-              <a:t>Wrap-up: one strong numeric driver, clear time-of-day patterns, flat categorical features, and a cleaning step needed before any modelling.</a:t>
+              <a:t>Pickups within 2 km of JFK, LGA or EWR have a median fare of 34.27, versus 8.10 for other trips. They cost more because they are longer (10.87 km vs 2.11 km). Per km they are cheaper: 2.83 vs 3.86.</a:t>
             </a:r>
             <a:endParaRPr lang="en-US" dirty="0"/>
           </a:p>
@@ -890,6 +891,94 @@
             <a:fld id="{F7021451-1387-4CA6-816F-3879F97B5CBC}" type="slidenum">
               <a:rPr lang="en-US"/>
               <a:t>13</a:t>
+            </a:fld>
+            <a:endParaRPr lang="en-US"/>
+          </a:p>
+        </p:txBody>
+      </p:sp>
+    </p:spTree>
+    <p:extLst>
+      <p:ext uri="{BB962C8B-B14F-4D97-AF65-F5344CB8AC3E}">
+        <p14:creationId xmlns:p14="http://schemas.microsoft.com/office/powerpoint/2010/main" val="1024086991"/>
+      </p:ext>
+    </p:extLst>
+  </p:cSld>
+  <p:clrMapOvr>
+    <a:masterClrMapping/>
+  </p:clrMapOvr>
+</p:notes>
+</file>
+
+<file path=ppt/notesSlides/notesSlide14.xml><?xml version="1.0" encoding="utf-8"?>
+<p:notes xmlns:a="http://schemas.openxmlformats.org/drawingml/2006/main" xmlns:r="http://schemas.openxmlformats.org/officeDocument/2006/relationships" xmlns:p="http://schemas.openxmlformats.org/presentationml/2006/main">
+  <p:cSld>
+    <p:spTree>
+      <p:nvGrpSpPr>
+        <p:cNvPr id="1" name=""/>
+        <p:cNvGrpSpPr/>
+        <p:nvPr/>
+      </p:nvGrpSpPr>
+      <p:grpSpPr>
+        <a:xfrm>
+          <a:off x="0" y="0"/>
+          <a:ext cx="0" cy="0"/>
+          <a:chOff x="0" y="0"/>
+          <a:chExt cx="0" cy="0"/>
+        </a:xfrm>
+      </p:grpSpPr>
+      <p:sp>
+        <p:nvSpPr>
+          <p:cNvPr id="2" name="Slide Image Placeholder 1"/>
+          <p:cNvSpPr>
+            <a:spLocks noGrp="1" noRot="1" noChangeAspect="1"/>
+          </p:cNvSpPr>
+          <p:nvPr>
+            <p:ph type="sldImg"/>
+          </p:nvPr>
+        </p:nvSpPr>
+        <p:spPr/>
+      </p:sp>
+      <p:sp>
+        <p:nvSpPr>
+          <p:cNvPr id="3" name="Notes Placeholder 2"/>
+          <p:cNvSpPr>
+            <a:spLocks noGrp="1"/>
+          </p:cNvSpPr>
+          <p:nvPr>
+            <p:ph type="body" idx="1"/>
+          </p:nvPr>
+        </p:nvSpPr>
+        <p:spPr/>
+        <p:txBody>
+          <a:bodyPr/>
+          <a:lstStyle/>
+          <a:p>
+            <a:r>
+              <a:rPr lang="en-US" dirty="0"/>
+              <a:t>Wrap-up: after cleaning 3.4% of invalid rows, distance explains most of the fare. Time of day and airport pickups matter through trip length. The categorical labels are flat.</a:t>
+            </a:r>
+            <a:endParaRPr lang="en-US" dirty="0"/>
+          </a:p>
+        </p:txBody>
+      </p:sp>
+      <p:sp>
+        <p:nvSpPr>
+          <p:cNvPr id="4" name="Slide Number Placeholder 3"/>
+          <p:cNvSpPr>
+            <a:spLocks noGrp="1"/>
+          </p:cNvSpPr>
+          <p:nvPr>
+            <p:ph type="sldNum" sz="quarter" idx="10"/>
+          </p:nvPr>
+        </p:nvSpPr>
+        <p:spPr/>
+        <p:txBody>
+          <a:bodyPr/>
+          <a:lstStyle/>
+          <a:p>
+            <a:fld id="{F7021451-1387-4CA6-816F-3879F97B5CBC}" type="slidenum">
+              <a:rPr lang="en-US"/>
+              <a:t>14</a:t>
             </a:fld>
             <a:endParaRPr lang="en-US"/>
           </a:p>
@@ -1042,7 +1131,7 @@
           <a:p>
             <a:r>
               <a:rPr lang="en-US" dirty="0"/>
-              <a:t>These outliers were detected but not removed before answering the questions, so they add noise to several charts, especially Q7 and Q8.</a:t>
+              <a:t>All of these rows are removed before answering the eight questions. Zero distance and zero coordinates are the big ones and overlap heavily.</a:t>
             </a:r>
             <a:endParaRPr lang="en-US" dirty="0"/>
           </a:p>
@@ -1130,7 +1219,7 @@
           <a:p>
             <a:r>
               <a:rPr lang="en-US" dirty="0"/>
-              <a:t>The short version: only distance clearly moves the fare. Time of day shapes both fares and demand. Car condition, traffic, weather and passenger count barely matter.</a:t>
+              <a:t>Only 3.4% of the data was lost. The rules overlap, so the total removed is smaller than the sum of the individual counts on the previous slide.</a:t>
             </a:r>
             <a:endParaRPr lang="en-US" dirty="0"/>
           </a:p>
@@ -1218,7 +1307,7 @@
           <a:p>
             <a:r>
               <a:rPr lang="en-US" dirty="0"/>
-              <a:t>Fares spread similarly whether 1 or 6 people ride. The correlation between passenger_count and fare_amount is just 0.01. Fare is priced per trip, not per person — passenger count adds almost no information.</a:t>
+              <a:t>The short version: distance drives the fare. Early-morning and airport trips cost more because they are longer. Car condition, traffic, weather and passenger count barely matter.</a:t>
             </a:r>
             <a:endParaRPr lang="en-US" dirty="0"/>
           </a:p>
@@ -1306,7 +1395,7 @@
           <a:p>
             <a:r>
               <a:rPr lang="en-US" dirty="0"/>
-              <a:t>Median fare and spread are nearly identical across Bad, Good, Very Good and Excellent cars (~125k trips each). Car condition is not a pricing factor in this data.</a:t>
+              <a:t>Median fare is 8.5 for 1 to 5 passengers and 9.0 for 6. The correlation is just 0.015. Fares are charged per trip, not per person. The small bump for 6 passengers comes from only ~10k trips.</a:t>
             </a:r>
             <a:endParaRPr lang="en-US" dirty="0"/>
           </a:p>
@@ -1394,7 +1483,7 @@
           <a:p>
             <a:r>
               <a:rPr lang="en-US" dirty="0"/>
-              <a:t>The average fare peaks at about 15 at 5 AM, far above the rest of the day. The lowest average, about 10.6, is at 7 PM. Note: the notebook text says fares peak at midnight and are lowest at 4–6 AM; the chart shows the opposite for early morning.</a:t>
+              <a:t>All four conditions share a median fare of 8.5, and their means differ by under 0.1 (11.30 to 11.39). About 120k trips per condition. Car condition is not a pricing factor.</a:t>
             </a:r>
             <a:endParaRPr lang="en-US" dirty="0"/>
           </a:p>
@@ -1482,7 +1571,7 @@
           <a:p>
             <a:r>
               <a:rPr lang="en-US" dirty="0"/>
-              <a:t>Flow, Dense and Congested traffic show the same median fare and a similar spread (~166k trips each). Traffic labels do not shift fares in this dataset.</a:t>
+              <a:t>Mean fare peaks at 15.14 at 5 AM and is lowest at 10.59 at 7 PM. Why: trips are longest at 5 AM (5.33 km vs ~3 km by day). The median barely rises, so a few long rides drive the peak.</a:t>
             </a:r>
             <a:endParaRPr lang="en-US" dirty="0"/>
           </a:p>
@@ -1570,7 +1659,7 @@
           <a:p>
             <a:r>
               <a:rPr lang="en-US" dirty="0"/>
-              <a:t>Distance has the highest correlation with fare_amount of any numeric feature: 0.61. The relationship is positive, but outliers blur it. Outliers: fares up to 500 at near-zero distance, and distances above 8,000 km at low fares.</a:t>
+              <a:t>Flow, Dense and Congested Traffic all have a median fare of 8.5; their means differ by only 0.06. About 161k trips per level. The traffic label does not shift fares.</a:t>
             </a:r>
             <a:endParaRPr lang="en-US" dirty="0"/>
           </a:p>
@@ -2185,7 +2274,7 @@
                 <a:ea typeface="IBM Plex Sans" pitchFamily="34" charset="-122"/>
                 <a:cs typeface="IBM Plex Sans" pitchFamily="34" charset="-120"/>
               </a:rPr>
-              <a:t>QUESTION 6</a:t>
+              <a:t>QUESTION 5</a:t>
             </a:r>
             <a:endParaRPr lang="en-US" sz="1400" dirty="0"/>
           </a:p>
@@ -2229,7 +2318,7 @@
                 <a:ea typeface="Space Grotesk" pitchFamily="34" charset="-122"/>
                 <a:cs typeface="Space Grotesk" pitchFamily="34" charset="-120"/>
               </a:rPr>
-              <a:t>At what time of day are ride requests most frequent?</a:t>
+              <a:t>Is trip distance the strongest predictor of fare?</a:t>
             </a:r>
             <a:endParaRPr lang="en-US" sz="2800" dirty="0"/>
           </a:p>
@@ -2340,7 +2429,7 @@
                 <a:ea typeface="Space Grotesk" pitchFamily="34" charset="-122"/>
                 <a:cs typeface="Space Grotesk" pitchFamily="34" charset="-120"/>
               </a:rPr>
-              <a:t>7 PM</a:t>
+              <a:t>Yes</a:t>
             </a:r>
             <a:endParaRPr lang="en-US" sz="4000" dirty="0"/>
           </a:p>
@@ -2355,7 +2444,7 @@
         <p:spPr>
           <a:xfrm>
             <a:off x="812800" y="2750821"/>
-            <a:ext cx="3976624" cy="1130300"/>
+            <a:ext cx="3976624" cy="854075"/>
           </a:xfrm>
           <a:prstGeom prst="rect">
             <a:avLst/>
@@ -2384,7 +2473,7 @@
                 <a:ea typeface="IBM Plex Sans" pitchFamily="34" charset="-122"/>
                 <a:cs typeface="IBM Plex Sans" pitchFamily="34" charset="-120"/>
               </a:rPr>
-              <a:t>Demand builds through the day and peaks in the evening, 6–10 PM, topping out at about 31,000 requests at 7 PM. It bottoms out at 5 AM (~5,000).</a:t>
+              <a:t>After cleaning, distance correlates 0.78 (Pearson) and 0.86 (Spearman) with fare, up from 0.61 on raw data.</a:t>
             </a:r>
             <a:endParaRPr lang="en-US" sz="1500" dirty="0"/>
           </a:p>
@@ -2398,7 +2487,7 @@
         </p:nvSpPr>
         <p:spPr>
           <a:xfrm>
-            <a:off x="812800" y="4033521"/>
+            <a:off x="812800" y="3757296"/>
             <a:ext cx="3976624" cy="504190"/>
           </a:xfrm>
           <a:prstGeom prst="rect">
@@ -2428,7 +2517,7 @@
                 <a:ea typeface="IBM Plex Sans" pitchFamily="34" charset="-122"/>
                 <a:cs typeface="IBM Plex Sans" pitchFamily="34" charset="-120"/>
               </a:rPr>
-              <a:t>Compare with Q3: the quietest hour (5 AM) is also the most expensive one on average.</a:t>
+              <a:t>Next best: distance to JFK (Spearman −0.19) and year (0.15). Every time feature is below 0.03.</a:t>
             </a:r>
             <a:endParaRPr lang="en-US" sz="1300" dirty="0"/>
           </a:p>
@@ -2458,7 +2547,7 @@
       </p:sp>
       <p:pic>
         <p:nvPicPr>
-          <p:cNvPr id="10" name="Image 0" descr="Count plot · ride requests by hour">    </p:cNvPr>
+          <p:cNvPr id="10" name="Image 0" descr="Fare vs. distance with regression line (50k sample)">    </p:cNvPr>
           <p:cNvPicPr>
             <a:picLocks noChangeAspect="1"/>
           </p:cNvPicPr>
@@ -2472,37 +2561,12 @@
         </p:blipFill>
         <p:spPr>
           <a:xfrm>
-            <a:off x="5035550" y="1841396"/>
-            <a:ext cx="6337300" cy="3388566"/>
-          </a:xfrm>
-          <a:custGeom>
-            <a:avLst/>
-            <a:gdLst/>
-            <a:ahLst/>
-            <a:cxnLst/>
-            <a:rect l="l" t="t" r="r" b="b"/>
-            <a:pathLst>
-              <a:path w="6337300" h="3388566">
-                <a:moveTo>
-                  <a:pt x="0" y="17883"/>
-                </a:moveTo>
-                <a:arcTo wR="95250" hR="95250" stAng="10800000" swAng="649285"/>
-                <a:lnTo>
-                  <a:pt x="6335606" y="0"/>
-                </a:lnTo>
-                <a:arcTo wR="95250" hR="95250" stAng="20950715" swAng="649285"/>
-                <a:lnTo>
-                  <a:pt x="6337300" y="3370683"/>
-                </a:lnTo>
-                <a:arcTo wR="95250" hR="95250" stAng="0" swAng="649285"/>
-                <a:lnTo>
-                  <a:pt x="1694" y="3388566"/>
-                </a:lnTo>
-                <a:arcTo wR="95250" hR="95250" stAng="10150715" swAng="649285"/>
-                <a:close/>
-              </a:path>
-            </a:pathLst>
-          </a:custGeom>
+            <a:off x="5486183" y="1764029"/>
+            <a:ext cx="5436034" cy="3543300"/>
+          </a:xfrm>
+          <a:prstGeom prst="rect">
+            <a:avLst/>
+          </a:prstGeom>
         </p:spPr>
       </p:pic>
       <p:sp>
@@ -2568,7 +2632,7 @@
                 <a:ea typeface="IBM Plex Sans" pitchFamily="34" charset="-122"/>
                 <a:cs typeface="IBM Plex Sans" pitchFamily="34" charset="-120"/>
               </a:rPr>
-              <a:t>Count plot · ride requests by hour</a:t>
+              <a:t>Fare vs. distance with regression line (50k sample)</a:t>
             </a:r>
             <a:endParaRPr lang="en-US" sz="1200" dirty="0"/>
           </a:p>
@@ -2612,7 +2676,7 @@
                 <a:ea typeface="IBM Plex Sans" pitchFamily="34" charset="-122"/>
                 <a:cs typeface="IBM Plex Sans" pitchFamily="34" charset="-120"/>
               </a:rPr>
-              <a:t>Q6 of 8 · NYC taxi fares EDA</a:t>
+              <a:t>Q5 of 8 · NYC taxi fares EDA</a:t>
             </a:r>
             <a:endParaRPr lang="en-US" sz="1200" dirty="0"/>
           </a:p>
@@ -2688,7 +2752,7 @@
                 <a:ea typeface="IBM Plex Sans" pitchFamily="34" charset="-122"/>
                 <a:cs typeface="IBM Plex Sans" pitchFamily="34" charset="-120"/>
               </a:rPr>
-              <a:t>QUESTION 7</a:t>
+              <a:t>QUESTION 6</a:t>
             </a:r>
             <a:endParaRPr lang="en-US" sz="1400" dirty="0"/>
           </a:p>
@@ -2732,7 +2796,7 @@
                 <a:ea typeface="Space Grotesk" pitchFamily="34" charset="-122"/>
                 <a:cs typeface="Space Grotesk" pitchFamily="34" charset="-120"/>
               </a:rPr>
-              <a:t>Does weather influence the average trip distance?</a:t>
+              <a:t>At what time of day are ride requests most frequent?</a:t>
             </a:r>
             <a:endParaRPr lang="en-US" sz="2800" dirty="0"/>
           </a:p>
@@ -2843,7 +2907,7 @@
                 <a:ea typeface="Space Grotesk" pitchFamily="34" charset="-122"/>
                 <a:cs typeface="Space Grotesk" pitchFamily="34" charset="-120"/>
               </a:rPr>
-              <a:t>No</a:t>
+              <a:t>7 PM</a:t>
             </a:r>
             <a:endParaRPr lang="en-US" sz="4000" dirty="0"/>
           </a:p>
@@ -2887,7 +2951,7 @@
                 <a:ea typeface="IBM Plex Sans" pitchFamily="34" charset="-122"/>
                 <a:cs typeface="IBM Plex Sans" pitchFamily="34" charset="-120"/>
               </a:rPr>
-              <a:t>Median trip distance is about 2 km under all five conditions: sunny, cloudy, rainy, windy and stormy.</a:t>
+              <a:t>Demand peaks in the evening, at 30,298 trips at 7 PM, and bottoms out at 4,789 at 5 AM.</a:t>
             </a:r>
             <a:endParaRPr lang="en-US" sz="1500" dirty="0"/>
           </a:p>
@@ -2931,7 +2995,7 @@
                 <a:ea typeface="IBM Plex Sans" pitchFamily="34" charset="-122"/>
                 <a:cs typeface="IBM Plex Sans" pitchFamily="34" charset="-120"/>
               </a:rPr>
-              <a:t>People travel the same distances whatever the weather.</a:t>
+              <a:t>Note the dip at 4 PM (19,841). The busiest hour has the lowest mean fare; the quietest has the highest.</a:t>
             </a:r>
             <a:endParaRPr lang="en-US" sz="1300" dirty="0"/>
           </a:p>
@@ -2961,7 +3025,7 @@
       </p:sp>
       <p:pic>
         <p:nvPicPr>
-          <p:cNvPr id="10" name="Image 0" descr="Box plot · distance by weather (y capped at 99th pct.)">    </p:cNvPr>
+          <p:cNvPr id="10" name="Image 0" descr="Count plot · ride requests by hour (cleaned data)">    </p:cNvPr>
           <p:cNvPicPr>
             <a:picLocks noChangeAspect="1"/>
           </p:cNvPicPr>
@@ -2975,12 +3039,37 @@
         </p:blipFill>
         <p:spPr>
           <a:xfrm>
-            <a:off x="5434985" y="1764029"/>
-            <a:ext cx="5538431" cy="3543300"/>
-          </a:xfrm>
-          <a:prstGeom prst="rect">
-            <a:avLst/>
-          </a:prstGeom>
+            <a:off x="5035550" y="1833486"/>
+            <a:ext cx="6337300" cy="3404385"/>
+          </a:xfrm>
+          <a:custGeom>
+            <a:avLst/>
+            <a:gdLst/>
+            <a:ahLst/>
+            <a:cxnLst/>
+            <a:rect l="l" t="t" r="r" b="b"/>
+            <a:pathLst>
+              <a:path w="6337300" h="3404385">
+                <a:moveTo>
+                  <a:pt x="0" y="25793"/>
+                </a:moveTo>
+                <a:arcTo wR="95250" hR="95250" stAng="10800000" swAng="942674"/>
+                <a:lnTo>
+                  <a:pt x="6333741" y="0"/>
+                </a:lnTo>
+                <a:arcTo wR="95250" hR="95250" stAng="20657326" swAng="942674"/>
+                <a:lnTo>
+                  <a:pt x="6337300" y="3378593"/>
+                </a:lnTo>
+                <a:arcTo wR="95250" hR="95250" stAng="0" swAng="942674"/>
+                <a:lnTo>
+                  <a:pt x="3559" y="3404385"/>
+                </a:lnTo>
+                <a:arcTo wR="95250" hR="95250" stAng="9857326" swAng="942674"/>
+                <a:close/>
+              </a:path>
+            </a:pathLst>
+          </a:custGeom>
         </p:spPr>
       </p:pic>
       <p:sp>
@@ -3046,7 +3135,7 @@
                 <a:ea typeface="IBM Plex Sans" pitchFamily="34" charset="-122"/>
                 <a:cs typeface="IBM Plex Sans" pitchFamily="34" charset="-120"/>
               </a:rPr>
-              <a:t>Box plot · distance by weather (y capped at 99th pct.)</a:t>
+              <a:t>Count plot · ride requests by hour (cleaned data)</a:t>
             </a:r>
             <a:endParaRPr lang="en-US" sz="1200" dirty="0"/>
           </a:p>
@@ -3090,7 +3179,7 @@
                 <a:ea typeface="IBM Plex Sans" pitchFamily="34" charset="-122"/>
                 <a:cs typeface="IBM Plex Sans" pitchFamily="34" charset="-120"/>
               </a:rPr>
-              <a:t>Q7 of 8 · NYC taxi fares EDA</a:t>
+              <a:t>Q6 of 8 · NYC taxi fares EDA</a:t>
             </a:r>
             <a:endParaRPr lang="en-US" sz="1200" dirty="0"/>
           </a:p>
@@ -3166,7 +3255,7 @@
                 <a:ea typeface="IBM Plex Sans" pitchFamily="34" charset="-122"/>
                 <a:cs typeface="IBM Plex Sans" pitchFamily="34" charset="-120"/>
               </a:rPr>
-              <a:t>QUESTION 8</a:t>
+              <a:t>QUESTION 7</a:t>
             </a:r>
             <a:endParaRPr lang="en-US" sz="1400" dirty="0"/>
           </a:p>
@@ -3210,7 +3299,7 @@
                 <a:ea typeface="Space Grotesk" pitchFamily="34" charset="-122"/>
                 <a:cs typeface="Space Grotesk" pitchFamily="34" charset="-120"/>
               </a:rPr>
-              <a:t>Are rides that start closer to airports more expensive?</a:t>
+              <a:t>Does weather influence the average trip distance?</a:t>
             </a:r>
             <a:endParaRPr lang="en-US" sz="2800" dirty="0"/>
           </a:p>
@@ -3321,7 +3410,7 @@
                 <a:ea typeface="Space Grotesk" pitchFamily="34" charset="-122"/>
                 <a:cs typeface="Space Grotesk" pitchFamily="34" charset="-120"/>
               </a:rPr>
-              <a:t>Unclear</a:t>
+              <a:t>No</a:t>
             </a:r>
             <a:endParaRPr lang="en-US" sz="4000" dirty="0"/>
           </a:p>
@@ -3336,7 +3425,7 @@
         <p:spPr>
           <a:xfrm>
             <a:off x="812800" y="2750821"/>
-            <a:ext cx="3976624" cy="1130300"/>
+            <a:ext cx="3976624" cy="577850"/>
           </a:xfrm>
           <a:prstGeom prst="rect">
             <a:avLst/>
@@ -3365,7 +3454,7 @@
                 <a:ea typeface="IBM Plex Sans" pitchFamily="34" charset="-122"/>
                 <a:cs typeface="IBM Plex Sans" pitchFamily="34" charset="-120"/>
               </a:rPr>
-              <a:t>Fare vs. distance to JFK shows no clear trend: fares vary widely at every distance. Proximity to JFK alone is not a main driver of fare.</a:t>
+              <a:t>Median trip distance is 2.16–2.19 km under all five weather conditions.</a:t>
             </a:r>
             <a:endParaRPr lang="en-US" sz="1500" dirty="0"/>
           </a:p>
@@ -3379,8 +3468,8 @@
         </p:nvSpPr>
         <p:spPr>
           <a:xfrm>
-            <a:off x="812800" y="4033521"/>
-            <a:ext cx="3976624" cy="743585"/>
+            <a:off x="812800" y="3481071"/>
+            <a:ext cx="3976624" cy="504190"/>
           </a:xfrm>
           <a:prstGeom prst="rect">
             <a:avLst/>
@@ -3409,7 +3498,7 @@
                 <a:ea typeface="IBM Plex Sans" pitchFamily="34" charset="-122"/>
                 <a:cs typeface="IBM Plex Sans" pitchFamily="34" charset="-120"/>
               </a:rPr>
-              <a:t>Caveat: the chart is dominated by bad coordinates (JFK distances in the thousands of km); re-check after cleaning.</a:t>
+              <a:t>Means are 3.38–3.40 km, with ~96–97k trips per condition. Weather does not change trip length.</a:t>
             </a:r>
             <a:endParaRPr lang="en-US" sz="1300" dirty="0"/>
           </a:p>
@@ -3439,7 +3528,7 @@
       </p:sp>
       <p:pic>
         <p:nvPicPr>
-          <p:cNvPr id="10" name="Image 0" descr="Scatter plot · fare vs. distance to JFK">    </p:cNvPr>
+          <p:cNvPr id="10" name="Image 0" descr="Box plot · distance by weather (cleaned data)">    </p:cNvPr>
           <p:cNvPicPr>
             <a:picLocks noChangeAspect="1"/>
           </p:cNvPicPr>
@@ -3453,37 +3542,12 @@
         </p:blipFill>
         <p:spPr>
           <a:xfrm>
-            <a:off x="5035550" y="1795466"/>
-            <a:ext cx="6337300" cy="3480425"/>
-          </a:xfrm>
-          <a:custGeom>
-            <a:avLst/>
-            <a:gdLst/>
-            <a:ahLst/>
-            <a:cxnLst/>
-            <a:rect l="l" t="t" r="r" b="b"/>
-            <a:pathLst>
-              <a:path w="6337300" h="3480425">
-                <a:moveTo>
-                  <a:pt x="0" y="63812"/>
-                </a:moveTo>
-                <a:arcTo wR="95250" hR="95250" stAng="10800000" swAng="2523776"/>
-                <a:lnTo>
-                  <a:pt x="6312764" y="0"/>
-                </a:lnTo>
-                <a:arcTo wR="95250" hR="95250" stAng="19076224" swAng="2523776"/>
-                <a:lnTo>
-                  <a:pt x="6337300" y="3416612"/>
-                </a:lnTo>
-                <a:arcTo wR="95250" hR="95250" stAng="0" swAng="2523776"/>
-                <a:lnTo>
-                  <a:pt x="24536" y="3480425"/>
-                </a:lnTo>
-                <a:arcTo wR="95250" hR="95250" stAng="8276224" swAng="2523776"/>
-                <a:close/>
-              </a:path>
-            </a:pathLst>
-          </a:custGeom>
+            <a:off x="5447946" y="1764029"/>
+            <a:ext cx="5512508" cy="3543300"/>
+          </a:xfrm>
+          <a:prstGeom prst="rect">
+            <a:avLst/>
+          </a:prstGeom>
         </p:spPr>
       </p:pic>
       <p:sp>
@@ -3549,7 +3613,7 @@
                 <a:ea typeface="IBM Plex Sans" pitchFamily="34" charset="-122"/>
                 <a:cs typeface="IBM Plex Sans" pitchFamily="34" charset="-120"/>
               </a:rPr>
-              <a:t>Scatter plot · fare vs. distance to JFK</a:t>
+              <a:t>Box plot · distance by weather (cleaned data)</a:t>
             </a:r>
             <a:endParaRPr lang="en-US" sz="1200" dirty="0"/>
           </a:p>
@@ -3593,7 +3657,7 @@
                 <a:ea typeface="IBM Plex Sans" pitchFamily="34" charset="-122"/>
                 <a:cs typeface="IBM Plex Sans" pitchFamily="34" charset="-120"/>
               </a:rPr>
-              <a:t>Q8 of 8 · NYC taxi fares EDA</a:t>
+              <a:t>Q7 of 8 · NYC taxi fares EDA</a:t>
             </a:r>
             <a:endParaRPr lang="en-US" sz="1200" dirty="0"/>
           </a:p>
@@ -3610,6 +3674,484 @@
 <file path=ppt/slides/slide13.xml><?xml version="1.0" encoding="utf-8"?>
 <p:sld xmlns:a="http://schemas.openxmlformats.org/drawingml/2006/main" xmlns:r="http://schemas.openxmlformats.org/officeDocument/2006/relationships" xmlns:p="http://schemas.openxmlformats.org/presentationml/2006/main">
   <p:cSld name="Slide 13">
+    <p:bg>
+      <p:bgPr>
+        <a:solidFill>
+          <a:srgbClr val="F5F3EC"/>
+        </a:solidFill>
+      </p:bgPr>
+    </p:bg>
+    <p:spTree>
+      <p:nvGrpSpPr>
+        <p:cNvPr id="1" name=""/>
+        <p:cNvGrpSpPr/>
+        <p:nvPr/>
+      </p:nvGrpSpPr>
+      <p:grpSpPr>
+        <a:xfrm>
+          <a:off x="0" y="0"/>
+          <a:ext cx="0" cy="0"/>
+          <a:chOff x="0" y="0"/>
+          <a:chExt cx="0" cy="0"/>
+        </a:xfrm>
+      </p:grpSpPr>
+      <p:sp>
+        <p:nvSpPr>
+          <p:cNvPr id="2" name="Text 0"/>
+          <p:cNvSpPr/>
+          <p:nvPr/>
+        </p:nvSpPr>
+        <p:spPr>
+          <a:xfrm>
+            <a:off x="812800" y="812800"/>
+            <a:ext cx="10883392" cy="274320"/>
+          </a:xfrm>
+          <a:prstGeom prst="rect">
+            <a:avLst/>
+          </a:prstGeom>
+          <a:noFill/>
+          <a:ln/>
+        </p:spPr>
+        <p:txBody>
+          <a:bodyPr wrap="square" lIns="0" tIns="0" rIns="0" bIns="0" rtlCol="0" anchor="t">
+            <a:normAutofit/>
+          </a:bodyPr>
+          <a:lstStyle/>
+          <a:p>
+            <a:pPr algn="l" indent="0" marL="0">
+              <a:lnSpc>
+                <a:spcPts val="1960"/>
+              </a:lnSpc>
+              <a:buNone/>
+            </a:pPr>
+            <a:r>
+              <a:rPr lang="en-US" sz="1400" b="1" spc="100" kern="0" dirty="0">
+                <a:solidFill>
+                  <a:srgbClr val="8A5A00"/>
+                </a:solidFill>
+                <a:latin typeface="IBM Plex Sans" pitchFamily="34" charset="0"/>
+                <a:ea typeface="IBM Plex Sans" pitchFamily="34" charset="-122"/>
+                <a:cs typeface="IBM Plex Sans" pitchFamily="34" charset="-120"/>
+              </a:rPr>
+              <a:t>QUESTION 8</a:t>
+            </a:r>
+            <a:endParaRPr lang="en-US" sz="1400" dirty="0"/>
+          </a:p>
+        </p:txBody>
+      </p:sp>
+      <p:sp>
+        <p:nvSpPr>
+          <p:cNvPr id="3" name="Text 1"/>
+          <p:cNvSpPr/>
+          <p:nvPr/>
+        </p:nvSpPr>
+        <p:spPr>
+          <a:xfrm>
+            <a:off x="812800" y="1112521"/>
+            <a:ext cx="10883392" cy="416560"/>
+          </a:xfrm>
+          <a:prstGeom prst="rect">
+            <a:avLst/>
+          </a:prstGeom>
+          <a:noFill/>
+          <a:ln/>
+        </p:spPr>
+        <p:txBody>
+          <a:bodyPr wrap="square" lIns="0" tIns="0" rIns="0" bIns="0" rtlCol="0" anchor="t">
+            <a:normAutofit/>
+          </a:bodyPr>
+          <a:lstStyle/>
+          <a:p>
+            <a:pPr algn="l" indent="0" marL="0">
+              <a:lnSpc>
+                <a:spcPts val="3080"/>
+              </a:lnSpc>
+              <a:buNone/>
+            </a:pPr>
+            <a:r>
+              <a:rPr lang="en-US" sz="2800" b="1" dirty="0">
+                <a:solidFill>
+                  <a:srgbClr val="1B1C1E"/>
+                </a:solidFill>
+                <a:latin typeface="Space Grotesk" pitchFamily="34" charset="0"/>
+                <a:ea typeface="Space Grotesk" pitchFamily="34" charset="-122"/>
+                <a:cs typeface="Space Grotesk" pitchFamily="34" charset="-120"/>
+              </a:rPr>
+              <a:t>Are rides that start closer to airports more expensive?</a:t>
+            </a:r>
+            <a:endParaRPr lang="en-US" sz="2800" dirty="0"/>
+          </a:p>
+        </p:txBody>
+      </p:sp>
+      <p:sp>
+        <p:nvSpPr>
+          <p:cNvPr id="4" name="Shape 2"/>
+          <p:cNvSpPr/>
+          <p:nvPr/>
+        </p:nvSpPr>
+        <p:spPr>
+          <a:xfrm>
+            <a:off x="844550" y="1757679"/>
+            <a:ext cx="0" cy="815340"/>
+          </a:xfrm>
+          <a:prstGeom prst="line">
+            <a:avLst/>
+          </a:prstGeom>
+          <a:noFill/>
+          <a:ln w="63500">
+            <a:solidFill>
+              <a:srgbClr val="F5B700"/>
+            </a:solidFill>
+            <a:prstDash val="solid"/>
+          </a:ln>
+        </p:spPr>
+      </p:sp>
+      <p:sp>
+        <p:nvSpPr>
+          <p:cNvPr id="5" name="Text 3"/>
+          <p:cNvSpPr/>
+          <p:nvPr/>
+        </p:nvSpPr>
+        <p:spPr>
+          <a:xfrm>
+            <a:off x="1051560" y="1757679"/>
+            <a:ext cx="3730701" cy="256540"/>
+          </a:xfrm>
+          <a:prstGeom prst="rect">
+            <a:avLst/>
+          </a:prstGeom>
+          <a:noFill/>
+          <a:ln/>
+        </p:spPr>
+        <p:txBody>
+          <a:bodyPr wrap="square" lIns="0" tIns="0" rIns="0" bIns="0" rtlCol="0" anchor="t">
+            <a:normAutofit/>
+          </a:bodyPr>
+          <a:lstStyle/>
+          <a:p>
+            <a:pPr algn="l" indent="0" marL="0">
+              <a:lnSpc>
+                <a:spcPts val="1820"/>
+              </a:lnSpc>
+              <a:buNone/>
+            </a:pPr>
+            <a:r>
+              <a:rPr lang="en-US" sz="1300" dirty="0">
+                <a:solidFill>
+                  <a:srgbClr val="5D5F63"/>
+                </a:solidFill>
+                <a:latin typeface="IBM Plex Sans" pitchFamily="34" charset="0"/>
+                <a:ea typeface="IBM Plex Sans" pitchFamily="34" charset="-122"/>
+                <a:cs typeface="IBM Plex Sans" pitchFamily="34" charset="-120"/>
+              </a:rPr>
+              <a:t>Answer</a:t>
+            </a:r>
+            <a:endParaRPr lang="en-US" sz="1300" dirty="0"/>
+          </a:p>
+        </p:txBody>
+      </p:sp>
+      <p:sp>
+        <p:nvSpPr>
+          <p:cNvPr id="6" name="Text 4"/>
+          <p:cNvSpPr/>
+          <p:nvPr/>
+        </p:nvSpPr>
+        <p:spPr>
+          <a:xfrm>
+            <a:off x="1051560" y="2014221"/>
+            <a:ext cx="3730701" cy="584200"/>
+          </a:xfrm>
+          <a:prstGeom prst="rect">
+            <a:avLst/>
+          </a:prstGeom>
+          <a:noFill/>
+          <a:ln/>
+        </p:spPr>
+        <p:txBody>
+          <a:bodyPr wrap="square" lIns="0" tIns="0" rIns="0" bIns="0" rtlCol="0" anchor="t">
+            <a:normAutofit/>
+          </a:bodyPr>
+          <a:lstStyle/>
+          <a:p>
+            <a:pPr algn="l" indent="0" marL="0">
+              <a:lnSpc>
+                <a:spcPts val="4400"/>
+              </a:lnSpc>
+              <a:buNone/>
+            </a:pPr>
+            <a:r>
+              <a:rPr lang="en-US" sz="4000" b="1" dirty="0">
+                <a:solidFill>
+                  <a:srgbClr val="1B1C1E"/>
+                </a:solidFill>
+                <a:latin typeface="Space Grotesk" pitchFamily="34" charset="0"/>
+                <a:ea typeface="Space Grotesk" pitchFamily="34" charset="-122"/>
+                <a:cs typeface="Space Grotesk" pitchFamily="34" charset="-120"/>
+              </a:rPr>
+              <a:t>Yes</a:t>
+            </a:r>
+            <a:endParaRPr lang="en-US" sz="4000" dirty="0"/>
+          </a:p>
+        </p:txBody>
+      </p:sp>
+      <p:sp>
+        <p:nvSpPr>
+          <p:cNvPr id="7" name="Text 5"/>
+          <p:cNvSpPr/>
+          <p:nvPr/>
+        </p:nvSpPr>
+        <p:spPr>
+          <a:xfrm>
+            <a:off x="812800" y="2750821"/>
+            <a:ext cx="3976624" cy="854075"/>
+          </a:xfrm>
+          <a:prstGeom prst="rect">
+            <a:avLst/>
+          </a:prstGeom>
+          <a:noFill/>
+          <a:ln/>
+        </p:spPr>
+        <p:txBody>
+          <a:bodyPr wrap="square" lIns="0" tIns="0" rIns="0" bIns="0" rtlCol="0" anchor="t">
+            <a:normAutofit/>
+          </a:bodyPr>
+          <a:lstStyle/>
+          <a:p>
+            <a:pPr algn="l" indent="0" marL="0">
+              <a:lnSpc>
+                <a:spcPts val="2175"/>
+              </a:lnSpc>
+              <a:buNone/>
+            </a:pPr>
+            <a:r>
+              <a:rPr lang="en-US" sz="1500" dirty="0">
+                <a:solidFill>
+                  <a:srgbClr val="1B1C1E"/>
+                </a:solidFill>
+                <a:latin typeface="IBM Plex Sans" pitchFamily="34" charset="0"/>
+                <a:ea typeface="IBM Plex Sans" pitchFamily="34" charset="-122"/>
+                <a:cs typeface="IBM Plex Sans" pitchFamily="34" charset="-120"/>
+              </a:rPr>
+              <a:t>Pickups within 2 km of JFK, LGA or EWR have a median fare of 34.27, versus 8.10 for other trips.</a:t>
+            </a:r>
+            <a:endParaRPr lang="en-US" sz="1500" dirty="0"/>
+          </a:p>
+        </p:txBody>
+      </p:sp>
+      <p:sp>
+        <p:nvSpPr>
+          <p:cNvPr id="8" name="Text 6"/>
+          <p:cNvSpPr/>
+          <p:nvPr/>
+        </p:nvSpPr>
+        <p:spPr>
+          <a:xfrm>
+            <a:off x="812800" y="3757296"/>
+            <a:ext cx="3976624" cy="504190"/>
+          </a:xfrm>
+          <a:prstGeom prst="rect">
+            <a:avLst/>
+          </a:prstGeom>
+          <a:noFill/>
+          <a:ln/>
+        </p:spPr>
+        <p:txBody>
+          <a:bodyPr wrap="square" lIns="0" tIns="0" rIns="0" bIns="0" rtlCol="0" anchor="t">
+            <a:normAutofit/>
+          </a:bodyPr>
+          <a:lstStyle/>
+          <a:p>
+            <a:pPr algn="l" indent="0" marL="0">
+              <a:lnSpc>
+                <a:spcPts val="1885"/>
+              </a:lnSpc>
+              <a:buNone/>
+            </a:pPr>
+            <a:r>
+              <a:rPr lang="en-US" sz="1300" dirty="0">
+                <a:solidFill>
+                  <a:srgbClr val="5D5F63"/>
+                </a:solidFill>
+                <a:latin typeface="IBM Plex Sans" pitchFamily="34" charset="0"/>
+                <a:ea typeface="IBM Plex Sans" pitchFamily="34" charset="-122"/>
+                <a:cs typeface="IBM Plex Sans" pitchFamily="34" charset="-120"/>
+              </a:rPr>
+              <a:t>They cost more because they are longer (10.87 km vs 2.11 km). Per km they are cheaper: 2.83 vs 3.86.</a:t>
+            </a:r>
+            <a:endParaRPr lang="en-US" sz="1300" dirty="0"/>
+          </a:p>
+        </p:txBody>
+      </p:sp>
+      <p:sp>
+        <p:nvSpPr>
+          <p:cNvPr id="9" name="Shape 7"/>
+          <p:cNvSpPr/>
+          <p:nvPr/>
+        </p:nvSpPr>
+        <p:spPr>
+          <a:xfrm>
+            <a:off x="5029200" y="1757679"/>
+            <a:ext cx="6350000" cy="3556000"/>
+          </a:xfrm>
+          <a:prstGeom prst="roundRect">
+            <a:avLst>
+              <a:gd name="adj" fmla="val 2857"/>
+            </a:avLst>
+          </a:prstGeom>
+          <a:solidFill>
+            <a:srgbClr val="FFFFFF"/>
+          </a:solidFill>
+          <a:ln/>
+        </p:spPr>
+      </p:sp>
+      <p:pic>
+        <p:nvPicPr>
+          <p:cNvPr id="10" name="Image 0" descr="Fare and fare per km · airport vs. other pickups">    </p:cNvPr>
+          <p:cNvPicPr>
+            <a:picLocks noChangeAspect="1"/>
+          </p:cNvPicPr>
+          <p:nvPr/>
+        </p:nvPicPr>
+        <p:blipFill>
+          <a:blip r:embed="rId1"/>
+          <a:stretch>
+            <a:fillRect/>
+          </a:stretch>
+        </p:blipFill>
+        <p:spPr>
+          <a:xfrm>
+            <a:off x="5035550" y="2198618"/>
+            <a:ext cx="6337300" cy="2674121"/>
+          </a:xfrm>
+          <a:prstGeom prst="rect">
+            <a:avLst/>
+          </a:prstGeom>
+        </p:spPr>
+      </p:pic>
+      <p:sp>
+        <p:nvSpPr>
+          <p:cNvPr id="11" name="Shape 8"/>
+          <p:cNvSpPr/>
+          <p:nvPr/>
+        </p:nvSpPr>
+        <p:spPr>
+          <a:xfrm>
+            <a:off x="5032375" y="1760854"/>
+            <a:ext cx="6343650" cy="3549650"/>
+          </a:xfrm>
+          <a:prstGeom prst="roundRect">
+            <a:avLst>
+              <a:gd name="adj" fmla="val 2773"/>
+            </a:avLst>
+          </a:prstGeom>
+          <a:noFill/>
+          <a:ln w="6350">
+            <a:solidFill>
+              <a:srgbClr val="E2DED2"/>
+            </a:solidFill>
+            <a:prstDash val="solid"/>
+          </a:ln>
+        </p:spPr>
+      </p:sp>
+      <p:sp>
+        <p:nvSpPr>
+          <p:cNvPr id="12" name="Text 9"/>
+          <p:cNvSpPr/>
+          <p:nvPr/>
+        </p:nvSpPr>
+        <p:spPr>
+          <a:xfrm>
+            <a:off x="5029200" y="5389879"/>
+            <a:ext cx="6540500" cy="238760"/>
+          </a:xfrm>
+          <a:prstGeom prst="rect">
+            <a:avLst/>
+          </a:prstGeom>
+          <a:noFill/>
+          <a:ln/>
+        </p:spPr>
+        <p:txBody>
+          <a:bodyPr wrap="square" lIns="0" tIns="0" rIns="0" bIns="0" rtlCol="0" anchor="t">
+            <a:normAutofit/>
+          </a:bodyPr>
+          <a:lstStyle/>
+          <a:p>
+            <a:pPr algn="l" indent="0" marL="0">
+              <a:lnSpc>
+                <a:spcPts val="1680"/>
+              </a:lnSpc>
+              <a:buNone/>
+            </a:pPr>
+            <a:r>
+              <a:rPr lang="en-US" sz="1200" dirty="0">
+                <a:solidFill>
+                  <a:srgbClr val="5D5F63"/>
+                </a:solidFill>
+                <a:latin typeface="IBM Plex Sans" pitchFamily="34" charset="0"/>
+                <a:ea typeface="IBM Plex Sans" pitchFamily="34" charset="-122"/>
+                <a:cs typeface="IBM Plex Sans" pitchFamily="34" charset="-120"/>
+              </a:rPr>
+              <a:t>Fare and fare per km · airport vs. other pickups</a:t>
+            </a:r>
+            <a:endParaRPr lang="en-US" sz="1200" dirty="0"/>
+          </a:p>
+        </p:txBody>
+      </p:sp>
+      <p:sp>
+        <p:nvSpPr>
+          <p:cNvPr id="13" name="Text 10"/>
+          <p:cNvSpPr/>
+          <p:nvPr/>
+        </p:nvSpPr>
+        <p:spPr>
+          <a:xfrm>
+            <a:off x="812800" y="6238242"/>
+            <a:ext cx="10883392" cy="238760"/>
+          </a:xfrm>
+          <a:prstGeom prst="rect">
+            <a:avLst/>
+          </a:prstGeom>
+          <a:noFill/>
+          <a:ln/>
+        </p:spPr>
+        <p:txBody>
+          <a:bodyPr wrap="square" lIns="0" tIns="0" rIns="0" bIns="0" rtlCol="0" anchor="t">
+            <a:normAutofit/>
+          </a:bodyPr>
+          <a:lstStyle/>
+          <a:p>
+            <a:pPr algn="l" indent="0" marL="0">
+              <a:lnSpc>
+                <a:spcPts val="1680"/>
+              </a:lnSpc>
+              <a:buNone/>
+            </a:pPr>
+            <a:r>
+              <a:rPr lang="en-US" sz="1200" dirty="0">
+                <a:solidFill>
+                  <a:srgbClr val="5D5F63"/>
+                </a:solidFill>
+                <a:latin typeface="IBM Plex Sans" pitchFamily="34" charset="0"/>
+                <a:ea typeface="IBM Plex Sans" pitchFamily="34" charset="-122"/>
+                <a:cs typeface="IBM Plex Sans" pitchFamily="34" charset="-120"/>
+              </a:rPr>
+              <a:t>Q8 of 8 · NYC taxi fares EDA</a:t>
+            </a:r>
+            <a:endParaRPr lang="en-US" sz="1200" dirty="0"/>
+          </a:p>
+        </p:txBody>
+      </p:sp>
+    </p:spTree>
+  </p:cSld>
+  <p:clrMapOvr>
+    <a:masterClrMapping/>
+  </p:clrMapOvr>
+</p:sld>
+</file>
+
+<file path=ppt/slides/slide14.xml><?xml version="1.0" encoding="utf-8"?>
+<p:sld xmlns:a="http://schemas.openxmlformats.org/drawingml/2006/main" xmlns:r="http://schemas.openxmlformats.org/officeDocument/2006/relationships" xmlns:p="http://schemas.openxmlformats.org/presentationml/2006/main">
+  <p:cSld name="Slide 14">
     <p:bg>
       <p:bgPr>
         <a:solidFill>
@@ -3827,7 +4369,7 @@
                 <a:ea typeface="IBM Plex Sans" pitchFamily="34" charset="-122"/>
                 <a:cs typeface="IBM Plex Sans" pitchFamily="34" charset="-120"/>
               </a:rPr>
-              <a:t>The only strong driver (r = 0.61). Build any fare model around it.</a:t>
+              <a:t>The one strong driver: r = 0.78 (Spearman 0.86) after cleaning.</a:t>
             </a:r>
             <a:endParaRPr lang="en-US" sz="1400" dirty="0"/>
           </a:p>
@@ -3941,7 +4483,7 @@
                 <a:ea typeface="Space Grotesk" pitchFamily="34" charset="-122"/>
                 <a:cs typeface="Space Grotesk" pitchFamily="34" charset="-120"/>
               </a:rPr>
-              <a:t>Time matters</a:t>
+              <a:t>Longer trips cost more</a:t>
             </a:r>
             <a:endParaRPr lang="en-US" sz="2000" dirty="0"/>
           </a:p>
@@ -3985,7 +4527,7 @@
                 <a:ea typeface="IBM Plex Sans" pitchFamily="34" charset="-122"/>
                 <a:cs typeface="IBM Plex Sans" pitchFamily="34" charset="-120"/>
               </a:rPr>
-              <a:t>Fares peak at 5 AM; demand peaks at 7 PM. The hour is worth keeping as a feature.</a:t>
+              <a:t>5 AM and airport pickups have the highest fares because their trips are longest, not pricier per km.</a:t>
             </a:r>
             <a:endParaRPr lang="en-US" sz="1400" dirty="0"/>
           </a:p>
@@ -4099,7 +4641,7 @@
                 <a:ea typeface="Space Grotesk" pitchFamily="34" charset="-122"/>
                 <a:cs typeface="Space Grotesk" pitchFamily="34" charset="-120"/>
               </a:rPr>
-              <a:t>Labels don’t move price</a:t>
+              <a:t>Demand peaks at 7 PM</a:t>
             </a:r>
             <a:endParaRPr lang="en-US" sz="2000" dirty="0"/>
           </a:p>
@@ -4143,7 +4685,7 @@
                 <a:ea typeface="IBM Plex Sans" pitchFamily="34" charset="-122"/>
                 <a:cs typeface="IBM Plex Sans" pitchFamily="34" charset="-120"/>
               </a:rPr>
-              <a:t>Car condition, traffic, weather and passenger count show no real effect.</a:t>
+              <a:t>Evening is busiest; 5 AM is quietest, with a clear dip at 4 PM.</a:t>
             </a:r>
             <a:endParaRPr lang="en-US" sz="1400" dirty="0"/>
           </a:p>
@@ -4257,7 +4799,7 @@
                 <a:ea typeface="Space Grotesk" pitchFamily="34" charset="-122"/>
                 <a:cs typeface="Space Grotesk" pitchFamily="34" charset="-120"/>
               </a:rPr>
-              <a:t>Clean before modelling</a:t>
+              <a:t>Labels don’t move price</a:t>
             </a:r>
             <a:endParaRPr lang="en-US" sz="2000" dirty="0"/>
           </a:p>
@@ -4301,7 +4843,7 @@
                 <a:ea typeface="IBM Plex Sans" pitchFamily="34" charset="-122"/>
                 <a:cs typeface="IBM Plex Sans" pitchFamily="34" charset="-120"/>
               </a:rPr>
-              <a:t>Remove negative/zero fares, zero and &gt;200 km distances, and bad coordinates.</a:t>
+              <a:t>Car condition, traffic, weather and passenger count show no real effect.</a:t>
             </a:r>
             <a:endParaRPr lang="en-US" sz="1400" dirty="0"/>
           </a:p>
@@ -5082,28 +5624,28 @@
         <p:spPr>
           <a:xfrm>
             <a:off x="812800" y="812800"/>
-            <a:ext cx="10883392" cy="472440"/>
-          </a:xfrm>
-          <a:prstGeom prst="rect">
-            <a:avLst/>
-          </a:prstGeom>
-          <a:noFill/>
-          <a:ln/>
-        </p:spPr>
-        <p:txBody>
-          <a:bodyPr wrap="square" lIns="0" tIns="0" rIns="0" bIns="0" rtlCol="0" anchor="t">
-            <a:normAutofit/>
-          </a:bodyPr>
-          <a:lstStyle/>
-          <a:p>
-            <a:pPr algn="l" indent="0" marL="0">
-              <a:lnSpc>
-                <a:spcPts val="3520"/>
-              </a:lnSpc>
-              <a:buNone/>
-            </a:pPr>
-            <a:r>
-              <a:rPr lang="en-US" sz="3200" b="1" dirty="0">
+            <a:ext cx="10883392" cy="440214"/>
+          </a:xfrm>
+          <a:prstGeom prst="rect">
+            <a:avLst/>
+          </a:prstGeom>
+          <a:noFill/>
+          <a:ln/>
+        </p:spPr>
+        <p:txBody>
+          <a:bodyPr wrap="square" lIns="0" tIns="0" rIns="0" bIns="0" rtlCol="0" anchor="t">
+            <a:normAutofit/>
+          </a:bodyPr>
+          <a:lstStyle/>
+          <a:p>
+            <a:pPr algn="l" indent="0" marL="0">
+              <a:lnSpc>
+                <a:spcPts val="3267"/>
+              </a:lnSpc>
+              <a:buNone/>
+            </a:pPr>
+            <a:r>
+              <a:rPr lang="en-US" sz="2970" b="1" dirty="0">
                 <a:solidFill>
                   <a:srgbClr val="1B1C1E"/>
                 </a:solidFill>
@@ -5113,7 +5655,7 @@
               </a:rPr>
               <a:t>Data quality issues found</a:t>
             </a:r>
-            <a:endParaRPr lang="en-US" sz="3200" dirty="0"/>
+            <a:endParaRPr lang="en-US" sz="2970" dirty="0"/>
           </a:p>
         </p:txBody>
       </p:sp>
@@ -5132,8 +5674,8 @@
           </p:nvPr>
         </p:nvGraphicFramePr>
         <p:xfrm>
-          <a:off x="822960" y="1574801"/>
-          <a:ext cx="10556240" cy="3992880"/>
+          <a:off x="822960" y="1542573"/>
+          <a:ext cx="10556240" cy="4299426"/>
         </p:xfrm>
         <a:graphic>
           <a:graphicData uri="http://schemas.openxmlformats.org/drawingml/2006/table">
@@ -5144,7 +5686,7 @@
                 <a:gridCol w="3518747"/>
                 <a:gridCol w="3518747"/>
               </a:tblGrid>
-              <a:tr h="523240">
+              <a:tr h="469186">
                 <a:tc>
                   <a:txBody>
                     <a:bodyPr/>
@@ -5152,12 +5694,12 @@
                     <a:p>
                       <a:pPr indent="0" marL="0">
                         <a:lnSpc>
-                          <a:spcPts val="2240"/>
+                          <a:spcPts val="2149"/>
                         </a:lnSpc>
                         <a:buNone/>
                       </a:pPr>
                       <a:r>
-                        <a:rPr lang="en-US" sz="1600" b="1" dirty="0">
+                        <a:rPr lang="en-US" sz="1535" b="1" dirty="0">
                           <a:solidFill>
                             <a:srgbClr val="8A5A00"/>
                           </a:solidFill>
@@ -5167,14 +5709,14 @@
                         </a:rPr>
                         <a:t>Check</a:t>
                       </a:r>
-                      <a:endParaRPr lang="en-US" sz="1600" dirty="0">
+                      <a:endParaRPr lang="en-US" sz="1535" dirty="0">
                         <a:latin typeface="IBM Plex Sans" charset="0"/>
                         <a:ea typeface="IBM Plex Sans" charset="0"/>
                         <a:cs typeface="IBM Plex Sans" charset="0"/>
                       </a:endParaRPr>
                     </a:p>
                   </a:txBody>
-                  <a:tcPr marL="152400" marR="152400" marT="114300" marB="114300" anchor="t">
+                  <a:tcPr marL="152400" marR="152400" marT="88900" marB="88900" anchor="t">
                     <a:lnL w="12700" cap="flat" cmpd="sng" algn="ctr">
                       <a:solidFill>
                         <a:srgbClr val="C4C2BC"/>
@@ -5223,12 +5765,12 @@
                     <a:p>
                       <a:pPr indent="0" marL="0">
                         <a:lnSpc>
-                          <a:spcPts val="2240"/>
+                          <a:spcPts val="2149"/>
                         </a:lnSpc>
                         <a:buNone/>
                       </a:pPr>
                       <a:r>
-                        <a:rPr lang="en-US" sz="1600" b="1" dirty="0">
+                        <a:rPr lang="en-US" sz="1535" b="1" dirty="0">
                           <a:solidFill>
                             <a:srgbClr val="8A5A00"/>
                           </a:solidFill>
@@ -5238,14 +5780,14 @@
                         </a:rPr>
                         <a:t>Records</a:t>
                       </a:r>
-                      <a:endParaRPr lang="en-US" sz="1600" dirty="0">
+                      <a:endParaRPr lang="en-US" sz="1535" dirty="0">
                         <a:latin typeface="IBM Plex Sans" charset="0"/>
                         <a:ea typeface="IBM Plex Sans" charset="0"/>
                         <a:cs typeface="IBM Plex Sans" charset="0"/>
                       </a:endParaRPr>
                     </a:p>
                   </a:txBody>
-                  <a:tcPr marL="152400" marR="152400" marT="114300" marB="114300" anchor="t">
+                  <a:tcPr marL="152400" marR="152400" marT="88900" marB="88900" anchor="t">
                     <a:lnL w="12700" cap="flat" cmpd="sng" algn="ctr">
                       <a:solidFill>
                         <a:srgbClr val="B5B4AF"/>
@@ -5294,12 +5836,12 @@
                     <a:p>
                       <a:pPr indent="0" marL="0">
                         <a:lnSpc>
-                          <a:spcPts val="2240"/>
+                          <a:spcPts val="2149"/>
                         </a:lnSpc>
                         <a:buNone/>
                       </a:pPr>
                       <a:r>
-                        <a:rPr lang="en-US" sz="1600" b="1" dirty="0">
+                        <a:rPr lang="en-US" sz="1535" b="1" dirty="0">
                           <a:solidFill>
                             <a:srgbClr val="8A5A00"/>
                           </a:solidFill>
@@ -5309,14 +5851,14 @@
                         </a:rPr>
                         <a:t>Why it matters</a:t>
                       </a:r>
-                      <a:endParaRPr lang="en-US" sz="1600" dirty="0">
+                      <a:endParaRPr lang="en-US" sz="1535" dirty="0">
                         <a:latin typeface="IBM Plex Sans" charset="0"/>
                         <a:ea typeface="IBM Plex Sans" charset="0"/>
                         <a:cs typeface="IBM Plex Sans" charset="0"/>
                       </a:endParaRPr>
                     </a:p>
                   </a:txBody>
-                  <a:tcPr marL="152400" marR="152400" marT="114300" marB="114300" anchor="t">
+                  <a:tcPr marL="152400" marR="152400" marT="88900" marB="88900" anchor="t">
                     <a:lnL w="12700" cap="flat" cmpd="sng" algn="ctr">
                       <a:solidFill>
                         <a:srgbClr val="B5B4AF"/>
@@ -5359,7 +5901,7 @@
                   </a:tcPr>
                 </a:tc>
               </a:tr>
-              <a:tr h="523240">
+              <a:tr h="469186">
                 <a:tc>
                   <a:txBody>
                     <a:bodyPr/>
@@ -5367,12 +5909,12 @@
                     <a:p>
                       <a:pPr indent="0" marL="0">
                         <a:lnSpc>
-                          <a:spcPts val="2240"/>
+                          <a:spcPts val="2149"/>
                         </a:lnSpc>
                         <a:buNone/>
                       </a:pPr>
                       <a:r>
-                        <a:rPr lang="en-US" sz="1600" dirty="0">
+                        <a:rPr lang="en-US" sz="1535" dirty="0">
                           <a:solidFill>
                             <a:srgbClr val="1B1C1E"/>
                           </a:solidFill>
@@ -5382,14 +5924,14 @@
                         </a:rPr>
                         <a:t>Zero distance</a:t>
                       </a:r>
-                      <a:endParaRPr lang="en-US" sz="1600" dirty="0">
+                      <a:endParaRPr lang="en-US" sz="1535" dirty="0">
                         <a:latin typeface="IBM Plex Sans" charset="0"/>
                         <a:ea typeface="IBM Plex Sans" charset="0"/>
                         <a:cs typeface="IBM Plex Sans" charset="0"/>
                       </a:endParaRPr>
                     </a:p>
                   </a:txBody>
-                  <a:tcPr marL="152400" marR="152400" marT="114300" marB="114300" anchor="t">
+                  <a:tcPr marL="152400" marR="152400" marT="88900" marB="88900" anchor="t">
                     <a:lnL w="12700" cap="flat" cmpd="sng" algn="ctr">
                       <a:solidFill>
                         <a:srgbClr val="C4C2BC"/>
@@ -5435,12 +5977,12 @@
                     <a:p>
                       <a:pPr indent="0" marL="0">
                         <a:lnSpc>
-                          <a:spcPts val="2240"/>
+                          <a:spcPts val="2149"/>
                         </a:lnSpc>
                         <a:buNone/>
                       </a:pPr>
                       <a:r>
-                        <a:rPr lang="en-US" sz="1600" dirty="0">
+                        <a:rPr lang="en-US" sz="1535" dirty="0">
                           <a:solidFill>
                             <a:srgbClr val="1B1C1E"/>
                           </a:solidFill>
@@ -5450,14 +5992,14 @@
                         </a:rPr>
                         <a:t>14,250</a:t>
                       </a:r>
-                      <a:endParaRPr lang="en-US" sz="1600" dirty="0">
+                      <a:endParaRPr lang="en-US" sz="1535" dirty="0">
                         <a:latin typeface="IBM Plex Sans" charset="0"/>
                         <a:ea typeface="IBM Plex Sans" charset="0"/>
                         <a:cs typeface="IBM Plex Sans" charset="0"/>
                       </a:endParaRPr>
                     </a:p>
                   </a:txBody>
-                  <a:tcPr marL="152400" marR="152400" marT="114300" marB="114300" anchor="t">
+                  <a:tcPr marL="152400" marR="152400" marT="88900" marB="88900" anchor="t">
                     <a:lnL w="12700" cap="flat" cmpd="sng" algn="ctr">
                       <a:solidFill>
                         <a:srgbClr val="C4C2BC"/>
@@ -5503,12 +6045,12 @@
                     <a:p>
                       <a:pPr indent="0" marL="0">
                         <a:lnSpc>
-                          <a:spcPts val="2240"/>
+                          <a:spcPts val="2149"/>
                         </a:lnSpc>
                         <a:buNone/>
                       </a:pPr>
                       <a:r>
-                        <a:rPr lang="en-US" sz="1600" dirty="0">
+                        <a:rPr lang="en-US" sz="1535" dirty="0">
                           <a:solidFill>
                             <a:srgbClr val="5D5F63"/>
                           </a:solidFill>
@@ -5518,14 +6060,14 @@
                         </a:rPr>
                         <a:t>Many still have a non-zero fare</a:t>
                       </a:r>
-                      <a:endParaRPr lang="en-US" sz="1600" dirty="0">
+                      <a:endParaRPr lang="en-US" sz="1535" dirty="0">
                         <a:latin typeface="IBM Plex Sans" charset="0"/>
                         <a:ea typeface="IBM Plex Sans" charset="0"/>
                         <a:cs typeface="IBM Plex Sans" charset="0"/>
                       </a:endParaRPr>
                     </a:p>
                   </a:txBody>
-                  <a:tcPr marL="152400" marR="152400" marT="114300" marB="114300" anchor="t">
+                  <a:tcPr marL="152400" marR="152400" marT="88900" marB="88900" anchor="t">
                     <a:lnL w="12700" cap="flat" cmpd="sng" algn="ctr">
                       <a:solidFill>
                         <a:srgbClr val="C4C2BC"/>
@@ -5565,7 +6107,7 @@
                   </a:tcPr>
                 </a:tc>
               </a:tr>
-              <a:tr h="807720">
+              <a:tr h="469186">
                 <a:tc>
                   <a:txBody>
                     <a:bodyPr/>
@@ -5573,12 +6115,12 @@
                     <a:p>
                       <a:pPr indent="0" marL="0">
                         <a:lnSpc>
-                          <a:spcPts val="2240"/>
+                          <a:spcPts val="2149"/>
                         </a:lnSpc>
                         <a:buNone/>
                       </a:pPr>
                       <a:r>
-                        <a:rPr lang="en-US" sz="1600" dirty="0">
+                        <a:rPr lang="en-US" sz="1535" dirty="0">
                           <a:solidFill>
                             <a:srgbClr val="1B1C1E"/>
                           </a:solidFill>
@@ -5586,16 +6128,16 @@
                           <a:ea typeface="IBM Plex Sans" pitchFamily="34" charset="-122"/>
                           <a:cs typeface="IBM Plex Sans" pitchFamily="34" charset="-120"/>
                         </a:rPr>
-                        <a:t>Distance over 200 km</a:t>
+                        <a:t>Zero coordinate (GPS default)</a:t>
                       </a:r>
-                      <a:endParaRPr lang="en-US" sz="1600" dirty="0">
+                      <a:endParaRPr lang="en-US" sz="1535" dirty="0">
                         <a:latin typeface="IBM Plex Sans" charset="0"/>
                         <a:ea typeface="IBM Plex Sans" charset="0"/>
                         <a:cs typeface="IBM Plex Sans" charset="0"/>
                       </a:endParaRPr>
                     </a:p>
                   </a:txBody>
-                  <a:tcPr marL="152400" marR="152400" marT="114300" marB="114300" anchor="t">
+                  <a:tcPr marL="152400" marR="152400" marT="88900" marB="88900" anchor="t">
                     <a:lnL w="12700" cap="flat" cmpd="sng" algn="ctr">
                       <a:solidFill>
                         <a:srgbClr val="C4C2BC"/>
@@ -5641,12 +6183,12 @@
                     <a:p>
                       <a:pPr indent="0" marL="0">
                         <a:lnSpc>
-                          <a:spcPts val="2240"/>
+                          <a:spcPts val="2149"/>
                         </a:lnSpc>
                         <a:buNone/>
                       </a:pPr>
                       <a:r>
-                        <a:rPr lang="en-US" sz="1600" dirty="0">
+                        <a:rPr lang="en-US" sz="1535" dirty="0">
                           <a:solidFill>
                             <a:srgbClr val="1B1C1E"/>
                           </a:solidFill>
@@ -5654,16 +6196,16 @@
                           <a:ea typeface="IBM Plex Sans" pitchFamily="34" charset="-122"/>
                           <a:cs typeface="IBM Plex Sans" pitchFamily="34" charset="-120"/>
                         </a:rPr>
-                        <a:t>1,004</a:t>
+                        <a:t>9,893</a:t>
                       </a:r>
-                      <a:endParaRPr lang="en-US" sz="1600" dirty="0">
+                      <a:endParaRPr lang="en-US" sz="1535" dirty="0">
                         <a:latin typeface="IBM Plex Sans" charset="0"/>
                         <a:ea typeface="IBM Plex Sans" charset="0"/>
                         <a:cs typeface="IBM Plex Sans" charset="0"/>
                       </a:endParaRPr>
                     </a:p>
                   </a:txBody>
-                  <a:tcPr marL="152400" marR="152400" marT="114300" marB="114300" anchor="t">
+                  <a:tcPr marL="152400" marR="152400" marT="88900" marB="88900" anchor="t">
                     <a:lnL w="12700" cap="flat" cmpd="sng" algn="ctr">
                       <a:solidFill>
                         <a:srgbClr val="C4C2BC"/>
@@ -5709,12 +6251,12 @@
                     <a:p>
                       <a:pPr indent="0" marL="0">
                         <a:lnSpc>
-                          <a:spcPts val="2240"/>
+                          <a:spcPts val="2149"/>
                         </a:lnSpc>
                         <a:buNone/>
                       </a:pPr>
                       <a:r>
-                        <a:rPr lang="en-US" sz="1600" dirty="0">
+                        <a:rPr lang="en-US" sz="1535" dirty="0">
                           <a:solidFill>
                             <a:srgbClr val="5D5F63"/>
                           </a:solidFill>
@@ -5722,16 +6264,16 @@
                           <a:ea typeface="IBM Plex Sans" pitchFamily="34" charset="-122"/>
                           <a:cs typeface="IBM Plex Sans" pitchFamily="34" charset="-120"/>
                         </a:rPr>
-                        <a:t>Up to ~12,000 km — impossible for a taxi ride</a:t>
+                        <a:t>Pickup or dropoff recorded at (0, 0)</a:t>
                       </a:r>
-                      <a:endParaRPr lang="en-US" sz="1600" dirty="0">
+                      <a:endParaRPr lang="en-US" sz="1535" dirty="0">
                         <a:latin typeface="IBM Plex Sans" charset="0"/>
                         <a:ea typeface="IBM Plex Sans" charset="0"/>
                         <a:cs typeface="IBM Plex Sans" charset="0"/>
                       </a:endParaRPr>
                     </a:p>
                   </a:txBody>
-                  <a:tcPr marL="152400" marR="152400" marT="114300" marB="114300" anchor="t">
+                  <a:tcPr marL="152400" marR="152400" marT="88900" marB="88900" anchor="t">
                     <a:lnL w="12700" cap="flat" cmpd="sng" algn="ctr">
                       <a:solidFill>
                         <a:srgbClr val="C4C2BC"/>
@@ -5771,7 +6313,7 @@
                   </a:tcPr>
                 </a:tc>
               </a:tr>
-              <a:tr h="807720">
+              <a:tr h="469186">
                 <a:tc>
                   <a:txBody>
                     <a:bodyPr/>
@@ -5779,12 +6321,12 @@
                     <a:p>
                       <a:pPr indent="0" marL="0">
                         <a:lnSpc>
-                          <a:spcPts val="2240"/>
+                          <a:spcPts val="2149"/>
                         </a:lnSpc>
                         <a:buNone/>
                       </a:pPr>
                       <a:r>
-                        <a:rPr lang="en-US" sz="1600" dirty="0">
+                        <a:rPr lang="en-US" sz="1535" dirty="0">
                           <a:solidFill>
                             <a:srgbClr val="1B1C1E"/>
                           </a:solidFill>
@@ -5792,16 +6334,16 @@
                           <a:ea typeface="IBM Plex Sans" pitchFamily="34" charset="-122"/>
                           <a:cs typeface="IBM Plex Sans" pitchFamily="34" charset="-120"/>
                         </a:rPr>
-                        <a:t>Fare over 100 for under 1 km</a:t>
+                        <a:t>Zero passengers</a:t>
                       </a:r>
-                      <a:endParaRPr lang="en-US" sz="1600" dirty="0">
+                      <a:endParaRPr lang="en-US" sz="1535" dirty="0">
                         <a:latin typeface="IBM Plex Sans" charset="0"/>
                         <a:ea typeface="IBM Plex Sans" charset="0"/>
                         <a:cs typeface="IBM Plex Sans" charset="0"/>
                       </a:endParaRPr>
                     </a:p>
                   </a:txBody>
-                  <a:tcPr marL="152400" marR="152400" marT="114300" marB="114300" anchor="t">
+                  <a:tcPr marL="152400" marR="152400" marT="88900" marB="88900" anchor="t">
                     <a:lnL w="12700" cap="flat" cmpd="sng" algn="ctr">
                       <a:solidFill>
                         <a:srgbClr val="C4C2BC"/>
@@ -5847,12 +6389,12 @@
                     <a:p>
                       <a:pPr indent="0" marL="0">
                         <a:lnSpc>
-                          <a:spcPts val="2240"/>
+                          <a:spcPts val="2149"/>
                         </a:lnSpc>
                         <a:buNone/>
                       </a:pPr>
                       <a:r>
-                        <a:rPr lang="en-US" sz="1600" dirty="0">
+                        <a:rPr lang="en-US" sz="1535" dirty="0">
                           <a:solidFill>
                             <a:srgbClr val="1B1C1E"/>
                           </a:solidFill>
@@ -5860,16 +6402,16 @@
                           <a:ea typeface="IBM Plex Sans" pitchFamily="34" charset="-122"/>
                           <a:cs typeface="IBM Plex Sans" pitchFamily="34" charset="-120"/>
                         </a:rPr>
-                        <a:t>93</a:t>
+                        <a:t>1,796</a:t>
                       </a:r>
-                      <a:endParaRPr lang="en-US" sz="1600" dirty="0">
+                      <a:endParaRPr lang="en-US" sz="1535" dirty="0">
                         <a:latin typeface="IBM Plex Sans" charset="0"/>
                         <a:ea typeface="IBM Plex Sans" charset="0"/>
                         <a:cs typeface="IBM Plex Sans" charset="0"/>
                       </a:endParaRPr>
                     </a:p>
                   </a:txBody>
-                  <a:tcPr marL="152400" marR="152400" marT="114300" marB="114300" anchor="t">
+                  <a:tcPr marL="152400" marR="152400" marT="88900" marB="88900" anchor="t">
                     <a:lnL w="12700" cap="flat" cmpd="sng" algn="ctr">
                       <a:solidFill>
                         <a:srgbClr val="C4C2BC"/>
@@ -5915,12 +6457,12 @@
                     <a:p>
                       <a:pPr indent="0" marL="0">
                         <a:lnSpc>
-                          <a:spcPts val="2240"/>
+                          <a:spcPts val="2149"/>
                         </a:lnSpc>
                         <a:buNone/>
                       </a:pPr>
                       <a:r>
-                        <a:rPr lang="en-US" sz="1600" dirty="0">
+                        <a:rPr lang="en-US" sz="1535" dirty="0">
                           <a:solidFill>
                             <a:srgbClr val="5D5F63"/>
                           </a:solidFill>
@@ -5928,16 +6470,16 @@
                           <a:ea typeface="IBM Plex Sans" pitchFamily="34" charset="-122"/>
                           <a:cs typeface="IBM Plex Sans" pitchFamily="34" charset="-120"/>
                         </a:rPr>
-                        <a:t>Likely entry errors or special charges</a:t>
+                        <a:t>Not a valid trip</a:t>
                       </a:r>
-                      <a:endParaRPr lang="en-US" sz="1600" dirty="0">
+                      <a:endParaRPr lang="en-US" sz="1535" dirty="0">
                         <a:latin typeface="IBM Plex Sans" charset="0"/>
                         <a:ea typeface="IBM Plex Sans" charset="0"/>
                         <a:cs typeface="IBM Plex Sans" charset="0"/>
                       </a:endParaRPr>
                     </a:p>
                   </a:txBody>
-                  <a:tcPr marL="152400" marR="152400" marT="114300" marB="114300" anchor="t">
+                  <a:tcPr marL="152400" marR="152400" marT="88900" marB="88900" anchor="t">
                     <a:lnL w="12700" cap="flat" cmpd="sng" algn="ctr">
                       <a:solidFill>
                         <a:srgbClr val="C4C2BC"/>
@@ -5977,7 +6519,7 @@
                   </a:tcPr>
                 </a:tc>
               </a:tr>
-              <a:tr h="807720">
+              <a:tr h="742077">
                 <a:tc>
                   <a:txBody>
                     <a:bodyPr/>
@@ -5985,12 +6527,12 @@
                     <a:p>
                       <a:pPr indent="0" marL="0">
                         <a:lnSpc>
-                          <a:spcPts val="2240"/>
+                          <a:spcPts val="2149"/>
                         </a:lnSpc>
                         <a:buNone/>
                       </a:pPr>
                       <a:r>
-                        <a:rPr lang="en-US" sz="1600" dirty="0">
+                        <a:rPr lang="en-US" sz="1535" dirty="0">
                           <a:solidFill>
                             <a:srgbClr val="1B1C1E"/>
                           </a:solidFill>
@@ -5998,16 +6540,16 @@
                           <a:ea typeface="IBM Plex Sans" pitchFamily="34" charset="-122"/>
                           <a:cs typeface="IBM Plex Sans" pitchFamily="34" charset="-120"/>
                         </a:rPr>
-                        <a:t>Negative fare</a:t>
+                        <a:t>Distance over 200 km</a:t>
                       </a:r>
-                      <a:endParaRPr lang="en-US" sz="1600" dirty="0">
+                      <a:endParaRPr lang="en-US" sz="1535" dirty="0">
                         <a:latin typeface="IBM Plex Sans" charset="0"/>
                         <a:ea typeface="IBM Plex Sans" charset="0"/>
                         <a:cs typeface="IBM Plex Sans" charset="0"/>
                       </a:endParaRPr>
                     </a:p>
                   </a:txBody>
-                  <a:tcPr marL="152400" marR="152400" marT="114300" marB="114300" anchor="t">
+                  <a:tcPr marL="152400" marR="152400" marT="88900" marB="88900" anchor="t">
                     <a:lnL w="12700" cap="flat" cmpd="sng" algn="ctr">
                       <a:solidFill>
                         <a:srgbClr val="C4C2BC"/>
@@ -6053,12 +6595,12 @@
                     <a:p>
                       <a:pPr indent="0" marL="0">
                         <a:lnSpc>
-                          <a:spcPts val="2240"/>
+                          <a:spcPts val="2149"/>
                         </a:lnSpc>
                         <a:buNone/>
                       </a:pPr>
                       <a:r>
-                        <a:rPr lang="en-US" sz="1600" dirty="0">
+                        <a:rPr lang="en-US" sz="1535" dirty="0">
                           <a:solidFill>
                             <a:srgbClr val="1B1C1E"/>
                           </a:solidFill>
@@ -6066,16 +6608,16 @@
                           <a:ea typeface="IBM Plex Sans" pitchFamily="34" charset="-122"/>
                           <a:cs typeface="IBM Plex Sans" pitchFamily="34" charset="-120"/>
                         </a:rPr>
-                        <a:t>21</a:t>
+                        <a:t>1,004</a:t>
                       </a:r>
-                      <a:endParaRPr lang="en-US" sz="1600" dirty="0">
+                      <a:endParaRPr lang="en-US" sz="1535" dirty="0">
                         <a:latin typeface="IBM Plex Sans" charset="0"/>
                         <a:ea typeface="IBM Plex Sans" charset="0"/>
                         <a:cs typeface="IBM Plex Sans" charset="0"/>
                       </a:endParaRPr>
                     </a:p>
                   </a:txBody>
-                  <a:tcPr marL="152400" marR="152400" marT="114300" marB="114300" anchor="t">
+                  <a:tcPr marL="152400" marR="152400" marT="88900" marB="88900" anchor="t">
                     <a:lnL w="12700" cap="flat" cmpd="sng" algn="ctr">
                       <a:solidFill>
                         <a:srgbClr val="C4C2BC"/>
@@ -6121,12 +6663,12 @@
                     <a:p>
                       <a:pPr indent="0" marL="0">
                         <a:lnSpc>
-                          <a:spcPts val="2240"/>
+                          <a:spcPts val="2149"/>
                         </a:lnSpc>
                         <a:buNone/>
                       </a:pPr>
                       <a:r>
-                        <a:rPr lang="en-US" sz="1600" dirty="0">
+                        <a:rPr lang="en-US" sz="1535" dirty="0">
                           <a:solidFill>
                             <a:srgbClr val="5D5F63"/>
                           </a:solidFill>
@@ -6134,16 +6676,16 @@
                           <a:ea typeface="IBM Plex Sans" pitchFamily="34" charset="-122"/>
                           <a:cs typeface="IBM Plex Sans" pitchFamily="34" charset="-120"/>
                         </a:rPr>
-                        <a:t>Physically impossible (as low as −44.90)</a:t>
+                        <a:t>Up to ~12,000 km — impossible for a taxi ride</a:t>
                       </a:r>
-                      <a:endParaRPr lang="en-US" sz="1600" dirty="0">
+                      <a:endParaRPr lang="en-US" sz="1535" dirty="0">
                         <a:latin typeface="IBM Plex Sans" charset="0"/>
                         <a:ea typeface="IBM Plex Sans" charset="0"/>
                         <a:cs typeface="IBM Plex Sans" charset="0"/>
                       </a:endParaRPr>
                     </a:p>
                   </a:txBody>
-                  <a:tcPr marL="152400" marR="152400" marT="114300" marB="114300" anchor="t">
+                  <a:tcPr marL="152400" marR="152400" marT="88900" marB="88900" anchor="t">
                     <a:lnL w="12700" cap="flat" cmpd="sng" algn="ctr">
                       <a:solidFill>
                         <a:srgbClr val="C4C2BC"/>
@@ -6183,7 +6725,7 @@
                   </a:tcPr>
                 </a:tc>
               </a:tr>
-              <a:tr h="523240">
+              <a:tr h="469186">
                 <a:tc>
                   <a:txBody>
                     <a:bodyPr/>
@@ -6191,12 +6733,12 @@
                     <a:p>
                       <a:pPr indent="0" marL="0">
                         <a:lnSpc>
-                          <a:spcPts val="2240"/>
+                          <a:spcPts val="2149"/>
                         </a:lnSpc>
                         <a:buNone/>
                       </a:pPr>
                       <a:r>
-                        <a:rPr lang="en-US" sz="1600" dirty="0">
+                        <a:rPr lang="en-US" sz="1535" dirty="0">
                           <a:solidFill>
                             <a:srgbClr val="1B1C1E"/>
                           </a:solidFill>
@@ -6204,16 +6746,16 @@
                           <a:ea typeface="IBM Plex Sans" pitchFamily="34" charset="-122"/>
                           <a:cs typeface="IBM Plex Sans" pitchFamily="34" charset="-120"/>
                         </a:rPr>
-                        <a:t>Zero fare</a:t>
+                        <a:t>Fare over 100 for under 1 km</a:t>
                       </a:r>
-                      <a:endParaRPr lang="en-US" sz="1600" dirty="0">
+                      <a:endParaRPr lang="en-US" sz="1535" dirty="0">
                         <a:latin typeface="IBM Plex Sans" charset="0"/>
                         <a:ea typeface="IBM Plex Sans" charset="0"/>
                         <a:cs typeface="IBM Plex Sans" charset="0"/>
                       </a:endParaRPr>
                     </a:p>
                   </a:txBody>
-                  <a:tcPr marL="152400" marR="152400" marT="114300" marB="114300" anchor="t">
+                  <a:tcPr marL="152400" marR="152400" marT="88900" marB="88900" anchor="t">
                     <a:lnL w="12700" cap="flat" cmpd="sng" algn="ctr">
                       <a:solidFill>
                         <a:srgbClr val="C4C2BC"/>
@@ -6259,12 +6801,12 @@
                     <a:p>
                       <a:pPr indent="0" marL="0">
                         <a:lnSpc>
-                          <a:spcPts val="2240"/>
+                          <a:spcPts val="2149"/>
                         </a:lnSpc>
                         <a:buNone/>
                       </a:pPr>
                       <a:r>
-                        <a:rPr lang="en-US" sz="1600" dirty="0">
+                        <a:rPr lang="en-US" sz="1535" dirty="0">
                           <a:solidFill>
                             <a:srgbClr val="1B1C1E"/>
                           </a:solidFill>
@@ -6272,16 +6814,16 @@
                           <a:ea typeface="IBM Plex Sans" pitchFamily="34" charset="-122"/>
                           <a:cs typeface="IBM Plex Sans" pitchFamily="34" charset="-120"/>
                         </a:rPr>
-                        <a:t>14</a:t>
+                        <a:t>93</a:t>
                       </a:r>
-                      <a:endParaRPr lang="en-US" sz="1600" dirty="0">
+                      <a:endParaRPr lang="en-US" sz="1535" dirty="0">
                         <a:latin typeface="IBM Plex Sans" charset="0"/>
                         <a:ea typeface="IBM Plex Sans" charset="0"/>
                         <a:cs typeface="IBM Plex Sans" charset="0"/>
                       </a:endParaRPr>
                     </a:p>
                   </a:txBody>
-                  <a:tcPr marL="152400" marR="152400" marT="114300" marB="114300" anchor="t">
+                  <a:tcPr marL="152400" marR="152400" marT="88900" marB="88900" anchor="t">
                     <a:lnL w="12700" cap="flat" cmpd="sng" algn="ctr">
                       <a:solidFill>
                         <a:srgbClr val="C4C2BC"/>
@@ -6327,12 +6869,424 @@
                     <a:p>
                       <a:pPr indent="0" marL="0">
                         <a:lnSpc>
-                          <a:spcPts val="2240"/>
+                          <a:spcPts val="2149"/>
                         </a:lnSpc>
                         <a:buNone/>
                       </a:pPr>
                       <a:r>
-                        <a:rPr lang="en-US" sz="1600" dirty="0">
+                        <a:rPr lang="en-US" sz="1535" dirty="0">
+                          <a:solidFill>
+                            <a:srgbClr val="5D5F63"/>
+                          </a:solidFill>
+                          <a:latin typeface="IBM Plex Sans" pitchFamily="34" charset="0"/>
+                          <a:ea typeface="IBM Plex Sans" pitchFamily="34" charset="-122"/>
+                          <a:cs typeface="IBM Plex Sans" pitchFamily="34" charset="-120"/>
+                        </a:rPr>
+                        <a:t>Likely entry errors or special charges</a:t>
+                      </a:r>
+                      <a:endParaRPr lang="en-US" sz="1535" dirty="0">
+                        <a:latin typeface="IBM Plex Sans" charset="0"/>
+                        <a:ea typeface="IBM Plex Sans" charset="0"/>
+                        <a:cs typeface="IBM Plex Sans" charset="0"/>
+                      </a:endParaRPr>
+                    </a:p>
+                  </a:txBody>
+                  <a:tcPr marL="152400" marR="152400" marT="88900" marB="88900" anchor="t">
+                    <a:lnL w="12700" cap="flat" cmpd="sng" algn="ctr">
+                      <a:solidFill>
+                        <a:srgbClr val="C4C2BC"/>
+                      </a:solidFill>
+                      <a:prstDash val="solid"/>
+                      <a:round/>
+                      <a:headEnd type="none" w="med" len="med"/>
+                      <a:tailEnd type="none" w="med" len="med"/>
+                    </a:lnL>
+                    <a:lnR w="12700" cap="flat" cmpd="sng" algn="ctr">
+                      <a:solidFill>
+                        <a:srgbClr val="C4C2BC"/>
+                      </a:solidFill>
+                      <a:prstDash val="solid"/>
+                      <a:round/>
+                      <a:headEnd type="none" w="med" len="med"/>
+                      <a:tailEnd type="none" w="med" len="med"/>
+                    </a:lnR>
+                    <a:lnT w="12700" cap="flat" cmpd="sng" algn="ctr">
+                      <a:solidFill>
+                        <a:srgbClr val="C4C2BC"/>
+                      </a:solidFill>
+                      <a:prstDash val="solid"/>
+                      <a:round/>
+                      <a:headEnd type="none" w="med" len="med"/>
+                      <a:tailEnd type="none" w="med" len="med"/>
+                    </a:lnT>
+                    <a:lnB w="12700" cap="flat" cmpd="sng" algn="ctr">
+                      <a:solidFill>
+                        <a:srgbClr val="C4C2BC"/>
+                      </a:solidFill>
+                      <a:prstDash val="solid"/>
+                      <a:round/>
+                      <a:headEnd type="none" w="med" len="med"/>
+                      <a:tailEnd type="none" w="med" len="med"/>
+                    </a:lnB>
+                  </a:tcPr>
+                </a:tc>
+              </a:tr>
+              <a:tr h="742156">
+                <a:tc>
+                  <a:txBody>
+                    <a:bodyPr/>
+                    <a:lstStyle/>
+                    <a:p>
+                      <a:pPr indent="0" marL="0">
+                        <a:lnSpc>
+                          <a:spcPts val="2149"/>
+                        </a:lnSpc>
+                        <a:buNone/>
+                      </a:pPr>
+                      <a:r>
+                        <a:rPr lang="en-US" sz="1535" dirty="0">
+                          <a:solidFill>
+                            <a:srgbClr val="1B1C1E"/>
+                          </a:solidFill>
+                          <a:latin typeface="IBM Plex Sans" pitchFamily="34" charset="0"/>
+                          <a:ea typeface="IBM Plex Sans" pitchFamily="34" charset="-122"/>
+                          <a:cs typeface="IBM Plex Sans" pitchFamily="34" charset="-120"/>
+                        </a:rPr>
+                        <a:t>Negative fare</a:t>
+                      </a:r>
+                      <a:endParaRPr lang="en-US" sz="1535" dirty="0">
+                        <a:latin typeface="IBM Plex Sans" charset="0"/>
+                        <a:ea typeface="IBM Plex Sans" charset="0"/>
+                        <a:cs typeface="IBM Plex Sans" charset="0"/>
+                      </a:endParaRPr>
+                    </a:p>
+                  </a:txBody>
+                  <a:tcPr marL="152400" marR="152400" marT="88900" marB="88900" anchor="t">
+                    <a:lnL w="12700" cap="flat" cmpd="sng" algn="ctr">
+                      <a:solidFill>
+                        <a:srgbClr val="C4C2BC"/>
+                      </a:solidFill>
+                      <a:prstDash val="solid"/>
+                      <a:round/>
+                      <a:headEnd type="none" w="med" len="med"/>
+                      <a:tailEnd type="none" w="med" len="med"/>
+                    </a:lnL>
+                    <a:lnR w="12700" cap="flat" cmpd="sng" algn="ctr">
+                      <a:solidFill>
+                        <a:srgbClr val="C4C2BC"/>
+                      </a:solidFill>
+                      <a:prstDash val="solid"/>
+                      <a:round/>
+                      <a:headEnd type="none" w="med" len="med"/>
+                      <a:tailEnd type="none" w="med" len="med"/>
+                    </a:lnR>
+                    <a:lnT w="12700" cap="flat" cmpd="sng" algn="ctr">
+                      <a:solidFill>
+                        <a:srgbClr val="C4C2BC"/>
+                      </a:solidFill>
+                      <a:prstDash val="solid"/>
+                      <a:round/>
+                      <a:headEnd type="none" w="med" len="med"/>
+                      <a:tailEnd type="none" w="med" len="med"/>
+                    </a:lnT>
+                    <a:lnB w="12700" cap="flat" cmpd="sng" algn="ctr">
+                      <a:solidFill>
+                        <a:srgbClr val="C4C2BC"/>
+                      </a:solidFill>
+                      <a:prstDash val="solid"/>
+                      <a:round/>
+                      <a:headEnd type="none" w="med" len="med"/>
+                      <a:tailEnd type="none" w="med" len="med"/>
+                    </a:lnB>
+                  </a:tcPr>
+                </a:tc>
+                <a:tc>
+                  <a:txBody>
+                    <a:bodyPr/>
+                    <a:lstStyle/>
+                    <a:p>
+                      <a:pPr indent="0" marL="0">
+                        <a:lnSpc>
+                          <a:spcPts val="2149"/>
+                        </a:lnSpc>
+                        <a:buNone/>
+                      </a:pPr>
+                      <a:r>
+                        <a:rPr lang="en-US" sz="1535" dirty="0">
+                          <a:solidFill>
+                            <a:srgbClr val="1B1C1E"/>
+                          </a:solidFill>
+                          <a:latin typeface="IBM Plex Sans" pitchFamily="34" charset="0"/>
+                          <a:ea typeface="IBM Plex Sans" pitchFamily="34" charset="-122"/>
+                          <a:cs typeface="IBM Plex Sans" pitchFamily="34" charset="-120"/>
+                        </a:rPr>
+                        <a:t>21</a:t>
+                      </a:r>
+                      <a:endParaRPr lang="en-US" sz="1535" dirty="0">
+                        <a:latin typeface="IBM Plex Sans" charset="0"/>
+                        <a:ea typeface="IBM Plex Sans" charset="0"/>
+                        <a:cs typeface="IBM Plex Sans" charset="0"/>
+                      </a:endParaRPr>
+                    </a:p>
+                  </a:txBody>
+                  <a:tcPr marL="152400" marR="152400" marT="88900" marB="88900" anchor="t">
+                    <a:lnL w="12700" cap="flat" cmpd="sng" algn="ctr">
+                      <a:solidFill>
+                        <a:srgbClr val="C4C2BC"/>
+                      </a:solidFill>
+                      <a:prstDash val="solid"/>
+                      <a:round/>
+                      <a:headEnd type="none" w="med" len="med"/>
+                      <a:tailEnd type="none" w="med" len="med"/>
+                    </a:lnL>
+                    <a:lnR w="12700" cap="flat" cmpd="sng" algn="ctr">
+                      <a:solidFill>
+                        <a:srgbClr val="C4C2BC"/>
+                      </a:solidFill>
+                      <a:prstDash val="solid"/>
+                      <a:round/>
+                      <a:headEnd type="none" w="med" len="med"/>
+                      <a:tailEnd type="none" w="med" len="med"/>
+                    </a:lnR>
+                    <a:lnT w="12700" cap="flat" cmpd="sng" algn="ctr">
+                      <a:solidFill>
+                        <a:srgbClr val="C4C2BC"/>
+                      </a:solidFill>
+                      <a:prstDash val="solid"/>
+                      <a:round/>
+                      <a:headEnd type="none" w="med" len="med"/>
+                      <a:tailEnd type="none" w="med" len="med"/>
+                    </a:lnT>
+                    <a:lnB w="12700" cap="flat" cmpd="sng" algn="ctr">
+                      <a:solidFill>
+                        <a:srgbClr val="C4C2BC"/>
+                      </a:solidFill>
+                      <a:prstDash val="solid"/>
+                      <a:round/>
+                      <a:headEnd type="none" w="med" len="med"/>
+                      <a:tailEnd type="none" w="med" len="med"/>
+                    </a:lnB>
+                  </a:tcPr>
+                </a:tc>
+                <a:tc>
+                  <a:txBody>
+                    <a:bodyPr/>
+                    <a:lstStyle/>
+                    <a:p>
+                      <a:pPr indent="0" marL="0">
+                        <a:lnSpc>
+                          <a:spcPts val="2149"/>
+                        </a:lnSpc>
+                        <a:buNone/>
+                      </a:pPr>
+                      <a:r>
+                        <a:rPr lang="en-US" sz="1535" dirty="0">
+                          <a:solidFill>
+                            <a:srgbClr val="5D5F63"/>
+                          </a:solidFill>
+                          <a:latin typeface="IBM Plex Sans" pitchFamily="34" charset="0"/>
+                          <a:ea typeface="IBM Plex Sans" pitchFamily="34" charset="-122"/>
+                          <a:cs typeface="IBM Plex Sans" pitchFamily="34" charset="-120"/>
+                        </a:rPr>
+                        <a:t>Physically impossible (as low as −44.90)</a:t>
+                      </a:r>
+                      <a:endParaRPr lang="en-US" sz="1535" dirty="0">
+                        <a:latin typeface="IBM Plex Sans" charset="0"/>
+                        <a:ea typeface="IBM Plex Sans" charset="0"/>
+                        <a:cs typeface="IBM Plex Sans" charset="0"/>
+                      </a:endParaRPr>
+                    </a:p>
+                  </a:txBody>
+                  <a:tcPr marL="152400" marR="152400" marT="88900" marB="88900" anchor="t">
+                    <a:lnL w="12700" cap="flat" cmpd="sng" algn="ctr">
+                      <a:solidFill>
+                        <a:srgbClr val="C4C2BC"/>
+                      </a:solidFill>
+                      <a:prstDash val="solid"/>
+                      <a:round/>
+                      <a:headEnd type="none" w="med" len="med"/>
+                      <a:tailEnd type="none" w="med" len="med"/>
+                    </a:lnL>
+                    <a:lnR w="12700" cap="flat" cmpd="sng" algn="ctr">
+                      <a:solidFill>
+                        <a:srgbClr val="C4C2BC"/>
+                      </a:solidFill>
+                      <a:prstDash val="solid"/>
+                      <a:round/>
+                      <a:headEnd type="none" w="med" len="med"/>
+                      <a:tailEnd type="none" w="med" len="med"/>
+                    </a:lnR>
+                    <a:lnT w="12700" cap="flat" cmpd="sng" algn="ctr">
+                      <a:solidFill>
+                        <a:srgbClr val="C4C2BC"/>
+                      </a:solidFill>
+                      <a:prstDash val="solid"/>
+                      <a:round/>
+                      <a:headEnd type="none" w="med" len="med"/>
+                      <a:tailEnd type="none" w="med" len="med"/>
+                    </a:lnT>
+                    <a:lnB w="12700" cap="flat" cmpd="sng" algn="ctr">
+                      <a:solidFill>
+                        <a:srgbClr val="C4C2BC"/>
+                      </a:solidFill>
+                      <a:prstDash val="solid"/>
+                      <a:round/>
+                      <a:headEnd type="none" w="med" len="med"/>
+                      <a:tailEnd type="none" w="med" len="med"/>
+                    </a:lnB>
+                  </a:tcPr>
+                </a:tc>
+              </a:tr>
+              <a:tr h="469265">
+                <a:tc>
+                  <a:txBody>
+                    <a:bodyPr/>
+                    <a:lstStyle/>
+                    <a:p>
+                      <a:pPr indent="0" marL="0">
+                        <a:lnSpc>
+                          <a:spcPts val="2149"/>
+                        </a:lnSpc>
+                        <a:buNone/>
+                      </a:pPr>
+                      <a:r>
+                        <a:rPr lang="en-US" sz="1535" dirty="0">
+                          <a:solidFill>
+                            <a:srgbClr val="1B1C1E"/>
+                          </a:solidFill>
+                          <a:latin typeface="IBM Plex Sans" pitchFamily="34" charset="0"/>
+                          <a:ea typeface="IBM Plex Sans" pitchFamily="34" charset="-122"/>
+                          <a:cs typeface="IBM Plex Sans" pitchFamily="34" charset="-120"/>
+                        </a:rPr>
+                        <a:t>Zero fare</a:t>
+                      </a:r>
+                      <a:endParaRPr lang="en-US" sz="1535" dirty="0">
+                        <a:latin typeface="IBM Plex Sans" charset="0"/>
+                        <a:ea typeface="IBM Plex Sans" charset="0"/>
+                        <a:cs typeface="IBM Plex Sans" charset="0"/>
+                      </a:endParaRPr>
+                    </a:p>
+                  </a:txBody>
+                  <a:tcPr marL="152400" marR="152400" marT="88900" marB="88900" anchor="t">
+                    <a:lnL w="12700" cap="flat" cmpd="sng" algn="ctr">
+                      <a:solidFill>
+                        <a:srgbClr val="C4C2BC"/>
+                      </a:solidFill>
+                      <a:prstDash val="solid"/>
+                      <a:round/>
+                      <a:headEnd type="none" w="med" len="med"/>
+                      <a:tailEnd type="none" w="med" len="med"/>
+                    </a:lnL>
+                    <a:lnR w="12700" cap="flat" cmpd="sng" algn="ctr">
+                      <a:solidFill>
+                        <a:srgbClr val="C4C2BC"/>
+                      </a:solidFill>
+                      <a:prstDash val="solid"/>
+                      <a:round/>
+                      <a:headEnd type="none" w="med" len="med"/>
+                      <a:tailEnd type="none" w="med" len="med"/>
+                    </a:lnR>
+                    <a:lnT w="12700" cap="flat" cmpd="sng" algn="ctr">
+                      <a:solidFill>
+                        <a:srgbClr val="C4C2BC"/>
+                      </a:solidFill>
+                      <a:prstDash val="solid"/>
+                      <a:round/>
+                      <a:headEnd type="none" w="med" len="med"/>
+                      <a:tailEnd type="none" w="med" len="med"/>
+                    </a:lnT>
+                    <a:lnB w="12700" cap="flat" cmpd="sng" algn="ctr">
+                      <a:solidFill>
+                        <a:srgbClr val="C4C2BC"/>
+                      </a:solidFill>
+                      <a:prstDash val="solid"/>
+                      <a:round/>
+                      <a:headEnd type="none" w="med" len="med"/>
+                      <a:tailEnd type="none" w="med" len="med"/>
+                    </a:lnB>
+                  </a:tcPr>
+                </a:tc>
+                <a:tc>
+                  <a:txBody>
+                    <a:bodyPr/>
+                    <a:lstStyle/>
+                    <a:p>
+                      <a:pPr indent="0" marL="0">
+                        <a:lnSpc>
+                          <a:spcPts val="2149"/>
+                        </a:lnSpc>
+                        <a:buNone/>
+                      </a:pPr>
+                      <a:r>
+                        <a:rPr lang="en-US" sz="1535" dirty="0">
+                          <a:solidFill>
+                            <a:srgbClr val="1B1C1E"/>
+                          </a:solidFill>
+                          <a:latin typeface="IBM Plex Sans" pitchFamily="34" charset="0"/>
+                          <a:ea typeface="IBM Plex Sans" pitchFamily="34" charset="-122"/>
+                          <a:cs typeface="IBM Plex Sans" pitchFamily="34" charset="-120"/>
+                        </a:rPr>
+                        <a:t>14</a:t>
+                      </a:r>
+                      <a:endParaRPr lang="en-US" sz="1535" dirty="0">
+                        <a:latin typeface="IBM Plex Sans" charset="0"/>
+                        <a:ea typeface="IBM Plex Sans" charset="0"/>
+                        <a:cs typeface="IBM Plex Sans" charset="0"/>
+                      </a:endParaRPr>
+                    </a:p>
+                  </a:txBody>
+                  <a:tcPr marL="152400" marR="152400" marT="88900" marB="88900" anchor="t">
+                    <a:lnL w="12700" cap="flat" cmpd="sng" algn="ctr">
+                      <a:solidFill>
+                        <a:srgbClr val="C4C2BC"/>
+                      </a:solidFill>
+                      <a:prstDash val="solid"/>
+                      <a:round/>
+                      <a:headEnd type="none" w="med" len="med"/>
+                      <a:tailEnd type="none" w="med" len="med"/>
+                    </a:lnL>
+                    <a:lnR w="12700" cap="flat" cmpd="sng" algn="ctr">
+                      <a:solidFill>
+                        <a:srgbClr val="C4C2BC"/>
+                      </a:solidFill>
+                      <a:prstDash val="solid"/>
+                      <a:round/>
+                      <a:headEnd type="none" w="med" len="med"/>
+                      <a:tailEnd type="none" w="med" len="med"/>
+                    </a:lnR>
+                    <a:lnT w="12700" cap="flat" cmpd="sng" algn="ctr">
+                      <a:solidFill>
+                        <a:srgbClr val="C4C2BC"/>
+                      </a:solidFill>
+                      <a:prstDash val="solid"/>
+                      <a:round/>
+                      <a:headEnd type="none" w="med" len="med"/>
+                      <a:tailEnd type="none" w="med" len="med"/>
+                    </a:lnT>
+                    <a:lnB w="12700" cap="flat" cmpd="sng" algn="ctr">
+                      <a:solidFill>
+                        <a:srgbClr val="C4C2BC"/>
+                      </a:solidFill>
+                      <a:prstDash val="solid"/>
+                      <a:round/>
+                      <a:headEnd type="none" w="med" len="med"/>
+                      <a:tailEnd type="none" w="med" len="med"/>
+                    </a:lnB>
+                  </a:tcPr>
+                </a:tc>
+                <a:tc>
+                  <a:txBody>
+                    <a:bodyPr/>
+                    <a:lstStyle/>
+                    <a:p>
+                      <a:pPr indent="0" marL="0">
+                        <a:lnSpc>
+                          <a:spcPts val="2149"/>
+                        </a:lnSpc>
+                        <a:buNone/>
+                      </a:pPr>
+                      <a:r>
+                        <a:rPr lang="en-US" sz="1535" dirty="0">
                           <a:solidFill>
                             <a:srgbClr val="5D5F63"/>
                           </a:solidFill>
@@ -6342,14 +7296,14 @@
                         </a:rPr>
                         <a:t>Suspicious for a completed trip</a:t>
                       </a:r>
-                      <a:endParaRPr lang="en-US" sz="1600" dirty="0">
+                      <a:endParaRPr lang="en-US" sz="1535" dirty="0">
                         <a:latin typeface="IBM Plex Sans" charset="0"/>
                         <a:ea typeface="IBM Plex Sans" charset="0"/>
                         <a:cs typeface="IBM Plex Sans" charset="0"/>
                       </a:endParaRPr>
                     </a:p>
                   </a:txBody>
-                  <a:tcPr marL="152400" marR="152400" marT="114300" marB="114300" anchor="t">
+                  <a:tcPr marL="152400" marR="152400" marT="88900" marB="88900" anchor="t">
                     <a:lnL w="12700" cap="flat" cmpd="sng" algn="ctr">
                       <a:solidFill>
                         <a:srgbClr val="C4C2BC"/>
@@ -6431,7 +7385,7 @@
                 <a:ea typeface="IBM Plex Sans" pitchFamily="34" charset="-122"/>
                 <a:cs typeface="IBM Plex Sans" pitchFamily="34" charset="-120"/>
               </a:rPr>
-              <a:t>fare_amount: mean 11.36 · median 8.50 · skewness 4.90 · max 500</a:t>
+              <a:t>Coordinates are stored in radians · median pickup = (40.75°, −73.98°), midtown Manhattan</a:t>
             </a:r>
             <a:endParaRPr lang="en-US" sz="1200" dirty="0"/>
           </a:p>
@@ -6451,7 +7405,7 @@
     <p:bg>
       <p:bgPr>
         <a:solidFill>
-          <a:srgbClr val="F5F3EC"/>
+          <a:srgbClr val="F5B700"/>
         </a:solidFill>
       </p:bgPr>
     </p:bg>
@@ -6477,29 +7431,73 @@
         </p:nvSpPr>
         <p:spPr>
           <a:xfrm>
-            <a:off x="812800" y="812800"/>
-            <a:ext cx="10883392" cy="472440"/>
-          </a:xfrm>
-          <a:prstGeom prst="rect">
-            <a:avLst/>
-          </a:prstGeom>
-          <a:noFill/>
-          <a:ln/>
-        </p:spPr>
-        <p:txBody>
-          <a:bodyPr wrap="square" lIns="0" tIns="0" rIns="0" bIns="0" rtlCol="0" anchor="t">
-            <a:normAutofit/>
-          </a:bodyPr>
-          <a:lstStyle/>
-          <a:p>
-            <a:pPr algn="l" indent="0" marL="0">
-              <a:lnSpc>
-                <a:spcPts val="3520"/>
-              </a:lnSpc>
-              <a:buNone/>
-            </a:pPr>
-            <a:r>
-              <a:rPr lang="en-US" sz="3200" b="1" dirty="0">
+            <a:off x="812800" y="1774825"/>
+            <a:ext cx="10883392" cy="292100"/>
+          </a:xfrm>
+          <a:prstGeom prst="rect">
+            <a:avLst/>
+          </a:prstGeom>
+          <a:noFill/>
+          <a:ln/>
+        </p:spPr>
+        <p:txBody>
+          <a:bodyPr wrap="square" lIns="0" tIns="0" rIns="0" bIns="0" rtlCol="0" anchor="t">
+            <a:normAutofit/>
+          </a:bodyPr>
+          <a:lstStyle/>
+          <a:p>
+            <a:pPr algn="l" indent="0" marL="0">
+              <a:lnSpc>
+                <a:spcPts val="2100"/>
+              </a:lnSpc>
+              <a:buNone/>
+            </a:pPr>
+            <a:r>
+              <a:rPr lang="en-US" sz="1500" b="1" spc="200" kern="0" dirty="0">
+                <a:solidFill>
+                  <a:srgbClr val="1B1C1E"/>
+                </a:solidFill>
+                <a:latin typeface="IBM Plex Sans" pitchFamily="34" charset="0"/>
+                <a:ea typeface="IBM Plex Sans" pitchFamily="34" charset="-122"/>
+                <a:cs typeface="IBM Plex Sans" pitchFamily="34" charset="-120"/>
+              </a:rPr>
+              <a:t>AFTER CLEANING</a:t>
+            </a:r>
+            <a:endParaRPr lang="en-US" sz="1500" dirty="0"/>
+          </a:p>
+        </p:txBody>
+      </p:sp>
+      <p:sp>
+        <p:nvSpPr>
+          <p:cNvPr id="3" name="Text 1"/>
+          <p:cNvSpPr/>
+          <p:nvPr/>
+        </p:nvSpPr>
+        <p:spPr>
+          <a:xfrm>
+            <a:off x="812800" y="2244725"/>
+            <a:ext cx="10883392" cy="1422400"/>
+          </a:xfrm>
+          <a:prstGeom prst="rect">
+            <a:avLst/>
+          </a:prstGeom>
+          <a:noFill/>
+          <a:ln/>
+        </p:spPr>
+        <p:txBody>
+          <a:bodyPr wrap="square" lIns="0" tIns="0" rIns="0" bIns="0" rtlCol="0" anchor="t">
+            <a:normAutofit/>
+          </a:bodyPr>
+          <a:lstStyle/>
+          <a:p>
+            <a:pPr algn="l" indent="0" marL="0">
+              <a:lnSpc>
+                <a:spcPts val="11000"/>
+              </a:lnSpc>
+              <a:buNone/>
+            </a:pPr>
+            <a:r>
+              <a:rPr lang="en-US" sz="11000" b="1" dirty="0">
                 <a:solidFill>
                   <a:srgbClr val="1B1C1E"/>
                 </a:solidFill>
@@ -6507,38 +7505,11 @@
                 <a:ea typeface="Space Grotesk" pitchFamily="34" charset="-122"/>
                 <a:cs typeface="Space Grotesk" pitchFamily="34" charset="-120"/>
               </a:rPr>
-              <a:t>Eight questions at a glance</a:t>
-            </a:r>
-            <a:endParaRPr lang="en-US" sz="3200" dirty="0"/>
-          </a:p>
-        </p:txBody>
-      </p:sp>
-      <p:sp>
-        <p:nvSpPr>
-          <p:cNvPr id="3" name="Shape 1"/>
-          <p:cNvSpPr/>
-          <p:nvPr/>
-        </p:nvSpPr>
-        <p:spPr>
-          <a:xfrm>
-            <a:off x="815975" y="1567816"/>
-            <a:ext cx="2520950" cy="1682750"/>
-          </a:xfrm>
-          <a:prstGeom prst="roundRect">
-            <a:avLst>
-              <a:gd name="adj" fmla="val 5849"/>
-            </a:avLst>
-          </a:prstGeom>
-          <a:solidFill>
-            <a:srgbClr val="FFFFFF"/>
-          </a:solidFill>
-          <a:ln w="6350">
-            <a:solidFill>
-              <a:srgbClr val="E2DED2"/>
-            </a:solidFill>
-            <a:prstDash val="solid"/>
-          </a:ln>
-        </p:spPr>
+              <a:t>96.6%</a:t>
+            </a:r>
+            <a:endParaRPr lang="en-US" sz="11000" dirty="0"/>
+          </a:p>
+        </p:txBody>
       </p:sp>
       <p:sp>
         <p:nvSpPr>
@@ -6548,1240 +7519,83 @@
         </p:nvSpPr>
         <p:spPr>
           <a:xfrm>
-            <a:off x="1021080" y="1772920"/>
-            <a:ext cx="2174062" cy="256540"/>
-          </a:xfrm>
-          <a:prstGeom prst="rect">
-            <a:avLst/>
-          </a:prstGeom>
-          <a:noFill/>
-          <a:ln/>
-        </p:spPr>
-        <p:txBody>
-          <a:bodyPr wrap="square" lIns="0" tIns="0" rIns="0" bIns="0" rtlCol="0" anchor="t">
-            <a:normAutofit/>
-          </a:bodyPr>
-          <a:lstStyle/>
-          <a:p>
-            <a:pPr algn="l" indent="0" marL="0">
-              <a:lnSpc>
-                <a:spcPts val="1820"/>
-              </a:lnSpc>
-              <a:buNone/>
-            </a:pPr>
-            <a:r>
-              <a:rPr lang="en-US" sz="1300" b="1" dirty="0">
-                <a:solidFill>
-                  <a:srgbClr val="8A5A00"/>
+            <a:off x="812800" y="3844925"/>
+            <a:ext cx="10883392" cy="434340"/>
+          </a:xfrm>
+          <a:prstGeom prst="rect">
+            <a:avLst/>
+          </a:prstGeom>
+          <a:noFill/>
+          <a:ln/>
+        </p:spPr>
+        <p:txBody>
+          <a:bodyPr wrap="square" lIns="0" tIns="0" rIns="0" bIns="0" rtlCol="0" anchor="t">
+            <a:normAutofit/>
+          </a:bodyPr>
+          <a:lstStyle/>
+          <a:p>
+            <a:pPr algn="l" indent="0" marL="0">
+              <a:lnSpc>
+                <a:spcPts val="3220"/>
+              </a:lnSpc>
+              <a:buNone/>
+            </a:pPr>
+            <a:r>
+              <a:rPr lang="en-US" sz="2800" b="1" dirty="0">
+                <a:solidFill>
+                  <a:srgbClr val="1B1C1E"/>
+                </a:solidFill>
+                <a:latin typeface="Space Grotesk" pitchFamily="34" charset="0"/>
+                <a:ea typeface="Space Grotesk" pitchFamily="34" charset="-122"/>
+                <a:cs typeface="Space Grotesk" pitchFamily="34" charset="-120"/>
+              </a:rPr>
+              <a:t>of trips kept: 482,905 of 500,000</a:t>
+            </a:r>
+            <a:endParaRPr lang="en-US" sz="2800" dirty="0"/>
+          </a:p>
+        </p:txBody>
+      </p:sp>
+      <p:sp>
+        <p:nvSpPr>
+          <p:cNvPr id="5" name="Text 3"/>
+          <p:cNvSpPr/>
+          <p:nvPr/>
+        </p:nvSpPr>
+        <p:spPr>
+          <a:xfrm>
+            <a:off x="812800" y="4457066"/>
+            <a:ext cx="8502650" cy="651510"/>
+          </a:xfrm>
+          <a:prstGeom prst="rect">
+            <a:avLst/>
+          </a:prstGeom>
+          <a:noFill/>
+          <a:ln/>
+        </p:spPr>
+        <p:txBody>
+          <a:bodyPr wrap="square" lIns="0" tIns="0" rIns="0" bIns="0" rtlCol="0" anchor="t">
+            <a:normAutofit/>
+          </a:bodyPr>
+          <a:lstStyle/>
+          <a:p>
+            <a:pPr algn="l" indent="0" marL="0">
+              <a:lnSpc>
+                <a:spcPts val="2465"/>
+              </a:lnSpc>
+              <a:buNone/>
+            </a:pPr>
+            <a:r>
+              <a:rPr lang="en-US" sz="1700" dirty="0">
+                <a:solidFill>
+                  <a:srgbClr val="1B1C1E"/>
                 </a:solidFill>
                 <a:latin typeface="IBM Plex Sans" pitchFamily="34" charset="0"/>
                 <a:ea typeface="IBM Plex Sans" pitchFamily="34" charset="-122"/>
                 <a:cs typeface="IBM Plex Sans" pitchFamily="34" charset="-120"/>
               </a:rPr>
-              <a:t>Q1</a:t>
-            </a:r>
-            <a:endParaRPr lang="en-US" sz="1300" dirty="0"/>
-          </a:p>
-        </p:txBody>
-      </p:sp>
-      <p:sp>
-        <p:nvSpPr>
-          <p:cNvPr id="5" name="Text 3"/>
-          <p:cNvSpPr/>
-          <p:nvPr/>
-        </p:nvSpPr>
-        <p:spPr>
-          <a:xfrm>
-            <a:off x="1021080" y="2080261"/>
-            <a:ext cx="2174062" cy="487680"/>
-          </a:xfrm>
-          <a:prstGeom prst="rect">
-            <a:avLst/>
-          </a:prstGeom>
-          <a:noFill/>
-          <a:ln/>
-        </p:spPr>
-        <p:txBody>
-          <a:bodyPr wrap="square" lIns="0" tIns="0" rIns="0" bIns="0" rtlCol="0" anchor="t">
-            <a:normAutofit/>
-          </a:bodyPr>
-          <a:lstStyle/>
-          <a:p>
-            <a:pPr algn="l" indent="0" marL="0">
-              <a:lnSpc>
-                <a:spcPts val="1820"/>
-              </a:lnSpc>
-              <a:buNone/>
-            </a:pPr>
-            <a:r>
-              <a:rPr lang="en-US" sz="1400" dirty="0">
-                <a:solidFill>
-                  <a:srgbClr val="1B1C1E"/>
-                </a:solidFill>
-                <a:latin typeface="IBM Plex Sans" pitchFamily="34" charset="0"/>
-                <a:ea typeface="IBM Plex Sans" pitchFamily="34" charset="-122"/>
-                <a:cs typeface="IBM Plex Sans" pitchFamily="34" charset="-120"/>
-              </a:rPr>
-              <a:t>Does passenger count raise the fare?</a:t>
-            </a:r>
-            <a:endParaRPr lang="en-US" sz="1400" dirty="0"/>
-          </a:p>
-        </p:txBody>
-      </p:sp>
-      <p:sp>
-        <p:nvSpPr>
-          <p:cNvPr id="6" name="Text 4"/>
-          <p:cNvSpPr/>
-          <p:nvPr/>
-        </p:nvSpPr>
-        <p:spPr>
-          <a:xfrm>
-            <a:off x="1021080" y="2618741"/>
-            <a:ext cx="2174062" cy="452120"/>
-          </a:xfrm>
-          <a:prstGeom prst="rect">
-            <a:avLst/>
-          </a:prstGeom>
-          <a:noFill/>
-          <a:ln/>
-        </p:spPr>
-        <p:txBody>
-          <a:bodyPr wrap="square" lIns="0" tIns="0" rIns="0" bIns="0" rtlCol="0" anchor="t">
-            <a:normAutofit/>
-          </a:bodyPr>
-          <a:lstStyle/>
-          <a:p>
-            <a:pPr algn="l" indent="0" marL="0">
-              <a:lnSpc>
-                <a:spcPts val="3360"/>
-              </a:lnSpc>
-              <a:buNone/>
-            </a:pPr>
-            <a:r>
-              <a:rPr lang="en-US" sz="2400" b="1" dirty="0">
-                <a:solidFill>
-                  <a:srgbClr val="1B1C1E"/>
-                </a:solidFill>
-                <a:latin typeface="Space Grotesk" pitchFamily="34" charset="0"/>
-                <a:ea typeface="Space Grotesk" pitchFamily="34" charset="-122"/>
-                <a:cs typeface="Space Grotesk" pitchFamily="34" charset="-120"/>
-              </a:rPr>
-              <a:t>No</a:t>
-            </a:r>
-            <a:endParaRPr lang="en-US" sz="2400" dirty="0"/>
-          </a:p>
-        </p:txBody>
-      </p:sp>
-      <p:sp>
-        <p:nvSpPr>
-          <p:cNvPr id="7" name="Shape 5"/>
-          <p:cNvSpPr/>
-          <p:nvPr/>
-        </p:nvSpPr>
-        <p:spPr>
-          <a:xfrm>
-            <a:off x="3495675" y="1567816"/>
-            <a:ext cx="2520950" cy="1682750"/>
-          </a:xfrm>
-          <a:prstGeom prst="roundRect">
-            <a:avLst>
-              <a:gd name="adj" fmla="val 5849"/>
-            </a:avLst>
-          </a:prstGeom>
-          <a:solidFill>
-            <a:srgbClr val="FFFFFF"/>
-          </a:solidFill>
-          <a:ln w="6350">
-            <a:solidFill>
-              <a:srgbClr val="E2DED2"/>
-            </a:solidFill>
-            <a:prstDash val="solid"/>
-          </a:ln>
-        </p:spPr>
-      </p:sp>
-      <p:sp>
-        <p:nvSpPr>
-          <p:cNvPr id="8" name="Text 6"/>
-          <p:cNvSpPr/>
-          <p:nvPr/>
-        </p:nvSpPr>
-        <p:spPr>
-          <a:xfrm>
-            <a:off x="3700780" y="1772920"/>
-            <a:ext cx="2174062" cy="256540"/>
-          </a:xfrm>
-          <a:prstGeom prst="rect">
-            <a:avLst/>
-          </a:prstGeom>
-          <a:noFill/>
-          <a:ln/>
-        </p:spPr>
-        <p:txBody>
-          <a:bodyPr wrap="square" lIns="0" tIns="0" rIns="0" bIns="0" rtlCol="0" anchor="t">
-            <a:normAutofit/>
-          </a:bodyPr>
-          <a:lstStyle/>
-          <a:p>
-            <a:pPr algn="l" indent="0" marL="0">
-              <a:lnSpc>
-                <a:spcPts val="1820"/>
-              </a:lnSpc>
-              <a:buNone/>
-            </a:pPr>
-            <a:r>
-              <a:rPr lang="en-US" sz="1300" b="1" dirty="0">
-                <a:solidFill>
-                  <a:srgbClr val="8A5A00"/>
-                </a:solidFill>
-                <a:latin typeface="IBM Plex Sans" pitchFamily="34" charset="0"/>
-                <a:ea typeface="IBM Plex Sans" pitchFamily="34" charset="-122"/>
-                <a:cs typeface="IBM Plex Sans" pitchFamily="34" charset="-120"/>
-              </a:rPr>
-              <a:t>Q2</a:t>
-            </a:r>
-            <a:endParaRPr lang="en-US" sz="1300" dirty="0"/>
-          </a:p>
-        </p:txBody>
-      </p:sp>
-      <p:sp>
-        <p:nvSpPr>
-          <p:cNvPr id="9" name="Text 7"/>
-          <p:cNvSpPr/>
-          <p:nvPr/>
-        </p:nvSpPr>
-        <p:spPr>
-          <a:xfrm>
-            <a:off x="3700780" y="2080261"/>
-            <a:ext cx="2174062" cy="487680"/>
-          </a:xfrm>
-          <a:prstGeom prst="rect">
-            <a:avLst/>
-          </a:prstGeom>
-          <a:noFill/>
-          <a:ln/>
-        </p:spPr>
-        <p:txBody>
-          <a:bodyPr wrap="square" lIns="0" tIns="0" rIns="0" bIns="0" rtlCol="0" anchor="t">
-            <a:normAutofit/>
-          </a:bodyPr>
-          <a:lstStyle/>
-          <a:p>
-            <a:pPr algn="l" indent="0" marL="0">
-              <a:lnSpc>
-                <a:spcPts val="1820"/>
-              </a:lnSpc>
-              <a:buNone/>
-            </a:pPr>
-            <a:r>
-              <a:rPr lang="en-US" sz="1400" dirty="0">
-                <a:solidFill>
-                  <a:srgbClr val="1B1C1E"/>
-                </a:solidFill>
-                <a:latin typeface="IBM Plex Sans" pitchFamily="34" charset="0"/>
-                <a:ea typeface="IBM Plex Sans" pitchFamily="34" charset="-122"/>
-                <a:cs typeface="IBM Plex Sans" pitchFamily="34" charset="-120"/>
-              </a:rPr>
-              <a:t>Does car condition affect the fare?</a:t>
-            </a:r>
-            <a:endParaRPr lang="en-US" sz="1400" dirty="0"/>
-          </a:p>
-        </p:txBody>
-      </p:sp>
-      <p:sp>
-        <p:nvSpPr>
-          <p:cNvPr id="10" name="Text 8"/>
-          <p:cNvSpPr/>
-          <p:nvPr/>
-        </p:nvSpPr>
-        <p:spPr>
-          <a:xfrm>
-            <a:off x="3700780" y="2618741"/>
-            <a:ext cx="2174062" cy="452120"/>
-          </a:xfrm>
-          <a:prstGeom prst="rect">
-            <a:avLst/>
-          </a:prstGeom>
-          <a:noFill/>
-          <a:ln/>
-        </p:spPr>
-        <p:txBody>
-          <a:bodyPr wrap="square" lIns="0" tIns="0" rIns="0" bIns="0" rtlCol="0" anchor="t">
-            <a:normAutofit/>
-          </a:bodyPr>
-          <a:lstStyle/>
-          <a:p>
-            <a:pPr algn="l" indent="0" marL="0">
-              <a:lnSpc>
-                <a:spcPts val="3360"/>
-              </a:lnSpc>
-              <a:buNone/>
-            </a:pPr>
-            <a:r>
-              <a:rPr lang="en-US" sz="2400" b="1" dirty="0">
-                <a:solidFill>
-                  <a:srgbClr val="1B1C1E"/>
-                </a:solidFill>
-                <a:latin typeface="Space Grotesk" pitchFamily="34" charset="0"/>
-                <a:ea typeface="Space Grotesk" pitchFamily="34" charset="-122"/>
-                <a:cs typeface="Space Grotesk" pitchFamily="34" charset="-120"/>
-              </a:rPr>
-              <a:t>No</a:t>
-            </a:r>
-            <a:endParaRPr lang="en-US" sz="2400" dirty="0"/>
-          </a:p>
-        </p:txBody>
-      </p:sp>
-      <p:sp>
-        <p:nvSpPr>
-          <p:cNvPr id="11" name="Shape 9"/>
-          <p:cNvSpPr/>
-          <p:nvPr/>
-        </p:nvSpPr>
-        <p:spPr>
-          <a:xfrm>
-            <a:off x="6175375" y="1567816"/>
-            <a:ext cx="2520950" cy="1682750"/>
-          </a:xfrm>
-          <a:prstGeom prst="roundRect">
-            <a:avLst>
-              <a:gd name="adj" fmla="val 5849"/>
-            </a:avLst>
-          </a:prstGeom>
-          <a:solidFill>
-            <a:srgbClr val="FFFFFF"/>
-          </a:solidFill>
-          <a:ln w="6350">
-            <a:solidFill>
-              <a:srgbClr val="E2DED2"/>
-            </a:solidFill>
-            <a:prstDash val="solid"/>
-          </a:ln>
-        </p:spPr>
-      </p:sp>
-      <p:sp>
-        <p:nvSpPr>
-          <p:cNvPr id="12" name="Text 10"/>
-          <p:cNvSpPr/>
-          <p:nvPr/>
-        </p:nvSpPr>
-        <p:spPr>
-          <a:xfrm>
-            <a:off x="6380480" y="1772920"/>
-            <a:ext cx="2174062" cy="256540"/>
-          </a:xfrm>
-          <a:prstGeom prst="rect">
-            <a:avLst/>
-          </a:prstGeom>
-          <a:noFill/>
-          <a:ln/>
-        </p:spPr>
-        <p:txBody>
-          <a:bodyPr wrap="square" lIns="0" tIns="0" rIns="0" bIns="0" rtlCol="0" anchor="t">
-            <a:normAutofit/>
-          </a:bodyPr>
-          <a:lstStyle/>
-          <a:p>
-            <a:pPr algn="l" indent="0" marL="0">
-              <a:lnSpc>
-                <a:spcPts val="1820"/>
-              </a:lnSpc>
-              <a:buNone/>
-            </a:pPr>
-            <a:r>
-              <a:rPr lang="en-US" sz="1300" b="1" dirty="0">
-                <a:solidFill>
-                  <a:srgbClr val="8A5A00"/>
-                </a:solidFill>
-                <a:latin typeface="IBM Plex Sans" pitchFamily="34" charset="0"/>
-                <a:ea typeface="IBM Plex Sans" pitchFamily="34" charset="-122"/>
-                <a:cs typeface="IBM Plex Sans" pitchFamily="34" charset="-120"/>
-              </a:rPr>
-              <a:t>Q3</a:t>
-            </a:r>
-            <a:endParaRPr lang="en-US" sz="1300" dirty="0"/>
-          </a:p>
-        </p:txBody>
-      </p:sp>
-      <p:sp>
-        <p:nvSpPr>
-          <p:cNvPr id="13" name="Text 11"/>
-          <p:cNvSpPr/>
-          <p:nvPr/>
-        </p:nvSpPr>
-        <p:spPr>
-          <a:xfrm>
-            <a:off x="6380480" y="2080261"/>
-            <a:ext cx="2174062" cy="256540"/>
-          </a:xfrm>
-          <a:prstGeom prst="rect">
-            <a:avLst/>
-          </a:prstGeom>
-          <a:noFill/>
-          <a:ln/>
-        </p:spPr>
-        <p:txBody>
-          <a:bodyPr wrap="square" lIns="0" tIns="0" rIns="0" bIns="0" rtlCol="0" anchor="t">
-            <a:normAutofit/>
-          </a:bodyPr>
-          <a:lstStyle/>
-          <a:p>
-            <a:pPr algn="l" indent="0" marL="0">
-              <a:lnSpc>
-                <a:spcPts val="1820"/>
-              </a:lnSpc>
-              <a:buNone/>
-            </a:pPr>
-            <a:r>
-              <a:rPr lang="en-US" sz="1400" dirty="0">
-                <a:solidFill>
-                  <a:srgbClr val="1B1C1E"/>
-                </a:solidFill>
-                <a:latin typeface="IBM Plex Sans" pitchFamily="34" charset="0"/>
-                <a:ea typeface="IBM Plex Sans" pitchFamily="34" charset="-122"/>
-                <a:cs typeface="IBM Plex Sans" pitchFamily="34" charset="-120"/>
-              </a:rPr>
-              <a:t>When are fares highest?</a:t>
-            </a:r>
-            <a:endParaRPr lang="en-US" sz="1400" dirty="0"/>
-          </a:p>
-        </p:txBody>
-      </p:sp>
-      <p:sp>
-        <p:nvSpPr>
-          <p:cNvPr id="14" name="Text 12"/>
-          <p:cNvSpPr/>
-          <p:nvPr/>
-        </p:nvSpPr>
-        <p:spPr>
-          <a:xfrm>
-            <a:off x="6380480" y="2387600"/>
-            <a:ext cx="2174062" cy="452120"/>
-          </a:xfrm>
-          <a:prstGeom prst="rect">
-            <a:avLst/>
-          </a:prstGeom>
-          <a:noFill/>
-          <a:ln/>
-        </p:spPr>
-        <p:txBody>
-          <a:bodyPr wrap="square" lIns="0" tIns="0" rIns="0" bIns="0" rtlCol="0" anchor="t">
-            <a:normAutofit/>
-          </a:bodyPr>
-          <a:lstStyle/>
-          <a:p>
-            <a:pPr algn="l" indent="0" marL="0">
-              <a:lnSpc>
-                <a:spcPts val="3360"/>
-              </a:lnSpc>
-              <a:buNone/>
-            </a:pPr>
-            <a:r>
-              <a:rPr lang="en-US" sz="2400" b="1" dirty="0">
-                <a:solidFill>
-                  <a:srgbClr val="1B1C1E"/>
-                </a:solidFill>
-                <a:latin typeface="Space Grotesk" pitchFamily="34" charset="0"/>
-                <a:ea typeface="Space Grotesk" pitchFamily="34" charset="-122"/>
-                <a:cs typeface="Space Grotesk" pitchFamily="34" charset="-120"/>
-              </a:rPr>
-              <a:t>5 AM</a:t>
-            </a:r>
-            <a:endParaRPr lang="en-US" sz="2400" dirty="0"/>
-          </a:p>
-        </p:txBody>
-      </p:sp>
-      <p:sp>
-        <p:nvSpPr>
-          <p:cNvPr id="15" name="Shape 13"/>
-          <p:cNvSpPr/>
-          <p:nvPr/>
-        </p:nvSpPr>
-        <p:spPr>
-          <a:xfrm>
-            <a:off x="8855075" y="1567816"/>
-            <a:ext cx="2520950" cy="1682750"/>
-          </a:xfrm>
-          <a:prstGeom prst="roundRect">
-            <a:avLst>
-              <a:gd name="adj" fmla="val 5849"/>
-            </a:avLst>
-          </a:prstGeom>
-          <a:solidFill>
-            <a:srgbClr val="FFFFFF"/>
-          </a:solidFill>
-          <a:ln w="6350">
-            <a:solidFill>
-              <a:srgbClr val="E2DED2"/>
-            </a:solidFill>
-            <a:prstDash val="solid"/>
-          </a:ln>
-        </p:spPr>
-      </p:sp>
-      <p:sp>
-        <p:nvSpPr>
-          <p:cNvPr id="16" name="Text 14"/>
-          <p:cNvSpPr/>
-          <p:nvPr/>
-        </p:nvSpPr>
-        <p:spPr>
-          <a:xfrm>
-            <a:off x="9060180" y="1772920"/>
-            <a:ext cx="2174062" cy="256540"/>
-          </a:xfrm>
-          <a:prstGeom prst="rect">
-            <a:avLst/>
-          </a:prstGeom>
-          <a:noFill/>
-          <a:ln/>
-        </p:spPr>
-        <p:txBody>
-          <a:bodyPr wrap="square" lIns="0" tIns="0" rIns="0" bIns="0" rtlCol="0" anchor="t">
-            <a:normAutofit/>
-          </a:bodyPr>
-          <a:lstStyle/>
-          <a:p>
-            <a:pPr algn="l" indent="0" marL="0">
-              <a:lnSpc>
-                <a:spcPts val="1820"/>
-              </a:lnSpc>
-              <a:buNone/>
-            </a:pPr>
-            <a:r>
-              <a:rPr lang="en-US" sz="1300" b="1" dirty="0">
-                <a:solidFill>
-                  <a:srgbClr val="8A5A00"/>
-                </a:solidFill>
-                <a:latin typeface="IBM Plex Sans" pitchFamily="34" charset="0"/>
-                <a:ea typeface="IBM Plex Sans" pitchFamily="34" charset="-122"/>
-                <a:cs typeface="IBM Plex Sans" pitchFamily="34" charset="-120"/>
-              </a:rPr>
-              <a:t>Q4</a:t>
-            </a:r>
-            <a:endParaRPr lang="en-US" sz="1300" dirty="0"/>
-          </a:p>
-        </p:txBody>
-      </p:sp>
-      <p:sp>
-        <p:nvSpPr>
-          <p:cNvPr id="17" name="Text 15"/>
-          <p:cNvSpPr/>
-          <p:nvPr/>
-        </p:nvSpPr>
-        <p:spPr>
-          <a:xfrm>
-            <a:off x="9060180" y="2080261"/>
-            <a:ext cx="2174062" cy="487680"/>
-          </a:xfrm>
-          <a:prstGeom prst="rect">
-            <a:avLst/>
-          </a:prstGeom>
-          <a:noFill/>
-          <a:ln/>
-        </p:spPr>
-        <p:txBody>
-          <a:bodyPr wrap="square" lIns="0" tIns="0" rIns="0" bIns="0" rtlCol="0" anchor="t">
-            <a:normAutofit/>
-          </a:bodyPr>
-          <a:lstStyle/>
-          <a:p>
-            <a:pPr algn="l" indent="0" marL="0">
-              <a:lnSpc>
-                <a:spcPts val="1820"/>
-              </a:lnSpc>
-              <a:buNone/>
-            </a:pPr>
-            <a:r>
-              <a:rPr lang="en-US" sz="1400" dirty="0">
-                <a:solidFill>
-                  <a:srgbClr val="1B1C1E"/>
-                </a:solidFill>
-                <a:latin typeface="IBM Plex Sans" pitchFamily="34" charset="0"/>
-                <a:ea typeface="IBM Plex Sans" pitchFamily="34" charset="-122"/>
-                <a:cs typeface="IBM Plex Sans" pitchFamily="34" charset="-120"/>
-              </a:rPr>
-              <a:t>Does traffic affect the fare?</a:t>
-            </a:r>
-            <a:endParaRPr lang="en-US" sz="1400" dirty="0"/>
-          </a:p>
-        </p:txBody>
-      </p:sp>
-      <p:sp>
-        <p:nvSpPr>
-          <p:cNvPr id="18" name="Text 16"/>
-          <p:cNvSpPr/>
-          <p:nvPr/>
-        </p:nvSpPr>
-        <p:spPr>
-          <a:xfrm>
-            <a:off x="9060180" y="2618741"/>
-            <a:ext cx="2174062" cy="452120"/>
-          </a:xfrm>
-          <a:prstGeom prst="rect">
-            <a:avLst/>
-          </a:prstGeom>
-          <a:noFill/>
-          <a:ln/>
-        </p:spPr>
-        <p:txBody>
-          <a:bodyPr wrap="square" lIns="0" tIns="0" rIns="0" bIns="0" rtlCol="0" anchor="t">
-            <a:normAutofit/>
-          </a:bodyPr>
-          <a:lstStyle/>
-          <a:p>
-            <a:pPr algn="l" indent="0" marL="0">
-              <a:lnSpc>
-                <a:spcPts val="3360"/>
-              </a:lnSpc>
-              <a:buNone/>
-            </a:pPr>
-            <a:r>
-              <a:rPr lang="en-US" sz="2400" b="1" dirty="0">
-                <a:solidFill>
-                  <a:srgbClr val="1B1C1E"/>
-                </a:solidFill>
-                <a:latin typeface="Space Grotesk" pitchFamily="34" charset="0"/>
-                <a:ea typeface="Space Grotesk" pitchFamily="34" charset="-122"/>
-                <a:cs typeface="Space Grotesk" pitchFamily="34" charset="-120"/>
-              </a:rPr>
-              <a:t>No</a:t>
-            </a:r>
-            <a:endParaRPr lang="en-US" sz="2400" dirty="0"/>
-          </a:p>
-        </p:txBody>
-      </p:sp>
-      <p:sp>
-        <p:nvSpPr>
-          <p:cNvPr id="19" name="Shape 17"/>
-          <p:cNvSpPr/>
-          <p:nvPr/>
-        </p:nvSpPr>
-        <p:spPr>
-          <a:xfrm>
-            <a:off x="815975" y="3409316"/>
-            <a:ext cx="2520950" cy="1682750"/>
-          </a:xfrm>
-          <a:prstGeom prst="roundRect">
-            <a:avLst>
-              <a:gd name="adj" fmla="val 5849"/>
-            </a:avLst>
-          </a:prstGeom>
-          <a:solidFill>
-            <a:srgbClr val="FFFFFF"/>
-          </a:solidFill>
-          <a:ln w="6350">
-            <a:solidFill>
-              <a:srgbClr val="E2DED2"/>
-            </a:solidFill>
-            <a:prstDash val="solid"/>
-          </a:ln>
-        </p:spPr>
-      </p:sp>
-      <p:sp>
-        <p:nvSpPr>
-          <p:cNvPr id="20" name="Text 18"/>
-          <p:cNvSpPr/>
-          <p:nvPr/>
-        </p:nvSpPr>
-        <p:spPr>
-          <a:xfrm>
-            <a:off x="1021080" y="3614420"/>
-            <a:ext cx="2174062" cy="256540"/>
-          </a:xfrm>
-          <a:prstGeom prst="rect">
-            <a:avLst/>
-          </a:prstGeom>
-          <a:noFill/>
-          <a:ln/>
-        </p:spPr>
-        <p:txBody>
-          <a:bodyPr wrap="square" lIns="0" tIns="0" rIns="0" bIns="0" rtlCol="0" anchor="t">
-            <a:normAutofit/>
-          </a:bodyPr>
-          <a:lstStyle/>
-          <a:p>
-            <a:pPr algn="l" indent="0" marL="0">
-              <a:lnSpc>
-                <a:spcPts val="1820"/>
-              </a:lnSpc>
-              <a:buNone/>
-            </a:pPr>
-            <a:r>
-              <a:rPr lang="en-US" sz="1300" b="1" dirty="0">
-                <a:solidFill>
-                  <a:srgbClr val="8A5A00"/>
-                </a:solidFill>
-                <a:latin typeface="IBM Plex Sans" pitchFamily="34" charset="0"/>
-                <a:ea typeface="IBM Plex Sans" pitchFamily="34" charset="-122"/>
-                <a:cs typeface="IBM Plex Sans" pitchFamily="34" charset="-120"/>
-              </a:rPr>
-              <a:t>Q5</a:t>
-            </a:r>
-            <a:endParaRPr lang="en-US" sz="1300" dirty="0"/>
-          </a:p>
-        </p:txBody>
-      </p:sp>
-      <p:sp>
-        <p:nvSpPr>
-          <p:cNvPr id="21" name="Text 19"/>
-          <p:cNvSpPr/>
-          <p:nvPr/>
-        </p:nvSpPr>
-        <p:spPr>
-          <a:xfrm>
-            <a:off x="1021080" y="3921761"/>
-            <a:ext cx="2174062" cy="487680"/>
-          </a:xfrm>
-          <a:prstGeom prst="rect">
-            <a:avLst/>
-          </a:prstGeom>
-          <a:noFill/>
-          <a:ln/>
-        </p:spPr>
-        <p:txBody>
-          <a:bodyPr wrap="square" lIns="0" tIns="0" rIns="0" bIns="0" rtlCol="0" anchor="t">
-            <a:normAutofit/>
-          </a:bodyPr>
-          <a:lstStyle/>
-          <a:p>
-            <a:pPr algn="l" indent="0" marL="0">
-              <a:lnSpc>
-                <a:spcPts val="1820"/>
-              </a:lnSpc>
-              <a:buNone/>
-            </a:pPr>
-            <a:r>
-              <a:rPr lang="en-US" sz="1400" dirty="0">
-                <a:solidFill>
-                  <a:srgbClr val="1B1C1E"/>
-                </a:solidFill>
-                <a:latin typeface="IBM Plex Sans" pitchFamily="34" charset="0"/>
-                <a:ea typeface="IBM Plex Sans" pitchFamily="34" charset="-122"/>
-                <a:cs typeface="IBM Plex Sans" pitchFamily="34" charset="-120"/>
-              </a:rPr>
-              <a:t>Is distance the strongest predictor?</a:t>
-            </a:r>
-            <a:endParaRPr lang="en-US" sz="1400" dirty="0"/>
-          </a:p>
-        </p:txBody>
-      </p:sp>
-      <p:sp>
-        <p:nvSpPr>
-          <p:cNvPr id="22" name="Text 20"/>
-          <p:cNvSpPr/>
-          <p:nvPr/>
-        </p:nvSpPr>
-        <p:spPr>
-          <a:xfrm>
-            <a:off x="1021080" y="4460241"/>
-            <a:ext cx="2174062" cy="452120"/>
-          </a:xfrm>
-          <a:prstGeom prst="rect">
-            <a:avLst/>
-          </a:prstGeom>
-          <a:noFill/>
-          <a:ln/>
-        </p:spPr>
-        <p:txBody>
-          <a:bodyPr wrap="square" lIns="0" tIns="0" rIns="0" bIns="0" rtlCol="0" anchor="t">
-            <a:normAutofit/>
-          </a:bodyPr>
-          <a:lstStyle/>
-          <a:p>
-            <a:pPr algn="l" indent="0" marL="0">
-              <a:lnSpc>
-                <a:spcPts val="3360"/>
-              </a:lnSpc>
-              <a:buNone/>
-            </a:pPr>
-            <a:r>
-              <a:rPr lang="en-US" sz="2400" b="1" dirty="0">
-                <a:solidFill>
-                  <a:srgbClr val="1B1C1E"/>
-                </a:solidFill>
-                <a:latin typeface="Space Grotesk" pitchFamily="34" charset="0"/>
-                <a:ea typeface="Space Grotesk" pitchFamily="34" charset="-122"/>
-                <a:cs typeface="Space Grotesk" pitchFamily="34" charset="-120"/>
-              </a:rPr>
-              <a:t>Yes</a:t>
-            </a:r>
-            <a:endParaRPr lang="en-US" sz="2400" dirty="0"/>
-          </a:p>
-        </p:txBody>
-      </p:sp>
-      <p:sp>
-        <p:nvSpPr>
-          <p:cNvPr id="23" name="Shape 21"/>
-          <p:cNvSpPr/>
-          <p:nvPr/>
-        </p:nvSpPr>
-        <p:spPr>
-          <a:xfrm>
-            <a:off x="3495675" y="3409316"/>
-            <a:ext cx="2520950" cy="1682750"/>
-          </a:xfrm>
-          <a:prstGeom prst="roundRect">
-            <a:avLst>
-              <a:gd name="adj" fmla="val 5849"/>
-            </a:avLst>
-          </a:prstGeom>
-          <a:solidFill>
-            <a:srgbClr val="FFFFFF"/>
-          </a:solidFill>
-          <a:ln w="6350">
-            <a:solidFill>
-              <a:srgbClr val="E2DED2"/>
-            </a:solidFill>
-            <a:prstDash val="solid"/>
-          </a:ln>
-        </p:spPr>
-      </p:sp>
-      <p:sp>
-        <p:nvSpPr>
-          <p:cNvPr id="24" name="Text 22"/>
-          <p:cNvSpPr/>
-          <p:nvPr/>
-        </p:nvSpPr>
-        <p:spPr>
-          <a:xfrm>
-            <a:off x="3700780" y="3614420"/>
-            <a:ext cx="2174062" cy="256540"/>
-          </a:xfrm>
-          <a:prstGeom prst="rect">
-            <a:avLst/>
-          </a:prstGeom>
-          <a:noFill/>
-          <a:ln/>
-        </p:spPr>
-        <p:txBody>
-          <a:bodyPr wrap="square" lIns="0" tIns="0" rIns="0" bIns="0" rtlCol="0" anchor="t">
-            <a:normAutofit/>
-          </a:bodyPr>
-          <a:lstStyle/>
-          <a:p>
-            <a:pPr algn="l" indent="0" marL="0">
-              <a:lnSpc>
-                <a:spcPts val="1820"/>
-              </a:lnSpc>
-              <a:buNone/>
-            </a:pPr>
-            <a:r>
-              <a:rPr lang="en-US" sz="1300" b="1" dirty="0">
-                <a:solidFill>
-                  <a:srgbClr val="8A5A00"/>
-                </a:solidFill>
-                <a:latin typeface="IBM Plex Sans" pitchFamily="34" charset="0"/>
-                <a:ea typeface="IBM Plex Sans" pitchFamily="34" charset="-122"/>
-                <a:cs typeface="IBM Plex Sans" pitchFamily="34" charset="-120"/>
-              </a:rPr>
-              <a:t>Q6</a:t>
-            </a:r>
-            <a:endParaRPr lang="en-US" sz="1300" dirty="0"/>
-          </a:p>
-        </p:txBody>
-      </p:sp>
-      <p:sp>
-        <p:nvSpPr>
-          <p:cNvPr id="25" name="Text 23"/>
-          <p:cNvSpPr/>
-          <p:nvPr/>
-        </p:nvSpPr>
-        <p:spPr>
-          <a:xfrm>
-            <a:off x="3700780" y="3921761"/>
-            <a:ext cx="2174062" cy="487680"/>
-          </a:xfrm>
-          <a:prstGeom prst="rect">
-            <a:avLst/>
-          </a:prstGeom>
-          <a:noFill/>
-          <a:ln/>
-        </p:spPr>
-        <p:txBody>
-          <a:bodyPr wrap="square" lIns="0" tIns="0" rIns="0" bIns="0" rtlCol="0" anchor="t">
-            <a:normAutofit/>
-          </a:bodyPr>
-          <a:lstStyle/>
-          <a:p>
-            <a:pPr algn="l" indent="0" marL="0">
-              <a:lnSpc>
-                <a:spcPts val="1820"/>
-              </a:lnSpc>
-              <a:buNone/>
-            </a:pPr>
-            <a:r>
-              <a:rPr lang="en-US" sz="1400" dirty="0">
-                <a:solidFill>
-                  <a:srgbClr val="1B1C1E"/>
-                </a:solidFill>
-                <a:latin typeface="IBM Plex Sans" pitchFamily="34" charset="0"/>
-                <a:ea typeface="IBM Plex Sans" pitchFamily="34" charset="-122"/>
-                <a:cs typeface="IBM Plex Sans" pitchFamily="34" charset="-120"/>
-              </a:rPr>
-              <a:t>When are rides most requested?</a:t>
-            </a:r>
-            <a:endParaRPr lang="en-US" sz="1400" dirty="0"/>
-          </a:p>
-        </p:txBody>
-      </p:sp>
-      <p:sp>
-        <p:nvSpPr>
-          <p:cNvPr id="26" name="Text 24"/>
-          <p:cNvSpPr/>
-          <p:nvPr/>
-        </p:nvSpPr>
-        <p:spPr>
-          <a:xfrm>
-            <a:off x="3700780" y="4460241"/>
-            <a:ext cx="2174062" cy="452120"/>
-          </a:xfrm>
-          <a:prstGeom prst="rect">
-            <a:avLst/>
-          </a:prstGeom>
-          <a:noFill/>
-          <a:ln/>
-        </p:spPr>
-        <p:txBody>
-          <a:bodyPr wrap="square" lIns="0" tIns="0" rIns="0" bIns="0" rtlCol="0" anchor="t">
-            <a:normAutofit/>
-          </a:bodyPr>
-          <a:lstStyle/>
-          <a:p>
-            <a:pPr algn="l" indent="0" marL="0">
-              <a:lnSpc>
-                <a:spcPts val="3360"/>
-              </a:lnSpc>
-              <a:buNone/>
-            </a:pPr>
-            <a:r>
-              <a:rPr lang="en-US" sz="2400" b="1" dirty="0">
-                <a:solidFill>
-                  <a:srgbClr val="1B1C1E"/>
-                </a:solidFill>
-                <a:latin typeface="Space Grotesk" pitchFamily="34" charset="0"/>
-                <a:ea typeface="Space Grotesk" pitchFamily="34" charset="-122"/>
-                <a:cs typeface="Space Grotesk" pitchFamily="34" charset="-120"/>
-              </a:rPr>
-              <a:t>7 PM</a:t>
-            </a:r>
-            <a:endParaRPr lang="en-US" sz="2400" dirty="0"/>
-          </a:p>
-        </p:txBody>
-      </p:sp>
-      <p:sp>
-        <p:nvSpPr>
-          <p:cNvPr id="27" name="Shape 25"/>
-          <p:cNvSpPr/>
-          <p:nvPr/>
-        </p:nvSpPr>
-        <p:spPr>
-          <a:xfrm>
-            <a:off x="6175375" y="3409316"/>
-            <a:ext cx="2520950" cy="1682750"/>
-          </a:xfrm>
-          <a:prstGeom prst="roundRect">
-            <a:avLst>
-              <a:gd name="adj" fmla="val 5849"/>
-            </a:avLst>
-          </a:prstGeom>
-          <a:solidFill>
-            <a:srgbClr val="FFFFFF"/>
-          </a:solidFill>
-          <a:ln w="6350">
-            <a:solidFill>
-              <a:srgbClr val="E2DED2"/>
-            </a:solidFill>
-            <a:prstDash val="solid"/>
-          </a:ln>
-        </p:spPr>
-      </p:sp>
-      <p:sp>
-        <p:nvSpPr>
-          <p:cNvPr id="28" name="Text 26"/>
-          <p:cNvSpPr/>
-          <p:nvPr/>
-        </p:nvSpPr>
-        <p:spPr>
-          <a:xfrm>
-            <a:off x="6380480" y="3614420"/>
-            <a:ext cx="2174062" cy="256540"/>
-          </a:xfrm>
-          <a:prstGeom prst="rect">
-            <a:avLst/>
-          </a:prstGeom>
-          <a:noFill/>
-          <a:ln/>
-        </p:spPr>
-        <p:txBody>
-          <a:bodyPr wrap="square" lIns="0" tIns="0" rIns="0" bIns="0" rtlCol="0" anchor="t">
-            <a:normAutofit/>
-          </a:bodyPr>
-          <a:lstStyle/>
-          <a:p>
-            <a:pPr algn="l" indent="0" marL="0">
-              <a:lnSpc>
-                <a:spcPts val="1820"/>
-              </a:lnSpc>
-              <a:buNone/>
-            </a:pPr>
-            <a:r>
-              <a:rPr lang="en-US" sz="1300" b="1" dirty="0">
-                <a:solidFill>
-                  <a:srgbClr val="8A5A00"/>
-                </a:solidFill>
-                <a:latin typeface="IBM Plex Sans" pitchFamily="34" charset="0"/>
-                <a:ea typeface="IBM Plex Sans" pitchFamily="34" charset="-122"/>
-                <a:cs typeface="IBM Plex Sans" pitchFamily="34" charset="-120"/>
-              </a:rPr>
-              <a:t>Q7</a:t>
-            </a:r>
-            <a:endParaRPr lang="en-US" sz="1300" dirty="0"/>
-          </a:p>
-        </p:txBody>
-      </p:sp>
-      <p:sp>
-        <p:nvSpPr>
-          <p:cNvPr id="29" name="Text 27"/>
-          <p:cNvSpPr/>
-          <p:nvPr/>
-        </p:nvSpPr>
-        <p:spPr>
-          <a:xfrm>
-            <a:off x="6380480" y="3921761"/>
-            <a:ext cx="2174062" cy="487680"/>
-          </a:xfrm>
-          <a:prstGeom prst="rect">
-            <a:avLst/>
-          </a:prstGeom>
-          <a:noFill/>
-          <a:ln/>
-        </p:spPr>
-        <p:txBody>
-          <a:bodyPr wrap="square" lIns="0" tIns="0" rIns="0" bIns="0" rtlCol="0" anchor="t">
-            <a:normAutofit/>
-          </a:bodyPr>
-          <a:lstStyle/>
-          <a:p>
-            <a:pPr algn="l" indent="0" marL="0">
-              <a:lnSpc>
-                <a:spcPts val="1820"/>
-              </a:lnSpc>
-              <a:buNone/>
-            </a:pPr>
-            <a:r>
-              <a:rPr lang="en-US" sz="1400" dirty="0">
-                <a:solidFill>
-                  <a:srgbClr val="1B1C1E"/>
-                </a:solidFill>
-                <a:latin typeface="IBM Plex Sans" pitchFamily="34" charset="0"/>
-                <a:ea typeface="IBM Plex Sans" pitchFamily="34" charset="-122"/>
-                <a:cs typeface="IBM Plex Sans" pitchFamily="34" charset="-120"/>
-              </a:rPr>
-              <a:t>Does weather change trip distance?</a:t>
-            </a:r>
-            <a:endParaRPr lang="en-US" sz="1400" dirty="0"/>
-          </a:p>
-        </p:txBody>
-      </p:sp>
-      <p:sp>
-        <p:nvSpPr>
-          <p:cNvPr id="30" name="Text 28"/>
-          <p:cNvSpPr/>
-          <p:nvPr/>
-        </p:nvSpPr>
-        <p:spPr>
-          <a:xfrm>
-            <a:off x="6380480" y="4460241"/>
-            <a:ext cx="2174062" cy="452120"/>
-          </a:xfrm>
-          <a:prstGeom prst="rect">
-            <a:avLst/>
-          </a:prstGeom>
-          <a:noFill/>
-          <a:ln/>
-        </p:spPr>
-        <p:txBody>
-          <a:bodyPr wrap="square" lIns="0" tIns="0" rIns="0" bIns="0" rtlCol="0" anchor="t">
-            <a:normAutofit/>
-          </a:bodyPr>
-          <a:lstStyle/>
-          <a:p>
-            <a:pPr algn="l" indent="0" marL="0">
-              <a:lnSpc>
-                <a:spcPts val="3360"/>
-              </a:lnSpc>
-              <a:buNone/>
-            </a:pPr>
-            <a:r>
-              <a:rPr lang="en-US" sz="2400" b="1" dirty="0">
-                <a:solidFill>
-                  <a:srgbClr val="1B1C1E"/>
-                </a:solidFill>
-                <a:latin typeface="Space Grotesk" pitchFamily="34" charset="0"/>
-                <a:ea typeface="Space Grotesk" pitchFamily="34" charset="-122"/>
-                <a:cs typeface="Space Grotesk" pitchFamily="34" charset="-120"/>
-              </a:rPr>
-              <a:t>No</a:t>
-            </a:r>
-            <a:endParaRPr lang="en-US" sz="2400" dirty="0"/>
-          </a:p>
-        </p:txBody>
-      </p:sp>
-      <p:sp>
-        <p:nvSpPr>
-          <p:cNvPr id="31" name="Shape 29"/>
-          <p:cNvSpPr/>
-          <p:nvPr/>
-        </p:nvSpPr>
-        <p:spPr>
-          <a:xfrm>
-            <a:off x="8855075" y="3409316"/>
-            <a:ext cx="2520950" cy="1682750"/>
-          </a:xfrm>
-          <a:prstGeom prst="roundRect">
-            <a:avLst>
-              <a:gd name="adj" fmla="val 5849"/>
-            </a:avLst>
-          </a:prstGeom>
-          <a:solidFill>
-            <a:srgbClr val="FFFFFF"/>
-          </a:solidFill>
-          <a:ln w="6350">
-            <a:solidFill>
-              <a:srgbClr val="E2DED2"/>
-            </a:solidFill>
-            <a:prstDash val="solid"/>
-          </a:ln>
-        </p:spPr>
-      </p:sp>
-      <p:sp>
-        <p:nvSpPr>
-          <p:cNvPr id="32" name="Text 30"/>
-          <p:cNvSpPr/>
-          <p:nvPr/>
-        </p:nvSpPr>
-        <p:spPr>
-          <a:xfrm>
-            <a:off x="9060180" y="3614420"/>
-            <a:ext cx="2174062" cy="256540"/>
-          </a:xfrm>
-          <a:prstGeom prst="rect">
-            <a:avLst/>
-          </a:prstGeom>
-          <a:noFill/>
-          <a:ln/>
-        </p:spPr>
-        <p:txBody>
-          <a:bodyPr wrap="square" lIns="0" tIns="0" rIns="0" bIns="0" rtlCol="0" anchor="t">
-            <a:normAutofit/>
-          </a:bodyPr>
-          <a:lstStyle/>
-          <a:p>
-            <a:pPr algn="l" indent="0" marL="0">
-              <a:lnSpc>
-                <a:spcPts val="1820"/>
-              </a:lnSpc>
-              <a:buNone/>
-            </a:pPr>
-            <a:r>
-              <a:rPr lang="en-US" sz="1300" b="1" dirty="0">
-                <a:solidFill>
-                  <a:srgbClr val="8A5A00"/>
-                </a:solidFill>
-                <a:latin typeface="IBM Plex Sans" pitchFamily="34" charset="0"/>
-                <a:ea typeface="IBM Plex Sans" pitchFamily="34" charset="-122"/>
-                <a:cs typeface="IBM Plex Sans" pitchFamily="34" charset="-120"/>
-              </a:rPr>
-              <a:t>Q8</a:t>
-            </a:r>
-            <a:endParaRPr lang="en-US" sz="1300" dirty="0"/>
-          </a:p>
-        </p:txBody>
-      </p:sp>
-      <p:sp>
-        <p:nvSpPr>
-          <p:cNvPr id="33" name="Text 31"/>
-          <p:cNvSpPr/>
-          <p:nvPr/>
-        </p:nvSpPr>
-        <p:spPr>
-          <a:xfrm>
-            <a:off x="9060180" y="3921761"/>
-            <a:ext cx="2174062" cy="487680"/>
-          </a:xfrm>
-          <a:prstGeom prst="rect">
-            <a:avLst/>
-          </a:prstGeom>
-          <a:noFill/>
-          <a:ln/>
-        </p:spPr>
-        <p:txBody>
-          <a:bodyPr wrap="square" lIns="0" tIns="0" rIns="0" bIns="0" rtlCol="0" anchor="t">
-            <a:normAutofit/>
-          </a:bodyPr>
-          <a:lstStyle/>
-          <a:p>
-            <a:pPr algn="l" indent="0" marL="0">
-              <a:lnSpc>
-                <a:spcPts val="1820"/>
-              </a:lnSpc>
-              <a:buNone/>
-            </a:pPr>
-            <a:r>
-              <a:rPr lang="en-US" sz="1400" dirty="0">
-                <a:solidFill>
-                  <a:srgbClr val="1B1C1E"/>
-                </a:solidFill>
-                <a:latin typeface="IBM Plex Sans" pitchFamily="34" charset="0"/>
-                <a:ea typeface="IBM Plex Sans" pitchFamily="34" charset="-122"/>
-                <a:cs typeface="IBM Plex Sans" pitchFamily="34" charset="-120"/>
-              </a:rPr>
-              <a:t>Are airport pickups pricier?</a:t>
-            </a:r>
-            <a:endParaRPr lang="en-US" sz="1400" dirty="0"/>
-          </a:p>
-        </p:txBody>
-      </p:sp>
-      <p:sp>
-        <p:nvSpPr>
-          <p:cNvPr id="34" name="Text 32"/>
-          <p:cNvSpPr/>
-          <p:nvPr/>
-        </p:nvSpPr>
-        <p:spPr>
-          <a:xfrm>
-            <a:off x="9060180" y="4460241"/>
-            <a:ext cx="2174062" cy="452120"/>
-          </a:xfrm>
-          <a:prstGeom prst="rect">
-            <a:avLst/>
-          </a:prstGeom>
-          <a:noFill/>
-          <a:ln/>
-        </p:spPr>
-        <p:txBody>
-          <a:bodyPr wrap="square" lIns="0" tIns="0" rIns="0" bIns="0" rtlCol="0" anchor="t">
-            <a:normAutofit/>
-          </a:bodyPr>
-          <a:lstStyle/>
-          <a:p>
-            <a:pPr algn="l" indent="0" marL="0">
-              <a:lnSpc>
-                <a:spcPts val="3360"/>
-              </a:lnSpc>
-              <a:buNone/>
-            </a:pPr>
-            <a:r>
-              <a:rPr lang="en-US" sz="2400" b="1" dirty="0">
-                <a:solidFill>
-                  <a:srgbClr val="1B1C1E"/>
-                </a:solidFill>
-                <a:latin typeface="Space Grotesk" pitchFamily="34" charset="0"/>
-                <a:ea typeface="Space Grotesk" pitchFamily="34" charset="-122"/>
-                <a:cs typeface="Space Grotesk" pitchFamily="34" charset="-120"/>
-              </a:rPr>
-              <a:t>Unclear</a:t>
-            </a:r>
-            <a:endParaRPr lang="en-US" sz="2400" dirty="0"/>
+              <a:t>17,095 invalid rows removed. Every answer that follows uses the cleaned data, so data errors no longer distort the results.</a:t>
+            </a:r>
+            <a:endParaRPr lang="en-US" sz="1700" dirty="0"/>
           </a:p>
         </p:txBody>
       </p:sp>
@@ -7826,72 +7640,28 @@
         <p:spPr>
           <a:xfrm>
             <a:off x="812800" y="812800"/>
-            <a:ext cx="10883392" cy="274320"/>
-          </a:xfrm>
-          <a:prstGeom prst="rect">
-            <a:avLst/>
-          </a:prstGeom>
-          <a:noFill/>
-          <a:ln/>
-        </p:spPr>
-        <p:txBody>
-          <a:bodyPr wrap="square" lIns="0" tIns="0" rIns="0" bIns="0" rtlCol="0" anchor="t">
-            <a:normAutofit/>
-          </a:bodyPr>
-          <a:lstStyle/>
-          <a:p>
-            <a:pPr algn="l" indent="0" marL="0">
-              <a:lnSpc>
-                <a:spcPts val="1960"/>
-              </a:lnSpc>
-              <a:buNone/>
-            </a:pPr>
-            <a:r>
-              <a:rPr lang="en-US" sz="1400" b="1" spc="100" kern="0" dirty="0">
-                <a:solidFill>
-                  <a:srgbClr val="8A5A00"/>
-                </a:solidFill>
-                <a:latin typeface="IBM Plex Sans" pitchFamily="34" charset="0"/>
-                <a:ea typeface="IBM Plex Sans" pitchFamily="34" charset="-122"/>
-                <a:cs typeface="IBM Plex Sans" pitchFamily="34" charset="-120"/>
-              </a:rPr>
-              <a:t>QUESTION 1</a:t>
-            </a:r>
-            <a:endParaRPr lang="en-US" sz="1400" dirty="0"/>
-          </a:p>
-        </p:txBody>
-      </p:sp>
-      <p:sp>
-        <p:nvSpPr>
-          <p:cNvPr id="3" name="Text 1"/>
-          <p:cNvSpPr/>
-          <p:nvPr/>
-        </p:nvSpPr>
-        <p:spPr>
-          <a:xfrm>
-            <a:off x="812800" y="1112521"/>
-            <a:ext cx="10883392" cy="416560"/>
-          </a:xfrm>
-          <a:prstGeom prst="rect">
-            <a:avLst/>
-          </a:prstGeom>
-          <a:noFill/>
-          <a:ln/>
-        </p:spPr>
-        <p:txBody>
-          <a:bodyPr wrap="square" lIns="0" tIns="0" rIns="0" bIns="0" rtlCol="0" anchor="t">
-            <a:normAutofit/>
-          </a:bodyPr>
-          <a:lstStyle/>
-          <a:p>
-            <a:pPr algn="l" indent="0" marL="0">
-              <a:lnSpc>
-                <a:spcPts val="3080"/>
-              </a:lnSpc>
-              <a:buNone/>
-            </a:pPr>
-            <a:r>
-              <a:rPr lang="en-US" sz="2800" b="1" dirty="0">
+            <a:ext cx="10883392" cy="472440"/>
+          </a:xfrm>
+          <a:prstGeom prst="rect">
+            <a:avLst/>
+          </a:prstGeom>
+          <a:noFill/>
+          <a:ln/>
+        </p:spPr>
+        <p:txBody>
+          <a:bodyPr wrap="square" lIns="0" tIns="0" rIns="0" bIns="0" rtlCol="0" anchor="t">
+            <a:normAutofit/>
+          </a:bodyPr>
+          <a:lstStyle/>
+          <a:p>
+            <a:pPr algn="l" indent="0" marL="0">
+              <a:lnSpc>
+                <a:spcPts val="3520"/>
+              </a:lnSpc>
+              <a:buNone/>
+            </a:pPr>
+            <a:r>
+              <a:rPr lang="en-US" sz="3200" b="1" dirty="0">
                 <a:solidFill>
                   <a:srgbClr val="1B1C1E"/>
                 </a:solidFill>
@@ -7899,274 +7669,31 @@
                 <a:ea typeface="Space Grotesk" pitchFamily="34" charset="-122"/>
                 <a:cs typeface="Space Grotesk" pitchFamily="34" charset="-120"/>
               </a:rPr>
-              <a:t>Is higher passenger count associated with a higher fare?</a:t>
-            </a:r>
-            <a:endParaRPr lang="en-US" sz="2800" dirty="0"/>
-          </a:p>
-        </p:txBody>
-      </p:sp>
-      <p:sp>
-        <p:nvSpPr>
-          <p:cNvPr id="4" name="Shape 2"/>
-          <p:cNvSpPr/>
-          <p:nvPr/>
-        </p:nvSpPr>
-        <p:spPr>
-          <a:xfrm>
-            <a:off x="844550" y="1757682"/>
-            <a:ext cx="0" cy="815340"/>
-          </a:xfrm>
-          <a:prstGeom prst="line">
-            <a:avLst/>
-          </a:prstGeom>
-          <a:noFill/>
-          <a:ln w="63500">
-            <a:solidFill>
-              <a:srgbClr val="F5B700"/>
-            </a:solidFill>
-            <a:prstDash val="solid"/>
-          </a:ln>
-        </p:spPr>
-      </p:sp>
-      <p:sp>
-        <p:nvSpPr>
-          <p:cNvPr id="5" name="Text 3"/>
-          <p:cNvSpPr/>
-          <p:nvPr/>
-        </p:nvSpPr>
-        <p:spPr>
-          <a:xfrm>
-            <a:off x="1051560" y="1757682"/>
-            <a:ext cx="3730701" cy="256540"/>
-          </a:xfrm>
-          <a:prstGeom prst="rect">
-            <a:avLst/>
-          </a:prstGeom>
-          <a:noFill/>
-          <a:ln/>
-        </p:spPr>
-        <p:txBody>
-          <a:bodyPr wrap="square" lIns="0" tIns="0" rIns="0" bIns="0" rtlCol="0" anchor="t">
-            <a:normAutofit/>
-          </a:bodyPr>
-          <a:lstStyle/>
-          <a:p>
-            <a:pPr algn="l" indent="0" marL="0">
-              <a:lnSpc>
-                <a:spcPts val="1820"/>
-              </a:lnSpc>
-              <a:buNone/>
-            </a:pPr>
-            <a:r>
-              <a:rPr lang="en-US" sz="1300" dirty="0">
-                <a:solidFill>
-                  <a:srgbClr val="5D5F63"/>
-                </a:solidFill>
-                <a:latin typeface="IBM Plex Sans" pitchFamily="34" charset="0"/>
-                <a:ea typeface="IBM Plex Sans" pitchFamily="34" charset="-122"/>
-                <a:cs typeface="IBM Plex Sans" pitchFamily="34" charset="-120"/>
-              </a:rPr>
-              <a:t>Answer</a:t>
-            </a:r>
-            <a:endParaRPr lang="en-US" sz="1300" dirty="0"/>
-          </a:p>
-        </p:txBody>
-      </p:sp>
-      <p:sp>
-        <p:nvSpPr>
-          <p:cNvPr id="6" name="Text 4"/>
-          <p:cNvSpPr/>
-          <p:nvPr/>
-        </p:nvSpPr>
-        <p:spPr>
-          <a:xfrm>
-            <a:off x="1051560" y="2014221"/>
-            <a:ext cx="3730701" cy="584200"/>
-          </a:xfrm>
-          <a:prstGeom prst="rect">
-            <a:avLst/>
-          </a:prstGeom>
-          <a:noFill/>
-          <a:ln/>
-        </p:spPr>
-        <p:txBody>
-          <a:bodyPr wrap="square" lIns="0" tIns="0" rIns="0" bIns="0" rtlCol="0" anchor="t">
-            <a:normAutofit/>
-          </a:bodyPr>
-          <a:lstStyle/>
-          <a:p>
-            <a:pPr algn="l" indent="0" marL="0">
-              <a:lnSpc>
-                <a:spcPts val="4400"/>
-              </a:lnSpc>
-              <a:buNone/>
-            </a:pPr>
-            <a:r>
-              <a:rPr lang="en-US" sz="4000" b="1" dirty="0">
-                <a:solidFill>
-                  <a:srgbClr val="1B1C1E"/>
-                </a:solidFill>
-                <a:latin typeface="Space Grotesk" pitchFamily="34" charset="0"/>
-                <a:ea typeface="Space Grotesk" pitchFamily="34" charset="-122"/>
-                <a:cs typeface="Space Grotesk" pitchFamily="34" charset="-120"/>
-              </a:rPr>
-              <a:t>No</a:t>
-            </a:r>
-            <a:endParaRPr lang="en-US" sz="4000" dirty="0"/>
-          </a:p>
-        </p:txBody>
-      </p:sp>
-      <p:sp>
-        <p:nvSpPr>
-          <p:cNvPr id="7" name="Text 5"/>
-          <p:cNvSpPr/>
-          <p:nvPr/>
-        </p:nvSpPr>
-        <p:spPr>
-          <a:xfrm>
-            <a:off x="812800" y="2750821"/>
-            <a:ext cx="3976624" cy="1130300"/>
-          </a:xfrm>
-          <a:prstGeom prst="rect">
-            <a:avLst/>
-          </a:prstGeom>
-          <a:noFill/>
-          <a:ln/>
-        </p:spPr>
-        <p:txBody>
-          <a:bodyPr wrap="square" lIns="0" tIns="0" rIns="0" bIns="0" rtlCol="0" anchor="t">
-            <a:normAutofit/>
-          </a:bodyPr>
-          <a:lstStyle/>
-          <a:p>
-            <a:pPr algn="l" indent="0" marL="0">
-              <a:lnSpc>
-                <a:spcPts val="2175"/>
-              </a:lnSpc>
-              <a:buNone/>
-            </a:pPr>
-            <a:r>
-              <a:rPr lang="en-US" sz="1500" dirty="0">
-                <a:solidFill>
-                  <a:srgbClr val="1B1C1E"/>
-                </a:solidFill>
-                <a:latin typeface="IBM Plex Sans" pitchFamily="34" charset="0"/>
-                <a:ea typeface="IBM Plex Sans" pitchFamily="34" charset="-122"/>
-                <a:cs typeface="IBM Plex Sans" pitchFamily="34" charset="-120"/>
-              </a:rPr>
-              <a:t>Fares spread similarly whether 1 or 6 people ride. The correlation between passenger_count and fare_amount is just 0.01.</a:t>
-            </a:r>
-            <a:endParaRPr lang="en-US" sz="1500" dirty="0"/>
-          </a:p>
-        </p:txBody>
-      </p:sp>
-      <p:sp>
-        <p:nvSpPr>
-          <p:cNvPr id="8" name="Text 6"/>
-          <p:cNvSpPr/>
-          <p:nvPr/>
-        </p:nvSpPr>
-        <p:spPr>
-          <a:xfrm>
-            <a:off x="812800" y="4033521"/>
-            <a:ext cx="3976624" cy="504190"/>
-          </a:xfrm>
-          <a:prstGeom prst="rect">
-            <a:avLst/>
-          </a:prstGeom>
-          <a:noFill/>
-          <a:ln/>
-        </p:spPr>
-        <p:txBody>
-          <a:bodyPr wrap="square" lIns="0" tIns="0" rIns="0" bIns="0" rtlCol="0" anchor="t">
-            <a:normAutofit/>
-          </a:bodyPr>
-          <a:lstStyle/>
-          <a:p>
-            <a:pPr algn="l" indent="0" marL="0">
-              <a:lnSpc>
-                <a:spcPts val="1885"/>
-              </a:lnSpc>
-              <a:buNone/>
-            </a:pPr>
-            <a:r>
-              <a:rPr lang="en-US" sz="1300" dirty="0">
-                <a:solidFill>
-                  <a:srgbClr val="5D5F63"/>
-                </a:solidFill>
-                <a:latin typeface="IBM Plex Sans" pitchFamily="34" charset="0"/>
-                <a:ea typeface="IBM Plex Sans" pitchFamily="34" charset="-122"/>
-                <a:cs typeface="IBM Plex Sans" pitchFamily="34" charset="-120"/>
-              </a:rPr>
-              <a:t>Fare is priced per trip, not per person — passenger count adds almost no information.</a:t>
-            </a:r>
-            <a:endParaRPr lang="en-US" sz="1300" dirty="0"/>
-          </a:p>
-        </p:txBody>
-      </p:sp>
-      <p:sp>
-        <p:nvSpPr>
-          <p:cNvPr id="9" name="Shape 7"/>
-          <p:cNvSpPr/>
-          <p:nvPr/>
-        </p:nvSpPr>
-        <p:spPr>
-          <a:xfrm>
-            <a:off x="5029200" y="1757682"/>
-            <a:ext cx="6350000" cy="3556000"/>
+              <a:t>Eight questions at a glance</a:t>
+            </a:r>
+            <a:endParaRPr lang="en-US" sz="3200" dirty="0"/>
+          </a:p>
+        </p:txBody>
+      </p:sp>
+      <p:sp>
+        <p:nvSpPr>
+          <p:cNvPr id="3" name="Shape 1"/>
+          <p:cNvSpPr/>
+          <p:nvPr/>
+        </p:nvSpPr>
+        <p:spPr>
+          <a:xfrm>
+            <a:off x="815975" y="1567814"/>
+            <a:ext cx="2520950" cy="1682750"/>
           </a:xfrm>
           <a:prstGeom prst="roundRect">
             <a:avLst>
-              <a:gd name="adj" fmla="val 2857"/>
+              <a:gd name="adj" fmla="val 5849"/>
             </a:avLst>
           </a:prstGeom>
           <a:solidFill>
             <a:srgbClr val="FFFFFF"/>
           </a:solidFill>
-          <a:ln/>
-        </p:spPr>
-      </p:sp>
-      <p:pic>
-        <p:nvPicPr>
-          <p:cNvPr id="10" name="Image 0" descr="Scatter plot · fare vs. passenger count">    </p:cNvPr>
-          <p:cNvPicPr>
-            <a:picLocks noChangeAspect="1"/>
-          </p:cNvPicPr>
-          <p:nvPr/>
-        </p:nvPicPr>
-        <p:blipFill>
-          <a:blip r:embed="rId1"/>
-          <a:stretch>
-            <a:fillRect/>
-          </a:stretch>
-        </p:blipFill>
-        <p:spPr>
-          <a:xfrm>
-            <a:off x="5451179" y="1764032"/>
-            <a:ext cx="5506042" cy="3543300"/>
-          </a:xfrm>
-          <a:prstGeom prst="rect">
-            <a:avLst/>
-          </a:prstGeom>
-        </p:spPr>
-      </p:pic>
-      <p:sp>
-        <p:nvSpPr>
-          <p:cNvPr id="11" name="Shape 8"/>
-          <p:cNvSpPr/>
-          <p:nvPr/>
-        </p:nvSpPr>
-        <p:spPr>
-          <a:xfrm>
-            <a:off x="5032375" y="1760857"/>
-            <a:ext cx="6343650" cy="3549650"/>
-          </a:xfrm>
-          <a:prstGeom prst="roundRect">
-            <a:avLst>
-              <a:gd name="adj" fmla="val 2773"/>
-            </a:avLst>
-          </a:prstGeom>
-          <a:noFill/>
           <a:ln w="6350">
             <a:solidFill>
               <a:srgbClr val="E2DED2"/>
@@ -8177,89 +7704,1246 @@
       </p:sp>
       <p:sp>
         <p:nvSpPr>
-          <p:cNvPr id="12" name="Text 9"/>
-          <p:cNvSpPr/>
-          <p:nvPr/>
-        </p:nvSpPr>
-        <p:spPr>
-          <a:xfrm>
-            <a:off x="5029200" y="5389882"/>
-            <a:ext cx="6540500" cy="238760"/>
-          </a:xfrm>
-          <a:prstGeom prst="rect">
-            <a:avLst/>
-          </a:prstGeom>
-          <a:noFill/>
-          <a:ln/>
-        </p:spPr>
-        <p:txBody>
-          <a:bodyPr wrap="square" lIns="0" tIns="0" rIns="0" bIns="0" rtlCol="0" anchor="t">
-            <a:normAutofit/>
-          </a:bodyPr>
-          <a:lstStyle/>
-          <a:p>
-            <a:pPr algn="l" indent="0" marL="0">
-              <a:lnSpc>
-                <a:spcPts val="1680"/>
-              </a:lnSpc>
-              <a:buNone/>
-            </a:pPr>
-            <a:r>
-              <a:rPr lang="en-US" sz="1200" dirty="0">
-                <a:solidFill>
-                  <a:srgbClr val="5D5F63"/>
+          <p:cNvPr id="4" name="Text 2"/>
+          <p:cNvSpPr/>
+          <p:nvPr/>
+        </p:nvSpPr>
+        <p:spPr>
+          <a:xfrm>
+            <a:off x="1021080" y="1772921"/>
+            <a:ext cx="2174062" cy="256540"/>
+          </a:xfrm>
+          <a:prstGeom prst="rect">
+            <a:avLst/>
+          </a:prstGeom>
+          <a:noFill/>
+          <a:ln/>
+        </p:spPr>
+        <p:txBody>
+          <a:bodyPr wrap="square" lIns="0" tIns="0" rIns="0" bIns="0" rtlCol="0" anchor="t">
+            <a:normAutofit/>
+          </a:bodyPr>
+          <a:lstStyle/>
+          <a:p>
+            <a:pPr algn="l" indent="0" marL="0">
+              <a:lnSpc>
+                <a:spcPts val="1820"/>
+              </a:lnSpc>
+              <a:buNone/>
+            </a:pPr>
+            <a:r>
+              <a:rPr lang="en-US" sz="1300" b="1" dirty="0">
+                <a:solidFill>
+                  <a:srgbClr val="8A5A00"/>
                 </a:solidFill>
                 <a:latin typeface="IBM Plex Sans" pitchFamily="34" charset="0"/>
                 <a:ea typeface="IBM Plex Sans" pitchFamily="34" charset="-122"/>
                 <a:cs typeface="IBM Plex Sans" pitchFamily="34" charset="-120"/>
               </a:rPr>
-              <a:t>Scatter plot · fare vs. passenger count</a:t>
-            </a:r>
-            <a:endParaRPr lang="en-US" sz="1200" dirty="0"/>
-          </a:p>
-        </p:txBody>
-      </p:sp>
-      <p:sp>
-        <p:nvSpPr>
-          <p:cNvPr id="13" name="Text 10"/>
-          <p:cNvSpPr/>
-          <p:nvPr/>
-        </p:nvSpPr>
-        <p:spPr>
-          <a:xfrm>
-            <a:off x="812800" y="6238239"/>
-            <a:ext cx="10883392" cy="238760"/>
-          </a:xfrm>
-          <a:prstGeom prst="rect">
-            <a:avLst/>
-          </a:prstGeom>
-          <a:noFill/>
-          <a:ln/>
-        </p:spPr>
-        <p:txBody>
-          <a:bodyPr wrap="square" lIns="0" tIns="0" rIns="0" bIns="0" rtlCol="0" anchor="t">
-            <a:normAutofit/>
-          </a:bodyPr>
-          <a:lstStyle/>
-          <a:p>
-            <a:pPr algn="l" indent="0" marL="0">
-              <a:lnSpc>
-                <a:spcPts val="1680"/>
-              </a:lnSpc>
-              <a:buNone/>
-            </a:pPr>
-            <a:r>
-              <a:rPr lang="en-US" sz="1200" dirty="0">
-                <a:solidFill>
-                  <a:srgbClr val="5D5F63"/>
+              <a:t>Q1</a:t>
+            </a:r>
+            <a:endParaRPr lang="en-US" sz="1300" dirty="0"/>
+          </a:p>
+        </p:txBody>
+      </p:sp>
+      <p:sp>
+        <p:nvSpPr>
+          <p:cNvPr id="5" name="Text 3"/>
+          <p:cNvSpPr/>
+          <p:nvPr/>
+        </p:nvSpPr>
+        <p:spPr>
+          <a:xfrm>
+            <a:off x="1021080" y="2080261"/>
+            <a:ext cx="2174062" cy="487680"/>
+          </a:xfrm>
+          <a:prstGeom prst="rect">
+            <a:avLst/>
+          </a:prstGeom>
+          <a:noFill/>
+          <a:ln/>
+        </p:spPr>
+        <p:txBody>
+          <a:bodyPr wrap="square" lIns="0" tIns="0" rIns="0" bIns="0" rtlCol="0" anchor="t">
+            <a:normAutofit/>
+          </a:bodyPr>
+          <a:lstStyle/>
+          <a:p>
+            <a:pPr algn="l" indent="0" marL="0">
+              <a:lnSpc>
+                <a:spcPts val="1820"/>
+              </a:lnSpc>
+              <a:buNone/>
+            </a:pPr>
+            <a:r>
+              <a:rPr lang="en-US" sz="1400" dirty="0">
+                <a:solidFill>
+                  <a:srgbClr val="1B1C1E"/>
                 </a:solidFill>
                 <a:latin typeface="IBM Plex Sans" pitchFamily="34" charset="0"/>
                 <a:ea typeface="IBM Plex Sans" pitchFamily="34" charset="-122"/>
                 <a:cs typeface="IBM Plex Sans" pitchFamily="34" charset="-120"/>
               </a:rPr>
-              <a:t>Q1 of 8 · NYC taxi fares EDA</a:t>
-            </a:r>
-            <a:endParaRPr lang="en-US" sz="1200" dirty="0"/>
+              <a:t>Does passenger count raise the fare?</a:t>
+            </a:r>
+            <a:endParaRPr lang="en-US" sz="1400" dirty="0"/>
+          </a:p>
+        </p:txBody>
+      </p:sp>
+      <p:sp>
+        <p:nvSpPr>
+          <p:cNvPr id="6" name="Text 4"/>
+          <p:cNvSpPr/>
+          <p:nvPr/>
+        </p:nvSpPr>
+        <p:spPr>
+          <a:xfrm>
+            <a:off x="1021080" y="2618739"/>
+            <a:ext cx="2174062" cy="452120"/>
+          </a:xfrm>
+          <a:prstGeom prst="rect">
+            <a:avLst/>
+          </a:prstGeom>
+          <a:noFill/>
+          <a:ln/>
+        </p:spPr>
+        <p:txBody>
+          <a:bodyPr wrap="square" lIns="0" tIns="0" rIns="0" bIns="0" rtlCol="0" anchor="t">
+            <a:normAutofit/>
+          </a:bodyPr>
+          <a:lstStyle/>
+          <a:p>
+            <a:pPr algn="l" indent="0" marL="0">
+              <a:lnSpc>
+                <a:spcPts val="3360"/>
+              </a:lnSpc>
+              <a:buNone/>
+            </a:pPr>
+            <a:r>
+              <a:rPr lang="en-US" sz="2400" b="1" dirty="0">
+                <a:solidFill>
+                  <a:srgbClr val="1B1C1E"/>
+                </a:solidFill>
+                <a:latin typeface="Space Grotesk" pitchFamily="34" charset="0"/>
+                <a:ea typeface="Space Grotesk" pitchFamily="34" charset="-122"/>
+                <a:cs typeface="Space Grotesk" pitchFamily="34" charset="-120"/>
+              </a:rPr>
+              <a:t>No</a:t>
+            </a:r>
+            <a:endParaRPr lang="en-US" sz="2400" dirty="0"/>
+          </a:p>
+        </p:txBody>
+      </p:sp>
+      <p:sp>
+        <p:nvSpPr>
+          <p:cNvPr id="7" name="Shape 5"/>
+          <p:cNvSpPr/>
+          <p:nvPr/>
+        </p:nvSpPr>
+        <p:spPr>
+          <a:xfrm>
+            <a:off x="3495675" y="1567814"/>
+            <a:ext cx="2520950" cy="1682750"/>
+          </a:xfrm>
+          <a:prstGeom prst="roundRect">
+            <a:avLst>
+              <a:gd name="adj" fmla="val 5849"/>
+            </a:avLst>
+          </a:prstGeom>
+          <a:solidFill>
+            <a:srgbClr val="FFFFFF"/>
+          </a:solidFill>
+          <a:ln w="6350">
+            <a:solidFill>
+              <a:srgbClr val="E2DED2"/>
+            </a:solidFill>
+            <a:prstDash val="solid"/>
+          </a:ln>
+        </p:spPr>
+      </p:sp>
+      <p:sp>
+        <p:nvSpPr>
+          <p:cNvPr id="8" name="Text 6"/>
+          <p:cNvSpPr/>
+          <p:nvPr/>
+        </p:nvSpPr>
+        <p:spPr>
+          <a:xfrm>
+            <a:off x="3700780" y="1772921"/>
+            <a:ext cx="2174062" cy="256540"/>
+          </a:xfrm>
+          <a:prstGeom prst="rect">
+            <a:avLst/>
+          </a:prstGeom>
+          <a:noFill/>
+          <a:ln/>
+        </p:spPr>
+        <p:txBody>
+          <a:bodyPr wrap="square" lIns="0" tIns="0" rIns="0" bIns="0" rtlCol="0" anchor="t">
+            <a:normAutofit/>
+          </a:bodyPr>
+          <a:lstStyle/>
+          <a:p>
+            <a:pPr algn="l" indent="0" marL="0">
+              <a:lnSpc>
+                <a:spcPts val="1820"/>
+              </a:lnSpc>
+              <a:buNone/>
+            </a:pPr>
+            <a:r>
+              <a:rPr lang="en-US" sz="1300" b="1" dirty="0">
+                <a:solidFill>
+                  <a:srgbClr val="8A5A00"/>
+                </a:solidFill>
+                <a:latin typeface="IBM Plex Sans" pitchFamily="34" charset="0"/>
+                <a:ea typeface="IBM Plex Sans" pitchFamily="34" charset="-122"/>
+                <a:cs typeface="IBM Plex Sans" pitchFamily="34" charset="-120"/>
+              </a:rPr>
+              <a:t>Q2</a:t>
+            </a:r>
+            <a:endParaRPr lang="en-US" sz="1300" dirty="0"/>
+          </a:p>
+        </p:txBody>
+      </p:sp>
+      <p:sp>
+        <p:nvSpPr>
+          <p:cNvPr id="9" name="Text 7"/>
+          <p:cNvSpPr/>
+          <p:nvPr/>
+        </p:nvSpPr>
+        <p:spPr>
+          <a:xfrm>
+            <a:off x="3700780" y="2080261"/>
+            <a:ext cx="2174062" cy="487680"/>
+          </a:xfrm>
+          <a:prstGeom prst="rect">
+            <a:avLst/>
+          </a:prstGeom>
+          <a:noFill/>
+          <a:ln/>
+        </p:spPr>
+        <p:txBody>
+          <a:bodyPr wrap="square" lIns="0" tIns="0" rIns="0" bIns="0" rtlCol="0" anchor="t">
+            <a:normAutofit/>
+          </a:bodyPr>
+          <a:lstStyle/>
+          <a:p>
+            <a:pPr algn="l" indent="0" marL="0">
+              <a:lnSpc>
+                <a:spcPts val="1820"/>
+              </a:lnSpc>
+              <a:buNone/>
+            </a:pPr>
+            <a:r>
+              <a:rPr lang="en-US" sz="1400" dirty="0">
+                <a:solidFill>
+                  <a:srgbClr val="1B1C1E"/>
+                </a:solidFill>
+                <a:latin typeface="IBM Plex Sans" pitchFamily="34" charset="0"/>
+                <a:ea typeface="IBM Plex Sans" pitchFamily="34" charset="-122"/>
+                <a:cs typeface="IBM Plex Sans" pitchFamily="34" charset="-120"/>
+              </a:rPr>
+              <a:t>Does car condition affect the fare?</a:t>
+            </a:r>
+            <a:endParaRPr lang="en-US" sz="1400" dirty="0"/>
+          </a:p>
+        </p:txBody>
+      </p:sp>
+      <p:sp>
+        <p:nvSpPr>
+          <p:cNvPr id="10" name="Text 8"/>
+          <p:cNvSpPr/>
+          <p:nvPr/>
+        </p:nvSpPr>
+        <p:spPr>
+          <a:xfrm>
+            <a:off x="3700780" y="2618739"/>
+            <a:ext cx="2174062" cy="452120"/>
+          </a:xfrm>
+          <a:prstGeom prst="rect">
+            <a:avLst/>
+          </a:prstGeom>
+          <a:noFill/>
+          <a:ln/>
+        </p:spPr>
+        <p:txBody>
+          <a:bodyPr wrap="square" lIns="0" tIns="0" rIns="0" bIns="0" rtlCol="0" anchor="t">
+            <a:normAutofit/>
+          </a:bodyPr>
+          <a:lstStyle/>
+          <a:p>
+            <a:pPr algn="l" indent="0" marL="0">
+              <a:lnSpc>
+                <a:spcPts val="3360"/>
+              </a:lnSpc>
+              <a:buNone/>
+            </a:pPr>
+            <a:r>
+              <a:rPr lang="en-US" sz="2400" b="1" dirty="0">
+                <a:solidFill>
+                  <a:srgbClr val="1B1C1E"/>
+                </a:solidFill>
+                <a:latin typeface="Space Grotesk" pitchFamily="34" charset="0"/>
+                <a:ea typeface="Space Grotesk" pitchFamily="34" charset="-122"/>
+                <a:cs typeface="Space Grotesk" pitchFamily="34" charset="-120"/>
+              </a:rPr>
+              <a:t>No</a:t>
+            </a:r>
+            <a:endParaRPr lang="en-US" sz="2400" dirty="0"/>
+          </a:p>
+        </p:txBody>
+      </p:sp>
+      <p:sp>
+        <p:nvSpPr>
+          <p:cNvPr id="11" name="Shape 9"/>
+          <p:cNvSpPr/>
+          <p:nvPr/>
+        </p:nvSpPr>
+        <p:spPr>
+          <a:xfrm>
+            <a:off x="6175375" y="1567814"/>
+            <a:ext cx="2520950" cy="1682750"/>
+          </a:xfrm>
+          <a:prstGeom prst="roundRect">
+            <a:avLst>
+              <a:gd name="adj" fmla="val 5849"/>
+            </a:avLst>
+          </a:prstGeom>
+          <a:solidFill>
+            <a:srgbClr val="FFFFFF"/>
+          </a:solidFill>
+          <a:ln w="6350">
+            <a:solidFill>
+              <a:srgbClr val="E2DED2"/>
+            </a:solidFill>
+            <a:prstDash val="solid"/>
+          </a:ln>
+        </p:spPr>
+      </p:sp>
+      <p:sp>
+        <p:nvSpPr>
+          <p:cNvPr id="12" name="Text 10"/>
+          <p:cNvSpPr/>
+          <p:nvPr/>
+        </p:nvSpPr>
+        <p:spPr>
+          <a:xfrm>
+            <a:off x="6380480" y="1772921"/>
+            <a:ext cx="2174062" cy="256540"/>
+          </a:xfrm>
+          <a:prstGeom prst="rect">
+            <a:avLst/>
+          </a:prstGeom>
+          <a:noFill/>
+          <a:ln/>
+        </p:spPr>
+        <p:txBody>
+          <a:bodyPr wrap="square" lIns="0" tIns="0" rIns="0" bIns="0" rtlCol="0" anchor="t">
+            <a:normAutofit/>
+          </a:bodyPr>
+          <a:lstStyle/>
+          <a:p>
+            <a:pPr algn="l" indent="0" marL="0">
+              <a:lnSpc>
+                <a:spcPts val="1820"/>
+              </a:lnSpc>
+              <a:buNone/>
+            </a:pPr>
+            <a:r>
+              <a:rPr lang="en-US" sz="1300" b="1" dirty="0">
+                <a:solidFill>
+                  <a:srgbClr val="8A5A00"/>
+                </a:solidFill>
+                <a:latin typeface="IBM Plex Sans" pitchFamily="34" charset="0"/>
+                <a:ea typeface="IBM Plex Sans" pitchFamily="34" charset="-122"/>
+                <a:cs typeface="IBM Plex Sans" pitchFamily="34" charset="-120"/>
+              </a:rPr>
+              <a:t>Q3</a:t>
+            </a:r>
+            <a:endParaRPr lang="en-US" sz="1300" dirty="0"/>
+          </a:p>
+        </p:txBody>
+      </p:sp>
+      <p:sp>
+        <p:nvSpPr>
+          <p:cNvPr id="13" name="Text 11"/>
+          <p:cNvSpPr/>
+          <p:nvPr/>
+        </p:nvSpPr>
+        <p:spPr>
+          <a:xfrm>
+            <a:off x="6380480" y="2080261"/>
+            <a:ext cx="2174062" cy="256540"/>
+          </a:xfrm>
+          <a:prstGeom prst="rect">
+            <a:avLst/>
+          </a:prstGeom>
+          <a:noFill/>
+          <a:ln/>
+        </p:spPr>
+        <p:txBody>
+          <a:bodyPr wrap="square" lIns="0" tIns="0" rIns="0" bIns="0" rtlCol="0" anchor="t">
+            <a:normAutofit/>
+          </a:bodyPr>
+          <a:lstStyle/>
+          <a:p>
+            <a:pPr algn="l" indent="0" marL="0">
+              <a:lnSpc>
+                <a:spcPts val="1820"/>
+              </a:lnSpc>
+              <a:buNone/>
+            </a:pPr>
+            <a:r>
+              <a:rPr lang="en-US" sz="1400" dirty="0">
+                <a:solidFill>
+                  <a:srgbClr val="1B1C1E"/>
+                </a:solidFill>
+                <a:latin typeface="IBM Plex Sans" pitchFamily="34" charset="0"/>
+                <a:ea typeface="IBM Plex Sans" pitchFamily="34" charset="-122"/>
+                <a:cs typeface="IBM Plex Sans" pitchFamily="34" charset="-120"/>
+              </a:rPr>
+              <a:t>When are fares highest?</a:t>
+            </a:r>
+            <a:endParaRPr lang="en-US" sz="1400" dirty="0"/>
+          </a:p>
+        </p:txBody>
+      </p:sp>
+      <p:sp>
+        <p:nvSpPr>
+          <p:cNvPr id="14" name="Text 12"/>
+          <p:cNvSpPr/>
+          <p:nvPr/>
+        </p:nvSpPr>
+        <p:spPr>
+          <a:xfrm>
+            <a:off x="6380480" y="2387600"/>
+            <a:ext cx="2174062" cy="452120"/>
+          </a:xfrm>
+          <a:prstGeom prst="rect">
+            <a:avLst/>
+          </a:prstGeom>
+          <a:noFill/>
+          <a:ln/>
+        </p:spPr>
+        <p:txBody>
+          <a:bodyPr wrap="square" lIns="0" tIns="0" rIns="0" bIns="0" rtlCol="0" anchor="t">
+            <a:normAutofit/>
+          </a:bodyPr>
+          <a:lstStyle/>
+          <a:p>
+            <a:pPr algn="l" indent="0" marL="0">
+              <a:lnSpc>
+                <a:spcPts val="3360"/>
+              </a:lnSpc>
+              <a:buNone/>
+            </a:pPr>
+            <a:r>
+              <a:rPr lang="en-US" sz="2400" b="1" dirty="0">
+                <a:solidFill>
+                  <a:srgbClr val="1B1C1E"/>
+                </a:solidFill>
+                <a:latin typeface="Space Grotesk" pitchFamily="34" charset="0"/>
+                <a:ea typeface="Space Grotesk" pitchFamily="34" charset="-122"/>
+                <a:cs typeface="Space Grotesk" pitchFamily="34" charset="-120"/>
+              </a:rPr>
+              <a:t>5 AM</a:t>
+            </a:r>
+            <a:endParaRPr lang="en-US" sz="2400" dirty="0"/>
+          </a:p>
+        </p:txBody>
+      </p:sp>
+      <p:sp>
+        <p:nvSpPr>
+          <p:cNvPr id="15" name="Shape 13"/>
+          <p:cNvSpPr/>
+          <p:nvPr/>
+        </p:nvSpPr>
+        <p:spPr>
+          <a:xfrm>
+            <a:off x="8855075" y="1567814"/>
+            <a:ext cx="2520950" cy="1682750"/>
+          </a:xfrm>
+          <a:prstGeom prst="roundRect">
+            <a:avLst>
+              <a:gd name="adj" fmla="val 5849"/>
+            </a:avLst>
+          </a:prstGeom>
+          <a:solidFill>
+            <a:srgbClr val="FFFFFF"/>
+          </a:solidFill>
+          <a:ln w="6350">
+            <a:solidFill>
+              <a:srgbClr val="E2DED2"/>
+            </a:solidFill>
+            <a:prstDash val="solid"/>
+          </a:ln>
+        </p:spPr>
+      </p:sp>
+      <p:sp>
+        <p:nvSpPr>
+          <p:cNvPr id="16" name="Text 14"/>
+          <p:cNvSpPr/>
+          <p:nvPr/>
+        </p:nvSpPr>
+        <p:spPr>
+          <a:xfrm>
+            <a:off x="9060180" y="1772921"/>
+            <a:ext cx="2174062" cy="256540"/>
+          </a:xfrm>
+          <a:prstGeom prst="rect">
+            <a:avLst/>
+          </a:prstGeom>
+          <a:noFill/>
+          <a:ln/>
+        </p:spPr>
+        <p:txBody>
+          <a:bodyPr wrap="square" lIns="0" tIns="0" rIns="0" bIns="0" rtlCol="0" anchor="t">
+            <a:normAutofit/>
+          </a:bodyPr>
+          <a:lstStyle/>
+          <a:p>
+            <a:pPr algn="l" indent="0" marL="0">
+              <a:lnSpc>
+                <a:spcPts val="1820"/>
+              </a:lnSpc>
+              <a:buNone/>
+            </a:pPr>
+            <a:r>
+              <a:rPr lang="en-US" sz="1300" b="1" dirty="0">
+                <a:solidFill>
+                  <a:srgbClr val="8A5A00"/>
+                </a:solidFill>
+                <a:latin typeface="IBM Plex Sans" pitchFamily="34" charset="0"/>
+                <a:ea typeface="IBM Plex Sans" pitchFamily="34" charset="-122"/>
+                <a:cs typeface="IBM Plex Sans" pitchFamily="34" charset="-120"/>
+              </a:rPr>
+              <a:t>Q4</a:t>
+            </a:r>
+            <a:endParaRPr lang="en-US" sz="1300" dirty="0"/>
+          </a:p>
+        </p:txBody>
+      </p:sp>
+      <p:sp>
+        <p:nvSpPr>
+          <p:cNvPr id="17" name="Text 15"/>
+          <p:cNvSpPr/>
+          <p:nvPr/>
+        </p:nvSpPr>
+        <p:spPr>
+          <a:xfrm>
+            <a:off x="9060180" y="2080261"/>
+            <a:ext cx="2174062" cy="487680"/>
+          </a:xfrm>
+          <a:prstGeom prst="rect">
+            <a:avLst/>
+          </a:prstGeom>
+          <a:noFill/>
+          <a:ln/>
+        </p:spPr>
+        <p:txBody>
+          <a:bodyPr wrap="square" lIns="0" tIns="0" rIns="0" bIns="0" rtlCol="0" anchor="t">
+            <a:normAutofit/>
+          </a:bodyPr>
+          <a:lstStyle/>
+          <a:p>
+            <a:pPr algn="l" indent="0" marL="0">
+              <a:lnSpc>
+                <a:spcPts val="1820"/>
+              </a:lnSpc>
+              <a:buNone/>
+            </a:pPr>
+            <a:r>
+              <a:rPr lang="en-US" sz="1400" dirty="0">
+                <a:solidFill>
+                  <a:srgbClr val="1B1C1E"/>
+                </a:solidFill>
+                <a:latin typeface="IBM Plex Sans" pitchFamily="34" charset="0"/>
+                <a:ea typeface="IBM Plex Sans" pitchFamily="34" charset="-122"/>
+                <a:cs typeface="IBM Plex Sans" pitchFamily="34" charset="-120"/>
+              </a:rPr>
+              <a:t>Does traffic affect the fare?</a:t>
+            </a:r>
+            <a:endParaRPr lang="en-US" sz="1400" dirty="0"/>
+          </a:p>
+        </p:txBody>
+      </p:sp>
+      <p:sp>
+        <p:nvSpPr>
+          <p:cNvPr id="18" name="Text 16"/>
+          <p:cNvSpPr/>
+          <p:nvPr/>
+        </p:nvSpPr>
+        <p:spPr>
+          <a:xfrm>
+            <a:off x="9060180" y="2618739"/>
+            <a:ext cx="2174062" cy="452120"/>
+          </a:xfrm>
+          <a:prstGeom prst="rect">
+            <a:avLst/>
+          </a:prstGeom>
+          <a:noFill/>
+          <a:ln/>
+        </p:spPr>
+        <p:txBody>
+          <a:bodyPr wrap="square" lIns="0" tIns="0" rIns="0" bIns="0" rtlCol="0" anchor="t">
+            <a:normAutofit/>
+          </a:bodyPr>
+          <a:lstStyle/>
+          <a:p>
+            <a:pPr algn="l" indent="0" marL="0">
+              <a:lnSpc>
+                <a:spcPts val="3360"/>
+              </a:lnSpc>
+              <a:buNone/>
+            </a:pPr>
+            <a:r>
+              <a:rPr lang="en-US" sz="2400" b="1" dirty="0">
+                <a:solidFill>
+                  <a:srgbClr val="1B1C1E"/>
+                </a:solidFill>
+                <a:latin typeface="Space Grotesk" pitchFamily="34" charset="0"/>
+                <a:ea typeface="Space Grotesk" pitchFamily="34" charset="-122"/>
+                <a:cs typeface="Space Grotesk" pitchFamily="34" charset="-120"/>
+              </a:rPr>
+              <a:t>No</a:t>
+            </a:r>
+            <a:endParaRPr lang="en-US" sz="2400" dirty="0"/>
+          </a:p>
+        </p:txBody>
+      </p:sp>
+      <p:sp>
+        <p:nvSpPr>
+          <p:cNvPr id="19" name="Shape 17"/>
+          <p:cNvSpPr/>
+          <p:nvPr/>
+        </p:nvSpPr>
+        <p:spPr>
+          <a:xfrm>
+            <a:off x="815975" y="3409314"/>
+            <a:ext cx="2520950" cy="1682750"/>
+          </a:xfrm>
+          <a:prstGeom prst="roundRect">
+            <a:avLst>
+              <a:gd name="adj" fmla="val 5849"/>
+            </a:avLst>
+          </a:prstGeom>
+          <a:solidFill>
+            <a:srgbClr val="FFFFFF"/>
+          </a:solidFill>
+          <a:ln w="6350">
+            <a:solidFill>
+              <a:srgbClr val="E2DED2"/>
+            </a:solidFill>
+            <a:prstDash val="solid"/>
+          </a:ln>
+        </p:spPr>
+      </p:sp>
+      <p:sp>
+        <p:nvSpPr>
+          <p:cNvPr id="20" name="Text 18"/>
+          <p:cNvSpPr/>
+          <p:nvPr/>
+        </p:nvSpPr>
+        <p:spPr>
+          <a:xfrm>
+            <a:off x="1021080" y="3614421"/>
+            <a:ext cx="2174062" cy="256540"/>
+          </a:xfrm>
+          <a:prstGeom prst="rect">
+            <a:avLst/>
+          </a:prstGeom>
+          <a:noFill/>
+          <a:ln/>
+        </p:spPr>
+        <p:txBody>
+          <a:bodyPr wrap="square" lIns="0" tIns="0" rIns="0" bIns="0" rtlCol="0" anchor="t">
+            <a:normAutofit/>
+          </a:bodyPr>
+          <a:lstStyle/>
+          <a:p>
+            <a:pPr algn="l" indent="0" marL="0">
+              <a:lnSpc>
+                <a:spcPts val="1820"/>
+              </a:lnSpc>
+              <a:buNone/>
+            </a:pPr>
+            <a:r>
+              <a:rPr lang="en-US" sz="1300" b="1" dirty="0">
+                <a:solidFill>
+                  <a:srgbClr val="8A5A00"/>
+                </a:solidFill>
+                <a:latin typeface="IBM Plex Sans" pitchFamily="34" charset="0"/>
+                <a:ea typeface="IBM Plex Sans" pitchFamily="34" charset="-122"/>
+                <a:cs typeface="IBM Plex Sans" pitchFamily="34" charset="-120"/>
+              </a:rPr>
+              <a:t>Q5</a:t>
+            </a:r>
+            <a:endParaRPr lang="en-US" sz="1300" dirty="0"/>
+          </a:p>
+        </p:txBody>
+      </p:sp>
+      <p:sp>
+        <p:nvSpPr>
+          <p:cNvPr id="21" name="Text 19"/>
+          <p:cNvSpPr/>
+          <p:nvPr/>
+        </p:nvSpPr>
+        <p:spPr>
+          <a:xfrm>
+            <a:off x="1021080" y="3921761"/>
+            <a:ext cx="2174062" cy="487680"/>
+          </a:xfrm>
+          <a:prstGeom prst="rect">
+            <a:avLst/>
+          </a:prstGeom>
+          <a:noFill/>
+          <a:ln/>
+        </p:spPr>
+        <p:txBody>
+          <a:bodyPr wrap="square" lIns="0" tIns="0" rIns="0" bIns="0" rtlCol="0" anchor="t">
+            <a:normAutofit/>
+          </a:bodyPr>
+          <a:lstStyle/>
+          <a:p>
+            <a:pPr algn="l" indent="0" marL="0">
+              <a:lnSpc>
+                <a:spcPts val="1820"/>
+              </a:lnSpc>
+              <a:buNone/>
+            </a:pPr>
+            <a:r>
+              <a:rPr lang="en-US" sz="1400" dirty="0">
+                <a:solidFill>
+                  <a:srgbClr val="1B1C1E"/>
+                </a:solidFill>
+                <a:latin typeface="IBM Plex Sans" pitchFamily="34" charset="0"/>
+                <a:ea typeface="IBM Plex Sans" pitchFamily="34" charset="-122"/>
+                <a:cs typeface="IBM Plex Sans" pitchFamily="34" charset="-120"/>
+              </a:rPr>
+              <a:t>Is distance the strongest predictor?</a:t>
+            </a:r>
+            <a:endParaRPr lang="en-US" sz="1400" dirty="0"/>
+          </a:p>
+        </p:txBody>
+      </p:sp>
+      <p:sp>
+        <p:nvSpPr>
+          <p:cNvPr id="22" name="Text 20"/>
+          <p:cNvSpPr/>
+          <p:nvPr/>
+        </p:nvSpPr>
+        <p:spPr>
+          <a:xfrm>
+            <a:off x="1021080" y="4460239"/>
+            <a:ext cx="2174062" cy="452120"/>
+          </a:xfrm>
+          <a:prstGeom prst="rect">
+            <a:avLst/>
+          </a:prstGeom>
+          <a:noFill/>
+          <a:ln/>
+        </p:spPr>
+        <p:txBody>
+          <a:bodyPr wrap="square" lIns="0" tIns="0" rIns="0" bIns="0" rtlCol="0" anchor="t">
+            <a:normAutofit/>
+          </a:bodyPr>
+          <a:lstStyle/>
+          <a:p>
+            <a:pPr algn="l" indent="0" marL="0">
+              <a:lnSpc>
+                <a:spcPts val="3360"/>
+              </a:lnSpc>
+              <a:buNone/>
+            </a:pPr>
+            <a:r>
+              <a:rPr lang="en-US" sz="2400" b="1" dirty="0">
+                <a:solidFill>
+                  <a:srgbClr val="1B1C1E"/>
+                </a:solidFill>
+                <a:latin typeface="Space Grotesk" pitchFamily="34" charset="0"/>
+                <a:ea typeface="Space Grotesk" pitchFamily="34" charset="-122"/>
+                <a:cs typeface="Space Grotesk" pitchFamily="34" charset="-120"/>
+              </a:rPr>
+              <a:t>Yes</a:t>
+            </a:r>
+            <a:endParaRPr lang="en-US" sz="2400" dirty="0"/>
+          </a:p>
+        </p:txBody>
+      </p:sp>
+      <p:sp>
+        <p:nvSpPr>
+          <p:cNvPr id="23" name="Shape 21"/>
+          <p:cNvSpPr/>
+          <p:nvPr/>
+        </p:nvSpPr>
+        <p:spPr>
+          <a:xfrm>
+            <a:off x="3495675" y="3409314"/>
+            <a:ext cx="2520950" cy="1682750"/>
+          </a:xfrm>
+          <a:prstGeom prst="roundRect">
+            <a:avLst>
+              <a:gd name="adj" fmla="val 5849"/>
+            </a:avLst>
+          </a:prstGeom>
+          <a:solidFill>
+            <a:srgbClr val="FFFFFF"/>
+          </a:solidFill>
+          <a:ln w="6350">
+            <a:solidFill>
+              <a:srgbClr val="E2DED2"/>
+            </a:solidFill>
+            <a:prstDash val="solid"/>
+          </a:ln>
+        </p:spPr>
+      </p:sp>
+      <p:sp>
+        <p:nvSpPr>
+          <p:cNvPr id="24" name="Text 22"/>
+          <p:cNvSpPr/>
+          <p:nvPr/>
+        </p:nvSpPr>
+        <p:spPr>
+          <a:xfrm>
+            <a:off x="3700780" y="3614421"/>
+            <a:ext cx="2174062" cy="256540"/>
+          </a:xfrm>
+          <a:prstGeom prst="rect">
+            <a:avLst/>
+          </a:prstGeom>
+          <a:noFill/>
+          <a:ln/>
+        </p:spPr>
+        <p:txBody>
+          <a:bodyPr wrap="square" lIns="0" tIns="0" rIns="0" bIns="0" rtlCol="0" anchor="t">
+            <a:normAutofit/>
+          </a:bodyPr>
+          <a:lstStyle/>
+          <a:p>
+            <a:pPr algn="l" indent="0" marL="0">
+              <a:lnSpc>
+                <a:spcPts val="1820"/>
+              </a:lnSpc>
+              <a:buNone/>
+            </a:pPr>
+            <a:r>
+              <a:rPr lang="en-US" sz="1300" b="1" dirty="0">
+                <a:solidFill>
+                  <a:srgbClr val="8A5A00"/>
+                </a:solidFill>
+                <a:latin typeface="IBM Plex Sans" pitchFamily="34" charset="0"/>
+                <a:ea typeface="IBM Plex Sans" pitchFamily="34" charset="-122"/>
+                <a:cs typeface="IBM Plex Sans" pitchFamily="34" charset="-120"/>
+              </a:rPr>
+              <a:t>Q6</a:t>
+            </a:r>
+            <a:endParaRPr lang="en-US" sz="1300" dirty="0"/>
+          </a:p>
+        </p:txBody>
+      </p:sp>
+      <p:sp>
+        <p:nvSpPr>
+          <p:cNvPr id="25" name="Text 23"/>
+          <p:cNvSpPr/>
+          <p:nvPr/>
+        </p:nvSpPr>
+        <p:spPr>
+          <a:xfrm>
+            <a:off x="3700780" y="3921761"/>
+            <a:ext cx="2174062" cy="487680"/>
+          </a:xfrm>
+          <a:prstGeom prst="rect">
+            <a:avLst/>
+          </a:prstGeom>
+          <a:noFill/>
+          <a:ln/>
+        </p:spPr>
+        <p:txBody>
+          <a:bodyPr wrap="square" lIns="0" tIns="0" rIns="0" bIns="0" rtlCol="0" anchor="t">
+            <a:normAutofit/>
+          </a:bodyPr>
+          <a:lstStyle/>
+          <a:p>
+            <a:pPr algn="l" indent="0" marL="0">
+              <a:lnSpc>
+                <a:spcPts val="1820"/>
+              </a:lnSpc>
+              <a:buNone/>
+            </a:pPr>
+            <a:r>
+              <a:rPr lang="en-US" sz="1400" dirty="0">
+                <a:solidFill>
+                  <a:srgbClr val="1B1C1E"/>
+                </a:solidFill>
+                <a:latin typeface="IBM Plex Sans" pitchFamily="34" charset="0"/>
+                <a:ea typeface="IBM Plex Sans" pitchFamily="34" charset="-122"/>
+                <a:cs typeface="IBM Plex Sans" pitchFamily="34" charset="-120"/>
+              </a:rPr>
+              <a:t>When are rides most requested?</a:t>
+            </a:r>
+            <a:endParaRPr lang="en-US" sz="1400" dirty="0"/>
+          </a:p>
+        </p:txBody>
+      </p:sp>
+      <p:sp>
+        <p:nvSpPr>
+          <p:cNvPr id="26" name="Text 24"/>
+          <p:cNvSpPr/>
+          <p:nvPr/>
+        </p:nvSpPr>
+        <p:spPr>
+          <a:xfrm>
+            <a:off x="3700780" y="4460239"/>
+            <a:ext cx="2174062" cy="452120"/>
+          </a:xfrm>
+          <a:prstGeom prst="rect">
+            <a:avLst/>
+          </a:prstGeom>
+          <a:noFill/>
+          <a:ln/>
+        </p:spPr>
+        <p:txBody>
+          <a:bodyPr wrap="square" lIns="0" tIns="0" rIns="0" bIns="0" rtlCol="0" anchor="t">
+            <a:normAutofit/>
+          </a:bodyPr>
+          <a:lstStyle/>
+          <a:p>
+            <a:pPr algn="l" indent="0" marL="0">
+              <a:lnSpc>
+                <a:spcPts val="3360"/>
+              </a:lnSpc>
+              <a:buNone/>
+            </a:pPr>
+            <a:r>
+              <a:rPr lang="en-US" sz="2400" b="1" dirty="0">
+                <a:solidFill>
+                  <a:srgbClr val="1B1C1E"/>
+                </a:solidFill>
+                <a:latin typeface="Space Grotesk" pitchFamily="34" charset="0"/>
+                <a:ea typeface="Space Grotesk" pitchFamily="34" charset="-122"/>
+                <a:cs typeface="Space Grotesk" pitchFamily="34" charset="-120"/>
+              </a:rPr>
+              <a:t>7 PM</a:t>
+            </a:r>
+            <a:endParaRPr lang="en-US" sz="2400" dirty="0"/>
+          </a:p>
+        </p:txBody>
+      </p:sp>
+      <p:sp>
+        <p:nvSpPr>
+          <p:cNvPr id="27" name="Shape 25"/>
+          <p:cNvSpPr/>
+          <p:nvPr/>
+        </p:nvSpPr>
+        <p:spPr>
+          <a:xfrm>
+            <a:off x="6175375" y="3409314"/>
+            <a:ext cx="2520950" cy="1682750"/>
+          </a:xfrm>
+          <a:prstGeom prst="roundRect">
+            <a:avLst>
+              <a:gd name="adj" fmla="val 5849"/>
+            </a:avLst>
+          </a:prstGeom>
+          <a:solidFill>
+            <a:srgbClr val="FFFFFF"/>
+          </a:solidFill>
+          <a:ln w="6350">
+            <a:solidFill>
+              <a:srgbClr val="E2DED2"/>
+            </a:solidFill>
+            <a:prstDash val="solid"/>
+          </a:ln>
+        </p:spPr>
+      </p:sp>
+      <p:sp>
+        <p:nvSpPr>
+          <p:cNvPr id="28" name="Text 26"/>
+          <p:cNvSpPr/>
+          <p:nvPr/>
+        </p:nvSpPr>
+        <p:spPr>
+          <a:xfrm>
+            <a:off x="6380480" y="3614421"/>
+            <a:ext cx="2174062" cy="256540"/>
+          </a:xfrm>
+          <a:prstGeom prst="rect">
+            <a:avLst/>
+          </a:prstGeom>
+          <a:noFill/>
+          <a:ln/>
+        </p:spPr>
+        <p:txBody>
+          <a:bodyPr wrap="square" lIns="0" tIns="0" rIns="0" bIns="0" rtlCol="0" anchor="t">
+            <a:normAutofit/>
+          </a:bodyPr>
+          <a:lstStyle/>
+          <a:p>
+            <a:pPr algn="l" indent="0" marL="0">
+              <a:lnSpc>
+                <a:spcPts val="1820"/>
+              </a:lnSpc>
+              <a:buNone/>
+            </a:pPr>
+            <a:r>
+              <a:rPr lang="en-US" sz="1300" b="1" dirty="0">
+                <a:solidFill>
+                  <a:srgbClr val="8A5A00"/>
+                </a:solidFill>
+                <a:latin typeface="IBM Plex Sans" pitchFamily="34" charset="0"/>
+                <a:ea typeface="IBM Plex Sans" pitchFamily="34" charset="-122"/>
+                <a:cs typeface="IBM Plex Sans" pitchFamily="34" charset="-120"/>
+              </a:rPr>
+              <a:t>Q7</a:t>
+            </a:r>
+            <a:endParaRPr lang="en-US" sz="1300" dirty="0"/>
+          </a:p>
+        </p:txBody>
+      </p:sp>
+      <p:sp>
+        <p:nvSpPr>
+          <p:cNvPr id="29" name="Text 27"/>
+          <p:cNvSpPr/>
+          <p:nvPr/>
+        </p:nvSpPr>
+        <p:spPr>
+          <a:xfrm>
+            <a:off x="6380480" y="3921761"/>
+            <a:ext cx="2174062" cy="487680"/>
+          </a:xfrm>
+          <a:prstGeom prst="rect">
+            <a:avLst/>
+          </a:prstGeom>
+          <a:noFill/>
+          <a:ln/>
+        </p:spPr>
+        <p:txBody>
+          <a:bodyPr wrap="square" lIns="0" tIns="0" rIns="0" bIns="0" rtlCol="0" anchor="t">
+            <a:normAutofit/>
+          </a:bodyPr>
+          <a:lstStyle/>
+          <a:p>
+            <a:pPr algn="l" indent="0" marL="0">
+              <a:lnSpc>
+                <a:spcPts val="1820"/>
+              </a:lnSpc>
+              <a:buNone/>
+            </a:pPr>
+            <a:r>
+              <a:rPr lang="en-US" sz="1400" dirty="0">
+                <a:solidFill>
+                  <a:srgbClr val="1B1C1E"/>
+                </a:solidFill>
+                <a:latin typeface="IBM Plex Sans" pitchFamily="34" charset="0"/>
+                <a:ea typeface="IBM Plex Sans" pitchFamily="34" charset="-122"/>
+                <a:cs typeface="IBM Plex Sans" pitchFamily="34" charset="-120"/>
+              </a:rPr>
+              <a:t>Does weather change trip distance?</a:t>
+            </a:r>
+            <a:endParaRPr lang="en-US" sz="1400" dirty="0"/>
+          </a:p>
+        </p:txBody>
+      </p:sp>
+      <p:sp>
+        <p:nvSpPr>
+          <p:cNvPr id="30" name="Text 28"/>
+          <p:cNvSpPr/>
+          <p:nvPr/>
+        </p:nvSpPr>
+        <p:spPr>
+          <a:xfrm>
+            <a:off x="6380480" y="4460239"/>
+            <a:ext cx="2174062" cy="452120"/>
+          </a:xfrm>
+          <a:prstGeom prst="rect">
+            <a:avLst/>
+          </a:prstGeom>
+          <a:noFill/>
+          <a:ln/>
+        </p:spPr>
+        <p:txBody>
+          <a:bodyPr wrap="square" lIns="0" tIns="0" rIns="0" bIns="0" rtlCol="0" anchor="t">
+            <a:normAutofit/>
+          </a:bodyPr>
+          <a:lstStyle/>
+          <a:p>
+            <a:pPr algn="l" indent="0" marL="0">
+              <a:lnSpc>
+                <a:spcPts val="3360"/>
+              </a:lnSpc>
+              <a:buNone/>
+            </a:pPr>
+            <a:r>
+              <a:rPr lang="en-US" sz="2400" b="1" dirty="0">
+                <a:solidFill>
+                  <a:srgbClr val="1B1C1E"/>
+                </a:solidFill>
+                <a:latin typeface="Space Grotesk" pitchFamily="34" charset="0"/>
+                <a:ea typeface="Space Grotesk" pitchFamily="34" charset="-122"/>
+                <a:cs typeface="Space Grotesk" pitchFamily="34" charset="-120"/>
+              </a:rPr>
+              <a:t>No</a:t>
+            </a:r>
+            <a:endParaRPr lang="en-US" sz="2400" dirty="0"/>
+          </a:p>
+        </p:txBody>
+      </p:sp>
+      <p:sp>
+        <p:nvSpPr>
+          <p:cNvPr id="31" name="Shape 29"/>
+          <p:cNvSpPr/>
+          <p:nvPr/>
+        </p:nvSpPr>
+        <p:spPr>
+          <a:xfrm>
+            <a:off x="8855075" y="3409314"/>
+            <a:ext cx="2520950" cy="1682750"/>
+          </a:xfrm>
+          <a:prstGeom prst="roundRect">
+            <a:avLst>
+              <a:gd name="adj" fmla="val 5849"/>
+            </a:avLst>
+          </a:prstGeom>
+          <a:solidFill>
+            <a:srgbClr val="FFFFFF"/>
+          </a:solidFill>
+          <a:ln w="6350">
+            <a:solidFill>
+              <a:srgbClr val="E2DED2"/>
+            </a:solidFill>
+            <a:prstDash val="solid"/>
+          </a:ln>
+        </p:spPr>
+      </p:sp>
+      <p:sp>
+        <p:nvSpPr>
+          <p:cNvPr id="32" name="Text 30"/>
+          <p:cNvSpPr/>
+          <p:nvPr/>
+        </p:nvSpPr>
+        <p:spPr>
+          <a:xfrm>
+            <a:off x="9060180" y="3614421"/>
+            <a:ext cx="2174062" cy="256540"/>
+          </a:xfrm>
+          <a:prstGeom prst="rect">
+            <a:avLst/>
+          </a:prstGeom>
+          <a:noFill/>
+          <a:ln/>
+        </p:spPr>
+        <p:txBody>
+          <a:bodyPr wrap="square" lIns="0" tIns="0" rIns="0" bIns="0" rtlCol="0" anchor="t">
+            <a:normAutofit/>
+          </a:bodyPr>
+          <a:lstStyle/>
+          <a:p>
+            <a:pPr algn="l" indent="0" marL="0">
+              <a:lnSpc>
+                <a:spcPts val="1820"/>
+              </a:lnSpc>
+              <a:buNone/>
+            </a:pPr>
+            <a:r>
+              <a:rPr lang="en-US" sz="1300" b="1" dirty="0">
+                <a:solidFill>
+                  <a:srgbClr val="8A5A00"/>
+                </a:solidFill>
+                <a:latin typeface="IBM Plex Sans" pitchFamily="34" charset="0"/>
+                <a:ea typeface="IBM Plex Sans" pitchFamily="34" charset="-122"/>
+                <a:cs typeface="IBM Plex Sans" pitchFamily="34" charset="-120"/>
+              </a:rPr>
+              <a:t>Q8</a:t>
+            </a:r>
+            <a:endParaRPr lang="en-US" sz="1300" dirty="0"/>
+          </a:p>
+        </p:txBody>
+      </p:sp>
+      <p:sp>
+        <p:nvSpPr>
+          <p:cNvPr id="33" name="Text 31"/>
+          <p:cNvSpPr/>
+          <p:nvPr/>
+        </p:nvSpPr>
+        <p:spPr>
+          <a:xfrm>
+            <a:off x="9060180" y="3921761"/>
+            <a:ext cx="2174062" cy="487680"/>
+          </a:xfrm>
+          <a:prstGeom prst="rect">
+            <a:avLst/>
+          </a:prstGeom>
+          <a:noFill/>
+          <a:ln/>
+        </p:spPr>
+        <p:txBody>
+          <a:bodyPr wrap="square" lIns="0" tIns="0" rIns="0" bIns="0" rtlCol="0" anchor="t">
+            <a:normAutofit/>
+          </a:bodyPr>
+          <a:lstStyle/>
+          <a:p>
+            <a:pPr algn="l" indent="0" marL="0">
+              <a:lnSpc>
+                <a:spcPts val="1820"/>
+              </a:lnSpc>
+              <a:buNone/>
+            </a:pPr>
+            <a:r>
+              <a:rPr lang="en-US" sz="1400" dirty="0">
+                <a:solidFill>
+                  <a:srgbClr val="1B1C1E"/>
+                </a:solidFill>
+                <a:latin typeface="IBM Plex Sans" pitchFamily="34" charset="0"/>
+                <a:ea typeface="IBM Plex Sans" pitchFamily="34" charset="-122"/>
+                <a:cs typeface="IBM Plex Sans" pitchFamily="34" charset="-120"/>
+              </a:rPr>
+              <a:t>Are airport pickups pricier?</a:t>
+            </a:r>
+            <a:endParaRPr lang="en-US" sz="1400" dirty="0"/>
+          </a:p>
+        </p:txBody>
+      </p:sp>
+      <p:sp>
+        <p:nvSpPr>
+          <p:cNvPr id="34" name="Text 32"/>
+          <p:cNvSpPr/>
+          <p:nvPr/>
+        </p:nvSpPr>
+        <p:spPr>
+          <a:xfrm>
+            <a:off x="9060180" y="4460239"/>
+            <a:ext cx="2174062" cy="452120"/>
+          </a:xfrm>
+          <a:prstGeom prst="rect">
+            <a:avLst/>
+          </a:prstGeom>
+          <a:noFill/>
+          <a:ln/>
+        </p:spPr>
+        <p:txBody>
+          <a:bodyPr wrap="square" lIns="0" tIns="0" rIns="0" bIns="0" rtlCol="0" anchor="t">
+            <a:normAutofit/>
+          </a:bodyPr>
+          <a:lstStyle/>
+          <a:p>
+            <a:pPr algn="l" indent="0" marL="0">
+              <a:lnSpc>
+                <a:spcPts val="3360"/>
+              </a:lnSpc>
+              <a:buNone/>
+            </a:pPr>
+            <a:r>
+              <a:rPr lang="en-US" sz="2400" b="1" dirty="0">
+                <a:solidFill>
+                  <a:srgbClr val="1B1C1E"/>
+                </a:solidFill>
+                <a:latin typeface="Space Grotesk" pitchFamily="34" charset="0"/>
+                <a:ea typeface="Space Grotesk" pitchFamily="34" charset="-122"/>
+                <a:cs typeface="Space Grotesk" pitchFamily="34" charset="-120"/>
+              </a:rPr>
+              <a:t>Yes</a:t>
+            </a:r>
+            <a:endParaRPr lang="en-US" sz="2400" dirty="0"/>
           </a:p>
         </p:txBody>
       </p:sp>
@@ -8333,7 +9017,7 @@
                 <a:ea typeface="IBM Plex Sans" pitchFamily="34" charset="-122"/>
                 <a:cs typeface="IBM Plex Sans" pitchFamily="34" charset="-120"/>
               </a:rPr>
-              <a:t>QUESTION 2</a:t>
+              <a:t>QUESTION 1</a:t>
             </a:r>
             <a:endParaRPr lang="en-US" sz="1400" dirty="0"/>
           </a:p>
@@ -8377,7 +9061,7 @@
                 <a:ea typeface="Space Grotesk" pitchFamily="34" charset="-122"/>
                 <a:cs typeface="Space Grotesk" pitchFamily="34" charset="-120"/>
               </a:rPr>
-              <a:t>Does car condition influence the fare amount?</a:t>
+              <a:t>Is higher passenger count associated with a higher fare?</a:t>
             </a:r>
             <a:endParaRPr lang="en-US" sz="2800" dirty="0"/>
           </a:p>
@@ -8503,7 +9187,7 @@
         <p:spPr>
           <a:xfrm>
             <a:off x="812800" y="2750821"/>
-            <a:ext cx="3976624" cy="854075"/>
+            <a:ext cx="3976624" cy="577850"/>
           </a:xfrm>
           <a:prstGeom prst="rect">
             <a:avLst/>
@@ -8532,7 +9216,7 @@
                 <a:ea typeface="IBM Plex Sans" pitchFamily="34" charset="-122"/>
                 <a:cs typeface="IBM Plex Sans" pitchFamily="34" charset="-120"/>
               </a:rPr>
-              <a:t>Median fare and spread are nearly identical across Bad, Good, Very Good and Excellent cars (~125k trips each).</a:t>
+              <a:t>Median fare is 8.5 for 1 to 5 passengers and 9.0 for 6. The correlation is just 0.015.</a:t>
             </a:r>
             <a:endParaRPr lang="en-US" sz="1500" dirty="0"/>
           </a:p>
@@ -8546,8 +9230,8 @@
         </p:nvSpPr>
         <p:spPr>
           <a:xfrm>
-            <a:off x="812800" y="3757296"/>
-            <a:ext cx="3976624" cy="264795"/>
+            <a:off x="812800" y="3481071"/>
+            <a:ext cx="3976624" cy="743585"/>
           </a:xfrm>
           <a:prstGeom prst="rect">
             <a:avLst/>
@@ -8576,7 +9260,7 @@
                 <a:ea typeface="IBM Plex Sans" pitchFamily="34" charset="-122"/>
                 <a:cs typeface="IBM Plex Sans" pitchFamily="34" charset="-120"/>
               </a:rPr>
-              <a:t>Car condition is not a pricing factor in this data.</a:t>
+              <a:t>Fares are charged per trip, not per person. The small bump for 6 passengers comes from only ~10k trips.</a:t>
             </a:r>
             <a:endParaRPr lang="en-US" sz="1300" dirty="0"/>
           </a:p>
@@ -8606,7 +9290,7 @@
       </p:sp>
       <p:pic>
         <p:nvPicPr>
-          <p:cNvPr id="10" name="Image 0" descr="Box plot · fare by car condition (y capped at 99th pct.)">    </p:cNvPr>
+          <p:cNvPr id="10" name="Image 0" descr="Box plot · fare by passenger count (cleaned data)">    </p:cNvPr>
           <p:cNvPicPr>
             <a:picLocks noChangeAspect="1"/>
           </p:cNvPicPr>
@@ -8620,8 +9304,8 @@
         </p:blipFill>
         <p:spPr>
           <a:xfrm>
-            <a:off x="5480329" y="1764032"/>
-            <a:ext cx="5447743" cy="3543300"/>
+            <a:off x="5492556" y="1764032"/>
+            <a:ext cx="5423288" cy="3543300"/>
           </a:xfrm>
           <a:prstGeom prst="rect">
             <a:avLst/>
@@ -8691,7 +9375,7 @@
                 <a:ea typeface="IBM Plex Sans" pitchFamily="34" charset="-122"/>
                 <a:cs typeface="IBM Plex Sans" pitchFamily="34" charset="-120"/>
               </a:rPr>
-              <a:t>Box plot · fare by car condition (y capped at 99th pct.)</a:t>
+              <a:t>Box plot · fare by passenger count (cleaned data)</a:t>
             </a:r>
             <a:endParaRPr lang="en-US" sz="1200" dirty="0"/>
           </a:p>
@@ -8735,7 +9419,7 @@
                 <a:ea typeface="IBM Plex Sans" pitchFamily="34" charset="-122"/>
                 <a:cs typeface="IBM Plex Sans" pitchFamily="34" charset="-120"/>
               </a:rPr>
-              <a:t>Q2 of 8 · NYC taxi fares EDA</a:t>
+              <a:t>Q1 of 8 · NYC taxi fares EDA</a:t>
             </a:r>
             <a:endParaRPr lang="en-US" sz="1200" dirty="0"/>
           </a:p>
@@ -8811,7 +9495,7 @@
                 <a:ea typeface="IBM Plex Sans" pitchFamily="34" charset="-122"/>
                 <a:cs typeface="IBM Plex Sans" pitchFamily="34" charset="-120"/>
               </a:rPr>
-              <a:t>QUESTION 3</a:t>
+              <a:t>QUESTION 2</a:t>
             </a:r>
             <a:endParaRPr lang="en-US" sz="1400" dirty="0"/>
           </a:p>
@@ -8855,7 +9539,7 @@
                 <a:ea typeface="Space Grotesk" pitchFamily="34" charset="-122"/>
                 <a:cs typeface="Space Grotesk" pitchFamily="34" charset="-120"/>
               </a:rPr>
-              <a:t>At what hour of the day are fares highest?</a:t>
+              <a:t>Does car condition influence the fare amount?</a:t>
             </a:r>
             <a:endParaRPr lang="en-US" sz="2800" dirty="0"/>
           </a:p>
@@ -8966,7 +9650,7 @@
                 <a:ea typeface="Space Grotesk" pitchFamily="34" charset="-122"/>
                 <a:cs typeface="Space Grotesk" pitchFamily="34" charset="-120"/>
               </a:rPr>
-              <a:t>5 AM</a:t>
+              <a:t>No</a:t>
             </a:r>
             <a:endParaRPr lang="en-US" sz="4000" dirty="0"/>
           </a:p>
@@ -9010,7 +9694,7 @@
                 <a:ea typeface="IBM Plex Sans" pitchFamily="34" charset="-122"/>
                 <a:cs typeface="IBM Plex Sans" pitchFamily="34" charset="-120"/>
               </a:rPr>
-              <a:t>The average fare peaks at about 15 at 5 AM, far above the rest of the day. The lowest average, about 10.6, is at 7 PM.</a:t>
+              <a:t>All four conditions share a median fare of 8.5, and their means differ by under 0.1 (11.30 to 11.39).</a:t>
             </a:r>
             <a:endParaRPr lang="en-US" sz="1500" dirty="0"/>
           </a:p>
@@ -9025,7 +9709,7 @@
         <p:spPr>
           <a:xfrm>
             <a:off x="812800" y="3757296"/>
-            <a:ext cx="3976624" cy="743585"/>
+            <a:ext cx="3976624" cy="504190"/>
           </a:xfrm>
           <a:prstGeom prst="rect">
             <a:avLst/>
@@ -9054,7 +9738,7 @@
                 <a:ea typeface="IBM Plex Sans" pitchFamily="34" charset="-122"/>
                 <a:cs typeface="IBM Plex Sans" pitchFamily="34" charset="-120"/>
               </a:rPr>
-              <a:t>Note: the notebook text says fares peak at midnight and are lowest at 4–6 AM; the chart shows the opposite for early morning.</a:t>
+              <a:t>About 120k trips per condition. Car condition is not a pricing factor.</a:t>
             </a:r>
             <a:endParaRPr lang="en-US" sz="1300" dirty="0"/>
           </a:p>
@@ -9084,7 +9768,7 @@
       </p:sp>
       <p:pic>
         <p:nvPicPr>
-          <p:cNvPr id="10" name="Image 0" descr="Line plot · average fare by hour">    </p:cNvPr>
+          <p:cNvPr id="10" name="Image 0" descr="Box plot · fare by car condition (cleaned data)">    </p:cNvPr>
           <p:cNvPicPr>
             <a:picLocks noChangeAspect="1"/>
           </p:cNvPicPr>
@@ -9098,37 +9782,12 @@
         </p:blipFill>
         <p:spPr>
           <a:xfrm>
-            <a:off x="5035550" y="1797215"/>
-            <a:ext cx="6337300" cy="3476934"/>
-          </a:xfrm>
-          <a:custGeom>
-            <a:avLst/>
-            <a:gdLst/>
-            <a:ahLst/>
-            <a:cxnLst/>
-            <a:rect l="l" t="t" r="r" b="b"/>
-            <a:pathLst>
-              <a:path w="6337300" h="3476934">
-                <a:moveTo>
-                  <a:pt x="0" y="62067"/>
-                </a:moveTo>
-                <a:arcTo wR="95250" hR="95250" stAng="10800000" swAng="2439838"/>
-                <a:lnTo>
-                  <a:pt x="6314301" y="0"/>
-                </a:lnTo>
-                <a:arcTo wR="95250" hR="95250" stAng="19160162" swAng="2439838"/>
-                <a:lnTo>
-                  <a:pt x="6337300" y="3414867"/>
-                </a:lnTo>
-                <a:arcTo wR="95250" hR="95250" stAng="0" swAng="2439838"/>
-                <a:lnTo>
-                  <a:pt x="22999" y="3476934"/>
-                </a:lnTo>
-                <a:arcTo wR="95250" hR="95250" stAng="8360162" swAng="2439838"/>
-                <a:close/>
-              </a:path>
-            </a:pathLst>
-          </a:custGeom>
+            <a:off x="5492556" y="1764032"/>
+            <a:ext cx="5423288" cy="3543300"/>
+          </a:xfrm>
+          <a:prstGeom prst="rect">
+            <a:avLst/>
+          </a:prstGeom>
         </p:spPr>
       </p:pic>
       <p:sp>
@@ -9194,7 +9853,7 @@
                 <a:ea typeface="IBM Plex Sans" pitchFamily="34" charset="-122"/>
                 <a:cs typeface="IBM Plex Sans" pitchFamily="34" charset="-120"/>
               </a:rPr>
-              <a:t>Line plot · average fare by hour</a:t>
+              <a:t>Box plot · fare by car condition (cleaned data)</a:t>
             </a:r>
             <a:endParaRPr lang="en-US" sz="1200" dirty="0"/>
           </a:p>
@@ -9238,7 +9897,7 @@
                 <a:ea typeface="IBM Plex Sans" pitchFamily="34" charset="-122"/>
                 <a:cs typeface="IBM Plex Sans" pitchFamily="34" charset="-120"/>
               </a:rPr>
-              <a:t>Q3 of 8 · NYC taxi fares EDA</a:t>
+              <a:t>Q2 of 8 · NYC taxi fares EDA</a:t>
             </a:r>
             <a:endParaRPr lang="en-US" sz="1200" dirty="0"/>
           </a:p>
@@ -9314,7 +9973,7 @@
                 <a:ea typeface="IBM Plex Sans" pitchFamily="34" charset="-122"/>
                 <a:cs typeface="IBM Plex Sans" pitchFamily="34" charset="-120"/>
               </a:rPr>
-              <a:t>QUESTION 4</a:t>
+              <a:t>QUESTION 3</a:t>
             </a:r>
             <a:endParaRPr lang="en-US" sz="1400" dirty="0"/>
           </a:p>
@@ -9358,7 +10017,7 @@
                 <a:ea typeface="Space Grotesk" pitchFamily="34" charset="-122"/>
                 <a:cs typeface="Space Grotesk" pitchFamily="34" charset="-120"/>
               </a:rPr>
-              <a:t>Does traffic condition affect the trip fare?</a:t>
+              <a:t>At what hour of the day are fares highest?</a:t>
             </a:r>
             <a:endParaRPr lang="en-US" sz="2800" dirty="0"/>
           </a:p>
@@ -9469,7 +10128,7 @@
                 <a:ea typeface="Space Grotesk" pitchFamily="34" charset="-122"/>
                 <a:cs typeface="Space Grotesk" pitchFamily="34" charset="-120"/>
               </a:rPr>
-              <a:t>No</a:t>
+              <a:t>5 AM</a:t>
             </a:r>
             <a:endParaRPr lang="en-US" sz="4000" dirty="0"/>
           </a:p>
@@ -9484,7 +10143,7 @@
         <p:spPr>
           <a:xfrm>
             <a:off x="812800" y="2750821"/>
-            <a:ext cx="3976624" cy="854075"/>
+            <a:ext cx="3976624" cy="577850"/>
           </a:xfrm>
           <a:prstGeom prst="rect">
             <a:avLst/>
@@ -9513,7 +10172,7 @@
                 <a:ea typeface="IBM Plex Sans" pitchFamily="34" charset="-122"/>
                 <a:cs typeface="IBM Plex Sans" pitchFamily="34" charset="-120"/>
               </a:rPr>
-              <a:t>Flow, Dense and Congested traffic show the same median fare and a similar spread (~166k trips each).</a:t>
+              <a:t>Mean fare peaks at 15.14 at 5 AM and is lowest at 10.59 at 7 PM.</a:t>
             </a:r>
             <a:endParaRPr lang="en-US" sz="1500" dirty="0"/>
           </a:p>
@@ -9527,8 +10186,8 @@
         </p:nvSpPr>
         <p:spPr>
           <a:xfrm>
-            <a:off x="812800" y="3757296"/>
-            <a:ext cx="3976624" cy="264795"/>
+            <a:off x="812800" y="3481071"/>
+            <a:ext cx="3976624" cy="743585"/>
           </a:xfrm>
           <a:prstGeom prst="rect">
             <a:avLst/>
@@ -9557,7 +10216,7 @@
                 <a:ea typeface="IBM Plex Sans" pitchFamily="34" charset="-122"/>
                 <a:cs typeface="IBM Plex Sans" pitchFamily="34" charset="-120"/>
               </a:rPr>
-              <a:t>Traffic labels do not shift fares in this dataset.</a:t>
+              <a:t>Why: trips are longest at 5 AM (5.33 km vs ~3 km by day). The median barely rises, so a few long rides drive the peak.</a:t>
             </a:r>
             <a:endParaRPr lang="en-US" sz="1300" dirty="0"/>
           </a:p>
@@ -9587,7 +10246,7 @@
       </p:sp>
       <p:pic>
         <p:nvPicPr>
-          <p:cNvPr id="10" name="Image 0" descr="Box plot · fare by traffic condition (y capped at 99th pct.)">    </p:cNvPr>
+          <p:cNvPr id="10" name="Image 0" descr="Mean fare, median fare and mean distance by hour">    </p:cNvPr>
           <p:cNvPicPr>
             <a:picLocks noChangeAspect="1"/>
           </p:cNvPicPr>
@@ -9601,8 +10260,8 @@
         </p:blipFill>
         <p:spPr>
           <a:xfrm>
-            <a:off x="5480329" y="1764032"/>
-            <a:ext cx="5447743" cy="3543300"/>
+            <a:off x="5035550" y="1884539"/>
+            <a:ext cx="6337300" cy="3302286"/>
           </a:xfrm>
           <a:prstGeom prst="rect">
             <a:avLst/>
@@ -9672,7 +10331,7 @@
                 <a:ea typeface="IBM Plex Sans" pitchFamily="34" charset="-122"/>
                 <a:cs typeface="IBM Plex Sans" pitchFamily="34" charset="-120"/>
               </a:rPr>
-              <a:t>Box plot · fare by traffic condition (y capped at 99th pct.)</a:t>
+              <a:t>Mean fare, median fare and mean distance by hour</a:t>
             </a:r>
             <a:endParaRPr lang="en-US" sz="1200" dirty="0"/>
           </a:p>
@@ -9716,7 +10375,7 @@
                 <a:ea typeface="IBM Plex Sans" pitchFamily="34" charset="-122"/>
                 <a:cs typeface="IBM Plex Sans" pitchFamily="34" charset="-120"/>
               </a:rPr>
-              <a:t>Q4 of 8 · NYC taxi fares EDA</a:t>
+              <a:t>Q3 of 8 · NYC taxi fares EDA</a:t>
             </a:r>
             <a:endParaRPr lang="en-US" sz="1200" dirty="0"/>
           </a:p>
@@ -9792,7 +10451,7 @@
                 <a:ea typeface="IBM Plex Sans" pitchFamily="34" charset="-122"/>
                 <a:cs typeface="IBM Plex Sans" pitchFamily="34" charset="-120"/>
               </a:rPr>
-              <a:t>QUESTION 5</a:t>
+              <a:t>QUESTION 4</a:t>
             </a:r>
             <a:endParaRPr lang="en-US" sz="1400" dirty="0"/>
           </a:p>
@@ -9836,7 +10495,7 @@
                 <a:ea typeface="Space Grotesk" pitchFamily="34" charset="-122"/>
                 <a:cs typeface="Space Grotesk" pitchFamily="34" charset="-120"/>
               </a:rPr>
-              <a:t>Is trip distance the strongest predictor of fare?</a:t>
+              <a:t>Does traffic condition affect the trip fare?</a:t>
             </a:r>
             <a:endParaRPr lang="en-US" sz="2800" dirty="0"/>
           </a:p>
@@ -9947,7 +10606,7 @@
                 <a:ea typeface="Space Grotesk" pitchFamily="34" charset="-122"/>
                 <a:cs typeface="Space Grotesk" pitchFamily="34" charset="-120"/>
               </a:rPr>
-              <a:t>Yes</a:t>
+              <a:t>No</a:t>
             </a:r>
             <a:endParaRPr lang="en-US" sz="4000" dirty="0"/>
           </a:p>
@@ -9962,7 +10621,7 @@
         <p:spPr>
           <a:xfrm>
             <a:off x="812800" y="2750821"/>
-            <a:ext cx="3976624" cy="1130300"/>
+            <a:ext cx="3976624" cy="854075"/>
           </a:xfrm>
           <a:prstGeom prst="rect">
             <a:avLst/>
@@ -9991,7 +10650,7 @@
                 <a:ea typeface="IBM Plex Sans" pitchFamily="34" charset="-122"/>
                 <a:cs typeface="IBM Plex Sans" pitchFamily="34" charset="-120"/>
               </a:rPr>
-              <a:t>Distance has the highest correlation with fare_amount of any numeric feature: 0.61. The relationship is positive, but outliers blur it.</a:t>
+              <a:t>Flow, Dense and Congested Traffic all have a median fare of 8.5; their means differ by only 0.06.</a:t>
             </a:r>
             <a:endParaRPr lang="en-US" sz="1500" dirty="0"/>
           </a:p>
@@ -10005,7 +10664,7 @@
         </p:nvSpPr>
         <p:spPr>
           <a:xfrm>
-            <a:off x="812800" y="4033521"/>
+            <a:off x="812800" y="3757296"/>
             <a:ext cx="3976624" cy="504190"/>
           </a:xfrm>
           <a:prstGeom prst="rect">
@@ -10035,7 +10694,7 @@
                 <a:ea typeface="IBM Plex Sans" pitchFamily="34" charset="-122"/>
                 <a:cs typeface="IBM Plex Sans" pitchFamily="34" charset="-120"/>
               </a:rPr>
-              <a:t>Outliers: fares up to 500 at near-zero distance, and distances above 8,000 km at low fares.</a:t>
+              <a:t>About 161k trips per level. The traffic label does not shift fares.</a:t>
             </a:r>
             <a:endParaRPr lang="en-US" sz="1300" dirty="0"/>
           </a:p>
@@ -10065,7 +10724,7 @@
       </p:sp>
       <p:pic>
         <p:nvPicPr>
-          <p:cNvPr id="10" name="Image 0" descr="Scatter plot · fare vs. distance">    </p:cNvPr>
+          <p:cNvPr id="10" name="Image 0" descr="Box plot · fare by traffic condition (cleaned data)">    </p:cNvPr>
           <p:cNvPicPr>
             <a:picLocks noChangeAspect="1"/>
           </p:cNvPicPr>
@@ -10079,8 +10738,8 @@
         </p:blipFill>
         <p:spPr>
           <a:xfrm>
-            <a:off x="5451179" y="1764029"/>
-            <a:ext cx="5506042" cy="3543300"/>
+            <a:off x="5492556" y="1764029"/>
+            <a:ext cx="5423288" cy="3543300"/>
           </a:xfrm>
           <a:prstGeom prst="rect">
             <a:avLst/>
@@ -10150,7 +10809,7 @@
                 <a:ea typeface="IBM Plex Sans" pitchFamily="34" charset="-122"/>
                 <a:cs typeface="IBM Plex Sans" pitchFamily="34" charset="-120"/>
               </a:rPr>
-              <a:t>Scatter plot · fare vs. distance</a:t>
+              <a:t>Box plot · fare by traffic condition (cleaned data)</a:t>
             </a:r>
             <a:endParaRPr lang="en-US" sz="1200" dirty="0"/>
           </a:p>
@@ -10194,7 +10853,7 @@
                 <a:ea typeface="IBM Plex Sans" pitchFamily="34" charset="-122"/>
                 <a:cs typeface="IBM Plex Sans" pitchFamily="34" charset="-120"/>
               </a:rPr>
-              <a:t>Q5 of 8 · NYC taxi fares EDA</a:t>
+              <a:t>Q4 of 8 · NYC taxi fares EDA</a:t>
             </a:r>
             <a:endParaRPr lang="en-US" sz="1200" dirty="0"/>
           </a:p>
